--- a/readings/standards/Human Factors Standards.pptx
+++ b/readings/standards/Human Factors Standards.pptx
@@ -5,19 +5,16 @@
     <p:sldMasterId id="2147483648" r:id="rId1"/>
   </p:sldMasterIdLst>
   <p:notesMasterIdLst>
-    <p:notesMasterId r:id="rId12"/>
+    <p:notesMasterId r:id="rId9"/>
   </p:notesMasterIdLst>
   <p:sldIdLst>
     <p:sldId id="256" r:id="rId2"/>
     <p:sldId id="257" r:id="rId3"/>
-    <p:sldId id="258" r:id="rId4"/>
-    <p:sldId id="259" r:id="rId5"/>
-    <p:sldId id="261" r:id="rId6"/>
-    <p:sldId id="260" r:id="rId7"/>
-    <p:sldId id="263" r:id="rId8"/>
-    <p:sldId id="262" r:id="rId9"/>
-    <p:sldId id="264" r:id="rId10"/>
-    <p:sldId id="265" r:id="rId11"/>
+    <p:sldId id="266" r:id="rId4"/>
+    <p:sldId id="267" r:id="rId5"/>
+    <p:sldId id="258" r:id="rId6"/>
+    <p:sldId id="268" r:id="rId7"/>
+    <p:sldId id="269" r:id="rId8"/>
   </p:sldIdLst>
   <p:sldSz cx="12192000" cy="6858000"/>
   <p:notesSz cx="6858000" cy="9144000"/>
@@ -116,6 +113,11 @@
       </a:defRPr>
     </a:lvl9pPr>
   </p:defaultTextStyle>
+  <p:extLst>
+    <p:ext uri="{EFAFB233-063F-42B5-8137-9DF3F51BA10A}">
+      <p15:sldGuideLst xmlns:p15="http://schemas.microsoft.com/office/powerpoint/2012/main"/>
+    </p:ext>
+  </p:extLst>
 </p:presentation>
 </file>
 
@@ -125,2735 +127,6 @@
     <p1510:client id="{A5F447AE-2DB7-47A4-A99D-3BC4AE309C40}" v="39" dt="2023-02-01T22:48:28.979"/>
   </p1510:revLst>
 </p1510:revInfo>
-</file>
-
-<file path=ppt/diagrams/colors1.xml><?xml version="1.0" encoding="utf-8"?>
-<dgm:colorsDef xmlns:dgm="http://schemas.openxmlformats.org/drawingml/2006/diagram" xmlns:a="http://schemas.openxmlformats.org/drawingml/2006/main" uniqueId="urn:microsoft.com/office/officeart/2005/8/colors/accent1_2">
-  <dgm:title val=""/>
-  <dgm:desc val=""/>
-  <dgm:catLst>
-    <dgm:cat type="accent1" pri="11200"/>
-  </dgm:catLst>
-  <dgm:styleLbl name="node0">
-    <dgm:fillClrLst meth="repeat">
-      <a:schemeClr val="accent1"/>
-    </dgm:fillClrLst>
-    <dgm:linClrLst meth="repeat">
-      <a:schemeClr val="lt1"/>
-    </dgm:linClrLst>
-    <dgm:effectClrLst/>
-    <dgm:txLinClrLst/>
-    <dgm:txFillClrLst/>
-    <dgm:txEffectClrLst/>
-  </dgm:styleLbl>
-  <dgm:styleLbl name="alignNode1">
-    <dgm:fillClrLst meth="repeat">
-      <a:schemeClr val="accent1"/>
-    </dgm:fillClrLst>
-    <dgm:linClrLst meth="repeat">
-      <a:schemeClr val="accent1"/>
-    </dgm:linClrLst>
-    <dgm:effectClrLst/>
-    <dgm:txLinClrLst/>
-    <dgm:txFillClrLst/>
-    <dgm:txEffectClrLst/>
-  </dgm:styleLbl>
-  <dgm:styleLbl name="node1">
-    <dgm:fillClrLst meth="repeat">
-      <a:schemeClr val="accent1"/>
-    </dgm:fillClrLst>
-    <dgm:linClrLst meth="repeat">
-      <a:schemeClr val="lt1"/>
-    </dgm:linClrLst>
-    <dgm:effectClrLst/>
-    <dgm:txLinClrLst/>
-    <dgm:txFillClrLst/>
-    <dgm:txEffectClrLst/>
-  </dgm:styleLbl>
-  <dgm:styleLbl name="lnNode1">
-    <dgm:fillClrLst meth="repeat">
-      <a:schemeClr val="accent1"/>
-    </dgm:fillClrLst>
-    <dgm:linClrLst meth="repeat">
-      <a:schemeClr val="lt1"/>
-    </dgm:linClrLst>
-    <dgm:effectClrLst/>
-    <dgm:txLinClrLst/>
-    <dgm:txFillClrLst/>
-    <dgm:txEffectClrLst/>
-  </dgm:styleLbl>
-  <dgm:styleLbl name="vennNode1">
-    <dgm:fillClrLst meth="repeat">
-      <a:schemeClr val="accent1">
-        <a:alpha val="50000"/>
-      </a:schemeClr>
-    </dgm:fillClrLst>
-    <dgm:linClrLst meth="repeat">
-      <a:schemeClr val="lt1"/>
-    </dgm:linClrLst>
-    <dgm:effectClrLst/>
-    <dgm:txLinClrLst/>
-    <dgm:txFillClrLst/>
-    <dgm:txEffectClrLst/>
-  </dgm:styleLbl>
-  <dgm:styleLbl name="node2">
-    <dgm:fillClrLst meth="repeat">
-      <a:schemeClr val="accent1"/>
-    </dgm:fillClrLst>
-    <dgm:linClrLst meth="repeat">
-      <a:schemeClr val="lt1"/>
-    </dgm:linClrLst>
-    <dgm:effectClrLst/>
-    <dgm:txLinClrLst/>
-    <dgm:txFillClrLst/>
-    <dgm:txEffectClrLst/>
-  </dgm:styleLbl>
-  <dgm:styleLbl name="node3">
-    <dgm:fillClrLst meth="repeat">
-      <a:schemeClr val="accent1"/>
-    </dgm:fillClrLst>
-    <dgm:linClrLst meth="repeat">
-      <a:schemeClr val="lt1"/>
-    </dgm:linClrLst>
-    <dgm:effectClrLst/>
-    <dgm:txLinClrLst/>
-    <dgm:txFillClrLst/>
-    <dgm:txEffectClrLst/>
-  </dgm:styleLbl>
-  <dgm:styleLbl name="node4">
-    <dgm:fillClrLst meth="repeat">
-      <a:schemeClr val="accent1"/>
-    </dgm:fillClrLst>
-    <dgm:linClrLst meth="repeat">
-      <a:schemeClr val="lt1"/>
-    </dgm:linClrLst>
-    <dgm:effectClrLst/>
-    <dgm:txLinClrLst/>
-    <dgm:txFillClrLst/>
-    <dgm:txEffectClrLst/>
-  </dgm:styleLbl>
-  <dgm:styleLbl name="fgImgPlace1">
-    <dgm:fillClrLst meth="repeat">
-      <a:schemeClr val="accent1">
-        <a:tint val="50000"/>
-      </a:schemeClr>
-    </dgm:fillClrLst>
-    <dgm:linClrLst meth="repeat">
-      <a:schemeClr val="lt1"/>
-    </dgm:linClrLst>
-    <dgm:effectClrLst/>
-    <dgm:txLinClrLst/>
-    <dgm:txFillClrLst meth="repeat">
-      <a:schemeClr val="lt1"/>
-    </dgm:txFillClrLst>
-    <dgm:txEffectClrLst/>
-  </dgm:styleLbl>
-  <dgm:styleLbl name="alignImgPlace1">
-    <dgm:fillClrLst meth="repeat">
-      <a:schemeClr val="accent1">
-        <a:tint val="50000"/>
-      </a:schemeClr>
-    </dgm:fillClrLst>
-    <dgm:linClrLst meth="repeat">
-      <a:schemeClr val="lt1"/>
-    </dgm:linClrLst>
-    <dgm:effectClrLst/>
-    <dgm:txLinClrLst/>
-    <dgm:txFillClrLst meth="repeat">
-      <a:schemeClr val="lt1"/>
-    </dgm:txFillClrLst>
-    <dgm:txEffectClrLst/>
-  </dgm:styleLbl>
-  <dgm:styleLbl name="bgImgPlace1">
-    <dgm:fillClrLst meth="repeat">
-      <a:schemeClr val="accent1">
-        <a:tint val="50000"/>
-      </a:schemeClr>
-    </dgm:fillClrLst>
-    <dgm:linClrLst meth="repeat">
-      <a:schemeClr val="lt1"/>
-    </dgm:linClrLst>
-    <dgm:effectClrLst/>
-    <dgm:txLinClrLst/>
-    <dgm:txFillClrLst meth="repeat">
-      <a:schemeClr val="lt1"/>
-    </dgm:txFillClrLst>
-    <dgm:txEffectClrLst/>
-  </dgm:styleLbl>
-  <dgm:styleLbl name="sibTrans2D1">
-    <dgm:fillClrLst meth="repeat">
-      <a:schemeClr val="accent1">
-        <a:tint val="60000"/>
-      </a:schemeClr>
-    </dgm:fillClrLst>
-    <dgm:linClrLst meth="repeat">
-      <a:schemeClr val="accent1">
-        <a:tint val="60000"/>
-      </a:schemeClr>
-    </dgm:linClrLst>
-    <dgm:effectClrLst/>
-    <dgm:txLinClrLst/>
-    <dgm:txFillClrLst/>
-    <dgm:txEffectClrLst/>
-  </dgm:styleLbl>
-  <dgm:styleLbl name="fgSibTrans2D1">
-    <dgm:fillClrLst meth="repeat">
-      <a:schemeClr val="accent1">
-        <a:tint val="60000"/>
-      </a:schemeClr>
-    </dgm:fillClrLst>
-    <dgm:linClrLst meth="repeat">
-      <a:schemeClr val="accent1">
-        <a:tint val="60000"/>
-      </a:schemeClr>
-    </dgm:linClrLst>
-    <dgm:effectClrLst/>
-    <dgm:txLinClrLst/>
-    <dgm:txFillClrLst/>
-    <dgm:txEffectClrLst/>
-  </dgm:styleLbl>
-  <dgm:styleLbl name="bgSibTrans2D1">
-    <dgm:fillClrLst meth="repeat">
-      <a:schemeClr val="accent1">
-        <a:tint val="60000"/>
-      </a:schemeClr>
-    </dgm:fillClrLst>
-    <dgm:linClrLst meth="repeat">
-      <a:schemeClr val="accent1">
-        <a:tint val="60000"/>
-      </a:schemeClr>
-    </dgm:linClrLst>
-    <dgm:effectClrLst/>
-    <dgm:txLinClrLst/>
-    <dgm:txFillClrLst/>
-    <dgm:txEffectClrLst/>
-  </dgm:styleLbl>
-  <dgm:styleLbl name="sibTrans1D1">
-    <dgm:fillClrLst meth="repeat">
-      <a:schemeClr val="accent1"/>
-    </dgm:fillClrLst>
-    <dgm:linClrLst meth="repeat">
-      <a:schemeClr val="accent1"/>
-    </dgm:linClrLst>
-    <dgm:effectClrLst/>
-    <dgm:txLinClrLst/>
-    <dgm:txFillClrLst meth="repeat">
-      <a:schemeClr val="tx1"/>
-    </dgm:txFillClrLst>
-    <dgm:txEffectClrLst/>
-  </dgm:styleLbl>
-  <dgm:styleLbl name="callout">
-    <dgm:fillClrLst meth="repeat">
-      <a:schemeClr val="accent1"/>
-    </dgm:fillClrLst>
-    <dgm:linClrLst meth="repeat">
-      <a:schemeClr val="accent1">
-        <a:tint val="50000"/>
-      </a:schemeClr>
-    </dgm:linClrLst>
-    <dgm:effectClrLst/>
-    <dgm:txLinClrLst/>
-    <dgm:txFillClrLst meth="repeat">
-      <a:schemeClr val="tx1"/>
-    </dgm:txFillClrLst>
-    <dgm:txEffectClrLst/>
-  </dgm:styleLbl>
-  <dgm:styleLbl name="asst0">
-    <dgm:fillClrLst meth="repeat">
-      <a:schemeClr val="accent1"/>
-    </dgm:fillClrLst>
-    <dgm:linClrLst meth="repeat">
-      <a:schemeClr val="lt1"/>
-    </dgm:linClrLst>
-    <dgm:effectClrLst/>
-    <dgm:txLinClrLst/>
-    <dgm:txFillClrLst/>
-    <dgm:txEffectClrLst/>
-  </dgm:styleLbl>
-  <dgm:styleLbl name="asst1">
-    <dgm:fillClrLst meth="repeat">
-      <a:schemeClr val="accent1"/>
-    </dgm:fillClrLst>
-    <dgm:linClrLst meth="repeat">
-      <a:schemeClr val="lt1"/>
-    </dgm:linClrLst>
-    <dgm:effectClrLst/>
-    <dgm:txLinClrLst/>
-    <dgm:txFillClrLst/>
-    <dgm:txEffectClrLst/>
-  </dgm:styleLbl>
-  <dgm:styleLbl name="asst2">
-    <dgm:fillClrLst meth="repeat">
-      <a:schemeClr val="accent1"/>
-    </dgm:fillClrLst>
-    <dgm:linClrLst meth="repeat">
-      <a:schemeClr val="lt1"/>
-    </dgm:linClrLst>
-    <dgm:effectClrLst/>
-    <dgm:txLinClrLst/>
-    <dgm:txFillClrLst/>
-    <dgm:txEffectClrLst/>
-  </dgm:styleLbl>
-  <dgm:styleLbl name="asst3">
-    <dgm:fillClrLst meth="repeat">
-      <a:schemeClr val="accent1"/>
-    </dgm:fillClrLst>
-    <dgm:linClrLst meth="repeat">
-      <a:schemeClr val="lt1"/>
-    </dgm:linClrLst>
-    <dgm:effectClrLst/>
-    <dgm:txLinClrLst/>
-    <dgm:txFillClrLst/>
-    <dgm:txEffectClrLst/>
-  </dgm:styleLbl>
-  <dgm:styleLbl name="asst4">
-    <dgm:fillClrLst meth="repeat">
-      <a:schemeClr val="accent1"/>
-    </dgm:fillClrLst>
-    <dgm:linClrLst meth="repeat">
-      <a:schemeClr val="lt1"/>
-    </dgm:linClrLst>
-    <dgm:effectClrLst/>
-    <dgm:txLinClrLst/>
-    <dgm:txFillClrLst/>
-    <dgm:txEffectClrLst/>
-  </dgm:styleLbl>
-  <dgm:styleLbl name="parChTrans2D1">
-    <dgm:fillClrLst meth="repeat">
-      <a:schemeClr val="accent1">
-        <a:tint val="60000"/>
-      </a:schemeClr>
-    </dgm:fillClrLst>
-    <dgm:linClrLst meth="repeat">
-      <a:schemeClr val="accent1">
-        <a:tint val="60000"/>
-      </a:schemeClr>
-    </dgm:linClrLst>
-    <dgm:effectClrLst/>
-    <dgm:txLinClrLst/>
-    <dgm:txFillClrLst meth="repeat">
-      <a:schemeClr val="lt1"/>
-    </dgm:txFillClrLst>
-    <dgm:txEffectClrLst/>
-  </dgm:styleLbl>
-  <dgm:styleLbl name="parChTrans2D2">
-    <dgm:fillClrLst meth="repeat">
-      <a:schemeClr val="accent1"/>
-    </dgm:fillClrLst>
-    <dgm:linClrLst meth="repeat">
-      <a:schemeClr val="accent1"/>
-    </dgm:linClrLst>
-    <dgm:effectClrLst/>
-    <dgm:txLinClrLst/>
-    <dgm:txFillClrLst meth="repeat">
-      <a:schemeClr val="lt1"/>
-    </dgm:txFillClrLst>
-    <dgm:txEffectClrLst/>
-  </dgm:styleLbl>
-  <dgm:styleLbl name="parChTrans2D3">
-    <dgm:fillClrLst meth="repeat">
-      <a:schemeClr val="accent1"/>
-    </dgm:fillClrLst>
-    <dgm:linClrLst meth="repeat">
-      <a:schemeClr val="accent1"/>
-    </dgm:linClrLst>
-    <dgm:effectClrLst/>
-    <dgm:txLinClrLst/>
-    <dgm:txFillClrLst meth="repeat">
-      <a:schemeClr val="lt1"/>
-    </dgm:txFillClrLst>
-    <dgm:txEffectClrLst/>
-  </dgm:styleLbl>
-  <dgm:styleLbl name="parChTrans2D4">
-    <dgm:fillClrLst meth="repeat">
-      <a:schemeClr val="accent1"/>
-    </dgm:fillClrLst>
-    <dgm:linClrLst meth="repeat">
-      <a:schemeClr val="accent1"/>
-    </dgm:linClrLst>
-    <dgm:effectClrLst/>
-    <dgm:txLinClrLst/>
-    <dgm:txFillClrLst meth="repeat">
-      <a:schemeClr val="lt1"/>
-    </dgm:txFillClrLst>
-    <dgm:txEffectClrLst/>
-  </dgm:styleLbl>
-  <dgm:styleLbl name="parChTrans1D1">
-    <dgm:fillClrLst meth="repeat">
-      <a:schemeClr val="accent1"/>
-    </dgm:fillClrLst>
-    <dgm:linClrLst meth="repeat">
-      <a:schemeClr val="accent1">
-        <a:shade val="60000"/>
-      </a:schemeClr>
-    </dgm:linClrLst>
-    <dgm:effectClrLst/>
-    <dgm:txLinClrLst/>
-    <dgm:txFillClrLst meth="repeat">
-      <a:schemeClr val="tx1"/>
-    </dgm:txFillClrLst>
-    <dgm:txEffectClrLst/>
-  </dgm:styleLbl>
-  <dgm:styleLbl name="parChTrans1D2">
-    <dgm:fillClrLst meth="repeat">
-      <a:schemeClr val="accent1"/>
-    </dgm:fillClrLst>
-    <dgm:linClrLst meth="repeat">
-      <a:schemeClr val="accent1">
-        <a:shade val="60000"/>
-      </a:schemeClr>
-    </dgm:linClrLst>
-    <dgm:effectClrLst/>
-    <dgm:txLinClrLst/>
-    <dgm:txFillClrLst meth="repeat">
-      <a:schemeClr val="tx1"/>
-    </dgm:txFillClrLst>
-    <dgm:txEffectClrLst/>
-  </dgm:styleLbl>
-  <dgm:styleLbl name="parChTrans1D3">
-    <dgm:fillClrLst meth="repeat">
-      <a:schemeClr val="accent1"/>
-    </dgm:fillClrLst>
-    <dgm:linClrLst meth="repeat">
-      <a:schemeClr val="accent1">
-        <a:shade val="80000"/>
-      </a:schemeClr>
-    </dgm:linClrLst>
-    <dgm:effectClrLst/>
-    <dgm:txLinClrLst/>
-    <dgm:txFillClrLst meth="repeat">
-      <a:schemeClr val="tx1"/>
-    </dgm:txFillClrLst>
-    <dgm:txEffectClrLst/>
-  </dgm:styleLbl>
-  <dgm:styleLbl name="parChTrans1D4">
-    <dgm:fillClrLst meth="repeat">
-      <a:schemeClr val="accent1"/>
-    </dgm:fillClrLst>
-    <dgm:linClrLst meth="repeat">
-      <a:schemeClr val="accent1">
-        <a:shade val="80000"/>
-      </a:schemeClr>
-    </dgm:linClrLst>
-    <dgm:effectClrLst/>
-    <dgm:txLinClrLst/>
-    <dgm:txFillClrLst meth="repeat">
-      <a:schemeClr val="tx1"/>
-    </dgm:txFillClrLst>
-    <dgm:txEffectClrLst/>
-  </dgm:styleLbl>
-  <dgm:styleLbl name="fgAcc1">
-    <dgm:fillClrLst meth="repeat">
-      <a:schemeClr val="lt1">
-        <a:alpha val="90000"/>
-      </a:schemeClr>
-    </dgm:fillClrLst>
-    <dgm:linClrLst meth="repeat">
-      <a:schemeClr val="accent1"/>
-    </dgm:linClrLst>
-    <dgm:effectClrLst/>
-    <dgm:txLinClrLst/>
-    <dgm:txFillClrLst meth="repeat">
-      <a:schemeClr val="dk1"/>
-    </dgm:txFillClrLst>
-    <dgm:txEffectClrLst/>
-  </dgm:styleLbl>
-  <dgm:styleLbl name="conFgAcc1">
-    <dgm:fillClrLst meth="repeat">
-      <a:schemeClr val="lt1">
-        <a:alpha val="90000"/>
-      </a:schemeClr>
-    </dgm:fillClrLst>
-    <dgm:linClrLst meth="repeat">
-      <a:schemeClr val="accent1"/>
-    </dgm:linClrLst>
-    <dgm:effectClrLst/>
-    <dgm:txLinClrLst/>
-    <dgm:txFillClrLst meth="repeat">
-      <a:schemeClr val="dk1"/>
-    </dgm:txFillClrLst>
-    <dgm:txEffectClrLst/>
-  </dgm:styleLbl>
-  <dgm:styleLbl name="alignAcc1">
-    <dgm:fillClrLst meth="repeat">
-      <a:schemeClr val="lt1">
-        <a:alpha val="90000"/>
-      </a:schemeClr>
-    </dgm:fillClrLst>
-    <dgm:linClrLst meth="repeat">
-      <a:schemeClr val="accent1"/>
-    </dgm:linClrLst>
-    <dgm:effectClrLst/>
-    <dgm:txLinClrLst/>
-    <dgm:txFillClrLst meth="repeat">
-      <a:schemeClr val="dk1"/>
-    </dgm:txFillClrLst>
-    <dgm:txEffectClrLst/>
-  </dgm:styleLbl>
-  <dgm:styleLbl name="trAlignAcc1">
-    <dgm:fillClrLst meth="repeat">
-      <a:schemeClr val="lt1">
-        <a:alpha val="40000"/>
-      </a:schemeClr>
-    </dgm:fillClrLst>
-    <dgm:linClrLst meth="repeat">
-      <a:schemeClr val="accent1"/>
-    </dgm:linClrLst>
-    <dgm:effectClrLst/>
-    <dgm:txLinClrLst/>
-    <dgm:txFillClrLst meth="repeat">
-      <a:schemeClr val="dk1"/>
-    </dgm:txFillClrLst>
-    <dgm:txEffectClrLst/>
-  </dgm:styleLbl>
-  <dgm:styleLbl name="bgAcc1">
-    <dgm:fillClrLst meth="repeat">
-      <a:schemeClr val="lt1">
-        <a:alpha val="90000"/>
-      </a:schemeClr>
-    </dgm:fillClrLst>
-    <dgm:linClrLst meth="repeat">
-      <a:schemeClr val="accent1"/>
-    </dgm:linClrLst>
-    <dgm:effectClrLst/>
-    <dgm:txLinClrLst/>
-    <dgm:txFillClrLst meth="repeat">
-      <a:schemeClr val="dk1"/>
-    </dgm:txFillClrLst>
-    <dgm:txEffectClrLst/>
-  </dgm:styleLbl>
-  <dgm:styleLbl name="solidFgAcc1">
-    <dgm:fillClrLst meth="repeat">
-      <a:schemeClr val="lt1"/>
-    </dgm:fillClrLst>
-    <dgm:linClrLst meth="repeat">
-      <a:schemeClr val="accent1"/>
-    </dgm:linClrLst>
-    <dgm:effectClrLst/>
-    <dgm:txLinClrLst/>
-    <dgm:txFillClrLst meth="repeat">
-      <a:schemeClr val="dk1"/>
-    </dgm:txFillClrLst>
-    <dgm:txEffectClrLst/>
-  </dgm:styleLbl>
-  <dgm:styleLbl name="solidAlignAcc1">
-    <dgm:fillClrLst meth="repeat">
-      <a:schemeClr val="lt1"/>
-    </dgm:fillClrLst>
-    <dgm:linClrLst meth="repeat">
-      <a:schemeClr val="accent1"/>
-    </dgm:linClrLst>
-    <dgm:effectClrLst/>
-    <dgm:txLinClrLst/>
-    <dgm:txFillClrLst meth="repeat">
-      <a:schemeClr val="dk1"/>
-    </dgm:txFillClrLst>
-    <dgm:txEffectClrLst/>
-  </dgm:styleLbl>
-  <dgm:styleLbl name="solidBgAcc1">
-    <dgm:fillClrLst meth="repeat">
-      <a:schemeClr val="lt1"/>
-    </dgm:fillClrLst>
-    <dgm:linClrLst meth="repeat">
-      <a:schemeClr val="accent1"/>
-    </dgm:linClrLst>
-    <dgm:effectClrLst/>
-    <dgm:txLinClrLst/>
-    <dgm:txFillClrLst meth="repeat">
-      <a:schemeClr val="dk1"/>
-    </dgm:txFillClrLst>
-    <dgm:txEffectClrLst/>
-  </dgm:styleLbl>
-  <dgm:styleLbl name="fgAccFollowNode1">
-    <dgm:fillClrLst meth="repeat">
-      <a:schemeClr val="accent1">
-        <a:alpha val="90000"/>
-        <a:tint val="40000"/>
-      </a:schemeClr>
-    </dgm:fillClrLst>
-    <dgm:linClrLst meth="repeat">
-      <a:schemeClr val="accent1">
-        <a:alpha val="90000"/>
-        <a:tint val="40000"/>
-      </a:schemeClr>
-    </dgm:linClrLst>
-    <dgm:effectClrLst/>
-    <dgm:txLinClrLst/>
-    <dgm:txFillClrLst meth="repeat">
-      <a:schemeClr val="dk1"/>
-    </dgm:txFillClrLst>
-    <dgm:txEffectClrLst/>
-  </dgm:styleLbl>
-  <dgm:styleLbl name="alignAccFollowNode1">
-    <dgm:fillClrLst meth="repeat">
-      <a:schemeClr val="accent1">
-        <a:alpha val="90000"/>
-        <a:tint val="40000"/>
-      </a:schemeClr>
-    </dgm:fillClrLst>
-    <dgm:linClrLst meth="repeat">
-      <a:schemeClr val="accent1">
-        <a:alpha val="90000"/>
-        <a:tint val="40000"/>
-      </a:schemeClr>
-    </dgm:linClrLst>
-    <dgm:effectClrLst/>
-    <dgm:txLinClrLst/>
-    <dgm:txFillClrLst meth="repeat">
-      <a:schemeClr val="dk1"/>
-    </dgm:txFillClrLst>
-    <dgm:txEffectClrLst/>
-  </dgm:styleLbl>
-  <dgm:styleLbl name="bgAccFollowNode1">
-    <dgm:fillClrLst meth="repeat">
-      <a:schemeClr val="accent1">
-        <a:alpha val="90000"/>
-        <a:tint val="40000"/>
-      </a:schemeClr>
-    </dgm:fillClrLst>
-    <dgm:linClrLst meth="repeat">
-      <a:schemeClr val="accent1">
-        <a:alpha val="90000"/>
-        <a:tint val="40000"/>
-      </a:schemeClr>
-    </dgm:linClrLst>
-    <dgm:effectClrLst/>
-    <dgm:txLinClrLst/>
-    <dgm:txFillClrLst meth="repeat">
-      <a:schemeClr val="dk1"/>
-    </dgm:txFillClrLst>
-    <dgm:txEffectClrLst/>
-  </dgm:styleLbl>
-  <dgm:styleLbl name="fgAcc0">
-    <dgm:fillClrLst meth="repeat">
-      <a:schemeClr val="lt1">
-        <a:alpha val="90000"/>
-      </a:schemeClr>
-    </dgm:fillClrLst>
-    <dgm:linClrLst meth="repeat">
-      <a:schemeClr val="accent1"/>
-    </dgm:linClrLst>
-    <dgm:effectClrLst/>
-    <dgm:txLinClrLst/>
-    <dgm:txFillClrLst meth="repeat">
-      <a:schemeClr val="dk1"/>
-    </dgm:txFillClrLst>
-    <dgm:txEffectClrLst/>
-  </dgm:styleLbl>
-  <dgm:styleLbl name="fgAcc2">
-    <dgm:fillClrLst meth="repeat">
-      <a:schemeClr val="lt1">
-        <a:alpha val="90000"/>
-      </a:schemeClr>
-    </dgm:fillClrLst>
-    <dgm:linClrLst meth="repeat">
-      <a:schemeClr val="accent1"/>
-    </dgm:linClrLst>
-    <dgm:effectClrLst/>
-    <dgm:txLinClrLst/>
-    <dgm:txFillClrLst meth="repeat">
-      <a:schemeClr val="dk1"/>
-    </dgm:txFillClrLst>
-    <dgm:txEffectClrLst/>
-  </dgm:styleLbl>
-  <dgm:styleLbl name="fgAcc3">
-    <dgm:fillClrLst meth="repeat">
-      <a:schemeClr val="lt1">
-        <a:alpha val="90000"/>
-      </a:schemeClr>
-    </dgm:fillClrLst>
-    <dgm:linClrLst meth="repeat">
-      <a:schemeClr val="accent1"/>
-    </dgm:linClrLst>
-    <dgm:effectClrLst/>
-    <dgm:txLinClrLst/>
-    <dgm:txFillClrLst meth="repeat">
-      <a:schemeClr val="dk1"/>
-    </dgm:txFillClrLst>
-    <dgm:txEffectClrLst/>
-  </dgm:styleLbl>
-  <dgm:styleLbl name="fgAcc4">
-    <dgm:fillClrLst meth="repeat">
-      <a:schemeClr val="lt1">
-        <a:alpha val="90000"/>
-      </a:schemeClr>
-    </dgm:fillClrLst>
-    <dgm:linClrLst meth="repeat">
-      <a:schemeClr val="accent1"/>
-    </dgm:linClrLst>
-    <dgm:effectClrLst/>
-    <dgm:txLinClrLst/>
-    <dgm:txFillClrLst meth="repeat">
-      <a:schemeClr val="dk1"/>
-    </dgm:txFillClrLst>
-    <dgm:txEffectClrLst/>
-  </dgm:styleLbl>
-  <dgm:styleLbl name="bgShp">
-    <dgm:fillClrLst meth="repeat">
-      <a:schemeClr val="accent1">
-        <a:tint val="40000"/>
-      </a:schemeClr>
-    </dgm:fillClrLst>
-    <dgm:linClrLst meth="repeat">
-      <a:schemeClr val="accent1"/>
-    </dgm:linClrLst>
-    <dgm:effectClrLst/>
-    <dgm:txLinClrLst/>
-    <dgm:txFillClrLst meth="repeat">
-      <a:schemeClr val="dk1"/>
-    </dgm:txFillClrLst>
-    <dgm:txEffectClrLst/>
-  </dgm:styleLbl>
-  <dgm:styleLbl name="dkBgShp">
-    <dgm:fillClrLst meth="repeat">
-      <a:schemeClr val="accent1">
-        <a:shade val="80000"/>
-      </a:schemeClr>
-    </dgm:fillClrLst>
-    <dgm:linClrLst meth="repeat">
-      <a:schemeClr val="accent1"/>
-    </dgm:linClrLst>
-    <dgm:effectClrLst/>
-    <dgm:txLinClrLst/>
-    <dgm:txFillClrLst meth="repeat">
-      <a:schemeClr val="lt1"/>
-    </dgm:txFillClrLst>
-    <dgm:txEffectClrLst/>
-  </dgm:styleLbl>
-  <dgm:styleLbl name="trBgShp">
-    <dgm:fillClrLst meth="repeat">
-      <a:schemeClr val="accent1">
-        <a:tint val="50000"/>
-        <a:alpha val="40000"/>
-      </a:schemeClr>
-    </dgm:fillClrLst>
-    <dgm:linClrLst meth="repeat">
-      <a:schemeClr val="accent1"/>
-    </dgm:linClrLst>
-    <dgm:effectClrLst/>
-    <dgm:txLinClrLst/>
-    <dgm:txFillClrLst meth="repeat">
-      <a:schemeClr val="lt1"/>
-    </dgm:txFillClrLst>
-    <dgm:txEffectClrLst/>
-  </dgm:styleLbl>
-  <dgm:styleLbl name="fgShp">
-    <dgm:fillClrLst meth="repeat">
-      <a:schemeClr val="accent1">
-        <a:tint val="60000"/>
-      </a:schemeClr>
-    </dgm:fillClrLst>
-    <dgm:linClrLst meth="repeat">
-      <a:schemeClr val="lt1"/>
-    </dgm:linClrLst>
-    <dgm:effectClrLst/>
-    <dgm:txLinClrLst/>
-    <dgm:txFillClrLst meth="repeat">
-      <a:schemeClr val="dk1"/>
-    </dgm:txFillClrLst>
-    <dgm:txEffectClrLst/>
-  </dgm:styleLbl>
-  <dgm:styleLbl name="revTx">
-    <dgm:fillClrLst meth="repeat">
-      <a:schemeClr val="lt1">
-        <a:alpha val="0"/>
-      </a:schemeClr>
-    </dgm:fillClrLst>
-    <dgm:linClrLst meth="repeat">
-      <a:schemeClr val="dk1">
-        <a:alpha val="0"/>
-      </a:schemeClr>
-    </dgm:linClrLst>
-    <dgm:effectClrLst/>
-    <dgm:txLinClrLst/>
-    <dgm:txFillClrLst meth="repeat">
-      <a:schemeClr val="tx1"/>
-    </dgm:txFillClrLst>
-    <dgm:txEffectClrLst/>
-  </dgm:styleLbl>
-</dgm:colorsDef>
-</file>
-
-<file path=ppt/diagrams/data1.xml><?xml version="1.0" encoding="utf-8"?>
-<dgm:dataModel xmlns:dgm="http://schemas.openxmlformats.org/drawingml/2006/diagram" xmlns:a="http://schemas.openxmlformats.org/drawingml/2006/main">
-  <dgm:ptLst>
-    <dgm:pt modelId="{15F58CBC-41B6-40C9-9849-2A7EE815004B}" type="doc">
-      <dgm:prSet loTypeId="urn:microsoft.com/office/officeart/2005/8/layout/process1" loCatId="process" qsTypeId="urn:microsoft.com/office/officeart/2005/8/quickstyle/simple1" qsCatId="simple" csTypeId="urn:microsoft.com/office/officeart/2005/8/colors/accent1_2" csCatId="accent1" phldr="1"/>
-      <dgm:spPr/>
-    </dgm:pt>
-    <dgm:pt modelId="{E6C1DFBF-7DBB-489E-BB6D-E829B1D8DC89}">
-      <dgm:prSet phldrT="[Text]"/>
-      <dgm:spPr/>
-      <dgm:t>
-        <a:bodyPr/>
-        <a:lstStyle/>
-        <a:p>
-          <a:r>
-            <a:rPr lang="en-US" dirty="0"/>
-            <a:t>Planning and Analysis</a:t>
-          </a:r>
-        </a:p>
-      </dgm:t>
-    </dgm:pt>
-    <dgm:pt modelId="{79F834C1-C7FE-4120-BDC0-4877D1AF4B2F}" type="parTrans" cxnId="{CB9A839E-13E7-4165-9032-62FC98717031}">
-      <dgm:prSet/>
-      <dgm:spPr/>
-      <dgm:t>
-        <a:bodyPr/>
-        <a:lstStyle/>
-        <a:p>
-          <a:endParaRPr lang="en-US"/>
-        </a:p>
-      </dgm:t>
-    </dgm:pt>
-    <dgm:pt modelId="{105A59FB-239E-41F3-9123-79F689962D8D}" type="sibTrans" cxnId="{CB9A839E-13E7-4165-9032-62FC98717031}">
-      <dgm:prSet/>
-      <dgm:spPr/>
-      <dgm:t>
-        <a:bodyPr/>
-        <a:lstStyle/>
-        <a:p>
-          <a:endParaRPr lang="en-US"/>
-        </a:p>
-      </dgm:t>
-    </dgm:pt>
-    <dgm:pt modelId="{BE78D32D-248D-41EE-AA50-689F65E362B3}">
-      <dgm:prSet/>
-      <dgm:spPr/>
-      <dgm:t>
-        <a:bodyPr/>
-        <a:lstStyle/>
-        <a:p>
-          <a:r>
-            <a:rPr lang="en-US"/>
-            <a:t>Design</a:t>
-          </a:r>
-          <a:endParaRPr lang="en-US" dirty="0"/>
-        </a:p>
-      </dgm:t>
-    </dgm:pt>
-    <dgm:pt modelId="{18C2A36D-E94B-405C-A8AC-5B70F2060DF7}" type="parTrans" cxnId="{C530C036-E73E-4A04-A711-9D54D53E8E1E}">
-      <dgm:prSet/>
-      <dgm:spPr/>
-      <dgm:t>
-        <a:bodyPr/>
-        <a:lstStyle/>
-        <a:p>
-          <a:endParaRPr lang="en-US"/>
-        </a:p>
-      </dgm:t>
-    </dgm:pt>
-    <dgm:pt modelId="{CAF8DDFA-E960-441D-8B7F-6B6149126E52}" type="sibTrans" cxnId="{C530C036-E73E-4A04-A711-9D54D53E8E1E}">
-      <dgm:prSet/>
-      <dgm:spPr/>
-      <dgm:t>
-        <a:bodyPr/>
-        <a:lstStyle/>
-        <a:p>
-          <a:endParaRPr lang="en-US"/>
-        </a:p>
-      </dgm:t>
-    </dgm:pt>
-    <dgm:pt modelId="{5D3B9E5B-73C4-431C-B3BB-A592C0E4251E}">
-      <dgm:prSet/>
-      <dgm:spPr/>
-      <dgm:t>
-        <a:bodyPr/>
-        <a:lstStyle/>
-        <a:p>
-          <a:r>
-            <a:rPr lang="en-US"/>
-            <a:t>Verification and Validation</a:t>
-          </a:r>
-          <a:endParaRPr lang="en-US" dirty="0"/>
-        </a:p>
-      </dgm:t>
-    </dgm:pt>
-    <dgm:pt modelId="{DB694B4A-D61F-424A-8A74-04915400ACC6}" type="parTrans" cxnId="{C970278E-EC7F-4871-8B10-2DEC0B7011CD}">
-      <dgm:prSet/>
-      <dgm:spPr/>
-      <dgm:t>
-        <a:bodyPr/>
-        <a:lstStyle/>
-        <a:p>
-          <a:endParaRPr lang="en-US"/>
-        </a:p>
-      </dgm:t>
-    </dgm:pt>
-    <dgm:pt modelId="{9D66F4DC-5515-44A6-B398-000441BCF252}" type="sibTrans" cxnId="{C970278E-EC7F-4871-8B10-2DEC0B7011CD}">
-      <dgm:prSet/>
-      <dgm:spPr/>
-      <dgm:t>
-        <a:bodyPr/>
-        <a:lstStyle/>
-        <a:p>
-          <a:endParaRPr lang="en-US"/>
-        </a:p>
-      </dgm:t>
-    </dgm:pt>
-    <dgm:pt modelId="{D72AC7B8-70C3-4164-A573-1775C54D1F99}">
-      <dgm:prSet/>
-      <dgm:spPr/>
-      <dgm:t>
-        <a:bodyPr/>
-        <a:lstStyle/>
-        <a:p>
-          <a:r>
-            <a:rPr lang="en-US"/>
-            <a:t>Implementation and Operation</a:t>
-          </a:r>
-          <a:endParaRPr lang="en-US" dirty="0"/>
-        </a:p>
-      </dgm:t>
-    </dgm:pt>
-    <dgm:pt modelId="{D0A45359-3F33-45C6-9372-FDD82911124E}" type="parTrans" cxnId="{5CE2C49A-7AD0-4D93-B867-534DF07FBB6D}">
-      <dgm:prSet/>
-      <dgm:spPr/>
-      <dgm:t>
-        <a:bodyPr/>
-        <a:lstStyle/>
-        <a:p>
-          <a:endParaRPr lang="en-US"/>
-        </a:p>
-      </dgm:t>
-    </dgm:pt>
-    <dgm:pt modelId="{FC901B53-BB63-45DD-83F2-D7B35168E167}" type="sibTrans" cxnId="{5CE2C49A-7AD0-4D93-B867-534DF07FBB6D}">
-      <dgm:prSet/>
-      <dgm:spPr/>
-      <dgm:t>
-        <a:bodyPr/>
-        <a:lstStyle/>
-        <a:p>
-          <a:endParaRPr lang="en-US"/>
-        </a:p>
-      </dgm:t>
-    </dgm:pt>
-    <dgm:pt modelId="{EFC586DF-AD30-47A7-B946-8BC883D21B53}" type="pres">
-      <dgm:prSet presAssocID="{15F58CBC-41B6-40C9-9849-2A7EE815004B}" presName="Name0" presStyleCnt="0">
-        <dgm:presLayoutVars>
-          <dgm:dir/>
-          <dgm:resizeHandles val="exact"/>
-        </dgm:presLayoutVars>
-      </dgm:prSet>
-      <dgm:spPr/>
-    </dgm:pt>
-    <dgm:pt modelId="{27E5DA1F-8D7B-496B-BE6C-3F93ED4057AB}" type="pres">
-      <dgm:prSet presAssocID="{E6C1DFBF-7DBB-489E-BB6D-E829B1D8DC89}" presName="node" presStyleLbl="node1" presStyleIdx="0" presStyleCnt="4">
-        <dgm:presLayoutVars>
-          <dgm:bulletEnabled val="1"/>
-        </dgm:presLayoutVars>
-      </dgm:prSet>
-      <dgm:spPr/>
-    </dgm:pt>
-    <dgm:pt modelId="{E09CE1B3-307F-4E71-ABC1-8193D6A333DC}" type="pres">
-      <dgm:prSet presAssocID="{105A59FB-239E-41F3-9123-79F689962D8D}" presName="sibTrans" presStyleLbl="sibTrans2D1" presStyleIdx="0" presStyleCnt="3"/>
-      <dgm:spPr/>
-    </dgm:pt>
-    <dgm:pt modelId="{7A58F083-2B19-42F7-B5C7-6461EFE9FD4E}" type="pres">
-      <dgm:prSet presAssocID="{105A59FB-239E-41F3-9123-79F689962D8D}" presName="connectorText" presStyleLbl="sibTrans2D1" presStyleIdx="0" presStyleCnt="3"/>
-      <dgm:spPr/>
-    </dgm:pt>
-    <dgm:pt modelId="{45337002-4022-4D3C-8EFF-5105F29FBD62}" type="pres">
-      <dgm:prSet presAssocID="{BE78D32D-248D-41EE-AA50-689F65E362B3}" presName="node" presStyleLbl="node1" presStyleIdx="1" presStyleCnt="4">
-        <dgm:presLayoutVars>
-          <dgm:bulletEnabled val="1"/>
-        </dgm:presLayoutVars>
-      </dgm:prSet>
-      <dgm:spPr/>
-    </dgm:pt>
-    <dgm:pt modelId="{6BB2352A-F001-4372-BA15-8D624AE2CF45}" type="pres">
-      <dgm:prSet presAssocID="{CAF8DDFA-E960-441D-8B7F-6B6149126E52}" presName="sibTrans" presStyleLbl="sibTrans2D1" presStyleIdx="1" presStyleCnt="3"/>
-      <dgm:spPr/>
-    </dgm:pt>
-    <dgm:pt modelId="{C3C31CA6-B7DB-4321-9941-FB2B356CE808}" type="pres">
-      <dgm:prSet presAssocID="{CAF8DDFA-E960-441D-8B7F-6B6149126E52}" presName="connectorText" presStyleLbl="sibTrans2D1" presStyleIdx="1" presStyleCnt="3"/>
-      <dgm:spPr/>
-    </dgm:pt>
-    <dgm:pt modelId="{C252816E-3832-4CBD-8947-FDA9418EB451}" type="pres">
-      <dgm:prSet presAssocID="{5D3B9E5B-73C4-431C-B3BB-A592C0E4251E}" presName="node" presStyleLbl="node1" presStyleIdx="2" presStyleCnt="4">
-        <dgm:presLayoutVars>
-          <dgm:bulletEnabled val="1"/>
-        </dgm:presLayoutVars>
-      </dgm:prSet>
-      <dgm:spPr/>
-    </dgm:pt>
-    <dgm:pt modelId="{2394DE9F-4D0A-4CF1-8C5D-7DE96D99FA12}" type="pres">
-      <dgm:prSet presAssocID="{9D66F4DC-5515-44A6-B398-000441BCF252}" presName="sibTrans" presStyleLbl="sibTrans2D1" presStyleIdx="2" presStyleCnt="3"/>
-      <dgm:spPr/>
-    </dgm:pt>
-    <dgm:pt modelId="{C4F671EC-11F9-44E6-831B-587836FF8674}" type="pres">
-      <dgm:prSet presAssocID="{9D66F4DC-5515-44A6-B398-000441BCF252}" presName="connectorText" presStyleLbl="sibTrans2D1" presStyleIdx="2" presStyleCnt="3"/>
-      <dgm:spPr/>
-    </dgm:pt>
-    <dgm:pt modelId="{E59F64F9-10B6-427E-9635-CD2FB025E732}" type="pres">
-      <dgm:prSet presAssocID="{D72AC7B8-70C3-4164-A573-1775C54D1F99}" presName="node" presStyleLbl="node1" presStyleIdx="3" presStyleCnt="4">
-        <dgm:presLayoutVars>
-          <dgm:bulletEnabled val="1"/>
-        </dgm:presLayoutVars>
-      </dgm:prSet>
-      <dgm:spPr/>
-    </dgm:pt>
-  </dgm:ptLst>
-  <dgm:cxnLst>
-    <dgm:cxn modelId="{F7720F17-B174-4518-A4FE-BB57D509B1C7}" type="presOf" srcId="{15F58CBC-41B6-40C9-9849-2A7EE815004B}" destId="{EFC586DF-AD30-47A7-B946-8BC883D21B53}" srcOrd="0" destOrd="0" presId="urn:microsoft.com/office/officeart/2005/8/layout/process1"/>
-    <dgm:cxn modelId="{C530C036-E73E-4A04-A711-9D54D53E8E1E}" srcId="{15F58CBC-41B6-40C9-9849-2A7EE815004B}" destId="{BE78D32D-248D-41EE-AA50-689F65E362B3}" srcOrd="1" destOrd="0" parTransId="{18C2A36D-E94B-405C-A8AC-5B70F2060DF7}" sibTransId="{CAF8DDFA-E960-441D-8B7F-6B6149126E52}"/>
-    <dgm:cxn modelId="{ED125E5C-7ECC-4058-A847-635A840EF395}" type="presOf" srcId="{9D66F4DC-5515-44A6-B398-000441BCF252}" destId="{2394DE9F-4D0A-4CF1-8C5D-7DE96D99FA12}" srcOrd="0" destOrd="0" presId="urn:microsoft.com/office/officeart/2005/8/layout/process1"/>
-    <dgm:cxn modelId="{4ED13E41-83C8-4B58-ABA2-BAD6D6006D93}" type="presOf" srcId="{BE78D32D-248D-41EE-AA50-689F65E362B3}" destId="{45337002-4022-4D3C-8EFF-5105F29FBD62}" srcOrd="0" destOrd="0" presId="urn:microsoft.com/office/officeart/2005/8/layout/process1"/>
-    <dgm:cxn modelId="{6FBE2D82-EBF0-4CC8-9E7B-66382FBA9BC2}" type="presOf" srcId="{E6C1DFBF-7DBB-489E-BB6D-E829B1D8DC89}" destId="{27E5DA1F-8D7B-496B-BE6C-3F93ED4057AB}" srcOrd="0" destOrd="0" presId="urn:microsoft.com/office/officeart/2005/8/layout/process1"/>
-    <dgm:cxn modelId="{CBB74887-8DE6-4359-BE3B-2BBB76D36B41}" type="presOf" srcId="{D72AC7B8-70C3-4164-A573-1775C54D1F99}" destId="{E59F64F9-10B6-427E-9635-CD2FB025E732}" srcOrd="0" destOrd="0" presId="urn:microsoft.com/office/officeart/2005/8/layout/process1"/>
-    <dgm:cxn modelId="{8F38338A-9036-4494-97E6-EACD0AC24A17}" type="presOf" srcId="{9D66F4DC-5515-44A6-B398-000441BCF252}" destId="{C4F671EC-11F9-44E6-831B-587836FF8674}" srcOrd="1" destOrd="0" presId="urn:microsoft.com/office/officeart/2005/8/layout/process1"/>
-    <dgm:cxn modelId="{C970278E-EC7F-4871-8B10-2DEC0B7011CD}" srcId="{15F58CBC-41B6-40C9-9849-2A7EE815004B}" destId="{5D3B9E5B-73C4-431C-B3BB-A592C0E4251E}" srcOrd="2" destOrd="0" parTransId="{DB694B4A-D61F-424A-8A74-04915400ACC6}" sibTransId="{9D66F4DC-5515-44A6-B398-000441BCF252}"/>
-    <dgm:cxn modelId="{5CE2C49A-7AD0-4D93-B867-534DF07FBB6D}" srcId="{15F58CBC-41B6-40C9-9849-2A7EE815004B}" destId="{D72AC7B8-70C3-4164-A573-1775C54D1F99}" srcOrd="3" destOrd="0" parTransId="{D0A45359-3F33-45C6-9372-FDD82911124E}" sibTransId="{FC901B53-BB63-45DD-83F2-D7B35168E167}"/>
-    <dgm:cxn modelId="{CB9A839E-13E7-4165-9032-62FC98717031}" srcId="{15F58CBC-41B6-40C9-9849-2A7EE815004B}" destId="{E6C1DFBF-7DBB-489E-BB6D-E829B1D8DC89}" srcOrd="0" destOrd="0" parTransId="{79F834C1-C7FE-4120-BDC0-4877D1AF4B2F}" sibTransId="{105A59FB-239E-41F3-9123-79F689962D8D}"/>
-    <dgm:cxn modelId="{3C9CE0A5-DB7B-45D7-B8A6-48ED9071BA5C}" type="presOf" srcId="{105A59FB-239E-41F3-9123-79F689962D8D}" destId="{E09CE1B3-307F-4E71-ABC1-8193D6A333DC}" srcOrd="0" destOrd="0" presId="urn:microsoft.com/office/officeart/2005/8/layout/process1"/>
-    <dgm:cxn modelId="{79668BB0-E443-4A6C-ADA8-22FCE0512847}" type="presOf" srcId="{CAF8DDFA-E960-441D-8B7F-6B6149126E52}" destId="{6BB2352A-F001-4372-BA15-8D624AE2CF45}" srcOrd="0" destOrd="0" presId="urn:microsoft.com/office/officeart/2005/8/layout/process1"/>
-    <dgm:cxn modelId="{441259CA-561E-43EA-89C7-23E19E61446E}" type="presOf" srcId="{105A59FB-239E-41F3-9123-79F689962D8D}" destId="{7A58F083-2B19-42F7-B5C7-6461EFE9FD4E}" srcOrd="1" destOrd="0" presId="urn:microsoft.com/office/officeart/2005/8/layout/process1"/>
-    <dgm:cxn modelId="{3D3BB9CD-E047-4F37-B325-336002B36C61}" type="presOf" srcId="{5D3B9E5B-73C4-431C-B3BB-A592C0E4251E}" destId="{C252816E-3832-4CBD-8947-FDA9418EB451}" srcOrd="0" destOrd="0" presId="urn:microsoft.com/office/officeart/2005/8/layout/process1"/>
-    <dgm:cxn modelId="{E4C317F7-8E7E-4793-870F-A563194E87E8}" type="presOf" srcId="{CAF8DDFA-E960-441D-8B7F-6B6149126E52}" destId="{C3C31CA6-B7DB-4321-9941-FB2B356CE808}" srcOrd="1" destOrd="0" presId="urn:microsoft.com/office/officeart/2005/8/layout/process1"/>
-    <dgm:cxn modelId="{3EFF9083-1684-4F22-956A-3DD8ED6B311F}" type="presParOf" srcId="{EFC586DF-AD30-47A7-B946-8BC883D21B53}" destId="{27E5DA1F-8D7B-496B-BE6C-3F93ED4057AB}" srcOrd="0" destOrd="0" presId="urn:microsoft.com/office/officeart/2005/8/layout/process1"/>
-    <dgm:cxn modelId="{67417A19-09EF-4D22-9B3D-6F458F454DC4}" type="presParOf" srcId="{EFC586DF-AD30-47A7-B946-8BC883D21B53}" destId="{E09CE1B3-307F-4E71-ABC1-8193D6A333DC}" srcOrd="1" destOrd="0" presId="urn:microsoft.com/office/officeart/2005/8/layout/process1"/>
-    <dgm:cxn modelId="{EAD84979-8C98-4E32-9973-1CD0D9A273F5}" type="presParOf" srcId="{E09CE1B3-307F-4E71-ABC1-8193D6A333DC}" destId="{7A58F083-2B19-42F7-B5C7-6461EFE9FD4E}" srcOrd="0" destOrd="0" presId="urn:microsoft.com/office/officeart/2005/8/layout/process1"/>
-    <dgm:cxn modelId="{A3036F80-CBE5-4536-86C5-61F8F5C136CF}" type="presParOf" srcId="{EFC586DF-AD30-47A7-B946-8BC883D21B53}" destId="{45337002-4022-4D3C-8EFF-5105F29FBD62}" srcOrd="2" destOrd="0" presId="urn:microsoft.com/office/officeart/2005/8/layout/process1"/>
-    <dgm:cxn modelId="{23309013-6D9D-408E-986A-A6356B73D866}" type="presParOf" srcId="{EFC586DF-AD30-47A7-B946-8BC883D21B53}" destId="{6BB2352A-F001-4372-BA15-8D624AE2CF45}" srcOrd="3" destOrd="0" presId="urn:microsoft.com/office/officeart/2005/8/layout/process1"/>
-    <dgm:cxn modelId="{8F95955D-DAAB-4715-8230-CDAB0FD4CB2E}" type="presParOf" srcId="{6BB2352A-F001-4372-BA15-8D624AE2CF45}" destId="{C3C31CA6-B7DB-4321-9941-FB2B356CE808}" srcOrd="0" destOrd="0" presId="urn:microsoft.com/office/officeart/2005/8/layout/process1"/>
-    <dgm:cxn modelId="{5017C0E9-20D3-48B8-8734-418425A967B7}" type="presParOf" srcId="{EFC586DF-AD30-47A7-B946-8BC883D21B53}" destId="{C252816E-3832-4CBD-8947-FDA9418EB451}" srcOrd="4" destOrd="0" presId="urn:microsoft.com/office/officeart/2005/8/layout/process1"/>
-    <dgm:cxn modelId="{89B61BD4-95C8-48AF-A857-98D96C504E41}" type="presParOf" srcId="{EFC586DF-AD30-47A7-B946-8BC883D21B53}" destId="{2394DE9F-4D0A-4CF1-8C5D-7DE96D99FA12}" srcOrd="5" destOrd="0" presId="urn:microsoft.com/office/officeart/2005/8/layout/process1"/>
-    <dgm:cxn modelId="{91545F43-BCB8-44DA-AC5D-918EF2D0C28B}" type="presParOf" srcId="{2394DE9F-4D0A-4CF1-8C5D-7DE96D99FA12}" destId="{C4F671EC-11F9-44E6-831B-587836FF8674}" srcOrd="0" destOrd="0" presId="urn:microsoft.com/office/officeart/2005/8/layout/process1"/>
-    <dgm:cxn modelId="{4DE66ED2-2BB5-471A-BDC3-1BC32F9F47AB}" type="presParOf" srcId="{EFC586DF-AD30-47A7-B946-8BC883D21B53}" destId="{E59F64F9-10B6-427E-9635-CD2FB025E732}" srcOrd="6" destOrd="0" presId="urn:microsoft.com/office/officeart/2005/8/layout/process1"/>
-  </dgm:cxnLst>
-  <dgm:bg/>
-  <dgm:whole/>
-  <dgm:extLst>
-    <a:ext uri="http://schemas.microsoft.com/office/drawing/2008/diagram">
-      <dsp:dataModelExt xmlns:dsp="http://schemas.microsoft.com/office/drawing/2008/diagram" relId="rId6" minVer="http://schemas.openxmlformats.org/drawingml/2006/diagram"/>
-    </a:ext>
-  </dgm:extLst>
-</dgm:dataModel>
-</file>
-
-<file path=ppt/diagrams/drawing1.xml><?xml version="1.0" encoding="utf-8"?>
-<dsp:drawing xmlns:dgm="http://schemas.openxmlformats.org/drawingml/2006/diagram" xmlns:dsp="http://schemas.microsoft.com/office/drawing/2008/diagram" xmlns:a="http://schemas.openxmlformats.org/drawingml/2006/main">
-  <dsp:spTree>
-    <dsp:nvGrpSpPr>
-      <dsp:cNvPr id="0" name=""/>
-      <dsp:cNvGrpSpPr/>
-    </dsp:nvGrpSpPr>
-    <dsp:grpSpPr/>
-    <dsp:sp modelId="{27E5DA1F-8D7B-496B-BE6C-3F93ED4057AB}">
-      <dsp:nvSpPr>
-        <dsp:cNvPr id="0" name=""/>
-        <dsp:cNvSpPr/>
-      </dsp:nvSpPr>
-      <dsp:spPr>
-        <a:xfrm>
-          <a:off x="4962" y="1356440"/>
-          <a:ext cx="2169524" cy="1301714"/>
-        </a:xfrm>
-        <a:prstGeom prst="roundRect">
-          <a:avLst>
-            <a:gd name="adj" fmla="val 10000"/>
-          </a:avLst>
-        </a:prstGeom>
-        <a:solidFill>
-          <a:schemeClr val="accent1">
-            <a:hueOff val="0"/>
-            <a:satOff val="0"/>
-            <a:lumOff val="0"/>
-            <a:alphaOff val="0"/>
-          </a:schemeClr>
-        </a:solidFill>
-        <a:ln w="12700" cap="flat" cmpd="sng" algn="ctr">
-          <a:solidFill>
-            <a:schemeClr val="lt1">
-              <a:hueOff val="0"/>
-              <a:satOff val="0"/>
-              <a:lumOff val="0"/>
-              <a:alphaOff val="0"/>
-            </a:schemeClr>
-          </a:solidFill>
-          <a:prstDash val="solid"/>
-          <a:miter lim="800000"/>
-        </a:ln>
-        <a:effectLst/>
-      </dsp:spPr>
-      <dsp:style>
-        <a:lnRef idx="2">
-          <a:scrgbClr r="0" g="0" b="0"/>
-        </a:lnRef>
-        <a:fillRef idx="1">
-          <a:scrgbClr r="0" g="0" b="0"/>
-        </a:fillRef>
-        <a:effectRef idx="0">
-          <a:scrgbClr r="0" g="0" b="0"/>
-        </a:effectRef>
-        <a:fontRef idx="minor">
-          <a:schemeClr val="lt1"/>
-        </a:fontRef>
-      </dsp:style>
-      <dsp:txBody>
-        <a:bodyPr spcFirstLastPara="0" vert="horz" wrap="square" lIns="87630" tIns="87630" rIns="87630" bIns="87630" numCol="1" spcCol="1270" anchor="ctr" anchorCtr="0">
-          <a:noAutofit/>
-        </a:bodyPr>
-        <a:lstStyle/>
-        <a:p>
-          <a:pPr marL="0" lvl="0" indent="0" algn="ctr" defTabSz="1022350">
-            <a:lnSpc>
-              <a:spcPct val="90000"/>
-            </a:lnSpc>
-            <a:spcBef>
-              <a:spcPct val="0"/>
-            </a:spcBef>
-            <a:spcAft>
-              <a:spcPct val="35000"/>
-            </a:spcAft>
-            <a:buNone/>
-          </a:pPr>
-          <a:r>
-            <a:rPr lang="en-US" sz="2300" kern="1200" dirty="0"/>
-            <a:t>Planning and Analysis</a:t>
-          </a:r>
-        </a:p>
-      </dsp:txBody>
-      <dsp:txXfrm>
-        <a:off x="43088" y="1394566"/>
-        <a:ext cx="2093272" cy="1225462"/>
-      </dsp:txXfrm>
-    </dsp:sp>
-    <dsp:sp modelId="{E09CE1B3-307F-4E71-ABC1-8193D6A333DC}">
-      <dsp:nvSpPr>
-        <dsp:cNvPr id="0" name=""/>
-        <dsp:cNvSpPr/>
-      </dsp:nvSpPr>
-      <dsp:spPr>
-        <a:xfrm>
-          <a:off x="2391439" y="1738276"/>
-          <a:ext cx="459939" cy="538042"/>
-        </a:xfrm>
-        <a:prstGeom prst="rightArrow">
-          <a:avLst>
-            <a:gd name="adj1" fmla="val 60000"/>
-            <a:gd name="adj2" fmla="val 50000"/>
-          </a:avLst>
-        </a:prstGeom>
-        <a:solidFill>
-          <a:schemeClr val="accent1">
-            <a:tint val="60000"/>
-            <a:hueOff val="0"/>
-            <a:satOff val="0"/>
-            <a:lumOff val="0"/>
-            <a:alphaOff val="0"/>
-          </a:schemeClr>
-        </a:solidFill>
-        <a:ln>
-          <a:noFill/>
-        </a:ln>
-        <a:effectLst/>
-      </dsp:spPr>
-      <dsp:style>
-        <a:lnRef idx="0">
-          <a:scrgbClr r="0" g="0" b="0"/>
-        </a:lnRef>
-        <a:fillRef idx="1">
-          <a:scrgbClr r="0" g="0" b="0"/>
-        </a:fillRef>
-        <a:effectRef idx="0">
-          <a:scrgbClr r="0" g="0" b="0"/>
-        </a:effectRef>
-        <a:fontRef idx="minor">
-          <a:schemeClr val="lt1"/>
-        </a:fontRef>
-      </dsp:style>
-      <dsp:txBody>
-        <a:bodyPr spcFirstLastPara="0" vert="horz" wrap="square" lIns="0" tIns="0" rIns="0" bIns="0" numCol="1" spcCol="1270" anchor="ctr" anchorCtr="0">
-          <a:noAutofit/>
-        </a:bodyPr>
-        <a:lstStyle/>
-        <a:p>
-          <a:pPr marL="0" lvl="0" indent="0" algn="ctr" defTabSz="844550">
-            <a:lnSpc>
-              <a:spcPct val="90000"/>
-            </a:lnSpc>
-            <a:spcBef>
-              <a:spcPct val="0"/>
-            </a:spcBef>
-            <a:spcAft>
-              <a:spcPct val="35000"/>
-            </a:spcAft>
-            <a:buNone/>
-          </a:pPr>
-          <a:endParaRPr lang="en-US" sz="1900" kern="1200"/>
-        </a:p>
-      </dsp:txBody>
-      <dsp:txXfrm>
-        <a:off x="2391439" y="1845884"/>
-        <a:ext cx="321957" cy="322826"/>
-      </dsp:txXfrm>
-    </dsp:sp>
-    <dsp:sp modelId="{45337002-4022-4D3C-8EFF-5105F29FBD62}">
-      <dsp:nvSpPr>
-        <dsp:cNvPr id="0" name=""/>
-        <dsp:cNvSpPr/>
-      </dsp:nvSpPr>
-      <dsp:spPr>
-        <a:xfrm>
-          <a:off x="3042297" y="1356440"/>
-          <a:ext cx="2169524" cy="1301714"/>
-        </a:xfrm>
-        <a:prstGeom prst="roundRect">
-          <a:avLst>
-            <a:gd name="adj" fmla="val 10000"/>
-          </a:avLst>
-        </a:prstGeom>
-        <a:solidFill>
-          <a:schemeClr val="accent1">
-            <a:hueOff val="0"/>
-            <a:satOff val="0"/>
-            <a:lumOff val="0"/>
-            <a:alphaOff val="0"/>
-          </a:schemeClr>
-        </a:solidFill>
-        <a:ln w="12700" cap="flat" cmpd="sng" algn="ctr">
-          <a:solidFill>
-            <a:schemeClr val="lt1">
-              <a:hueOff val="0"/>
-              <a:satOff val="0"/>
-              <a:lumOff val="0"/>
-              <a:alphaOff val="0"/>
-            </a:schemeClr>
-          </a:solidFill>
-          <a:prstDash val="solid"/>
-          <a:miter lim="800000"/>
-        </a:ln>
-        <a:effectLst/>
-      </dsp:spPr>
-      <dsp:style>
-        <a:lnRef idx="2">
-          <a:scrgbClr r="0" g="0" b="0"/>
-        </a:lnRef>
-        <a:fillRef idx="1">
-          <a:scrgbClr r="0" g="0" b="0"/>
-        </a:fillRef>
-        <a:effectRef idx="0">
-          <a:scrgbClr r="0" g="0" b="0"/>
-        </a:effectRef>
-        <a:fontRef idx="minor">
-          <a:schemeClr val="lt1"/>
-        </a:fontRef>
-      </dsp:style>
-      <dsp:txBody>
-        <a:bodyPr spcFirstLastPara="0" vert="horz" wrap="square" lIns="87630" tIns="87630" rIns="87630" bIns="87630" numCol="1" spcCol="1270" anchor="ctr" anchorCtr="0">
-          <a:noAutofit/>
-        </a:bodyPr>
-        <a:lstStyle/>
-        <a:p>
-          <a:pPr marL="0" lvl="0" indent="0" algn="ctr" defTabSz="1022350">
-            <a:lnSpc>
-              <a:spcPct val="90000"/>
-            </a:lnSpc>
-            <a:spcBef>
-              <a:spcPct val="0"/>
-            </a:spcBef>
-            <a:spcAft>
-              <a:spcPct val="35000"/>
-            </a:spcAft>
-            <a:buNone/>
-          </a:pPr>
-          <a:r>
-            <a:rPr lang="en-US" sz="2300" kern="1200"/>
-            <a:t>Design</a:t>
-          </a:r>
-          <a:endParaRPr lang="en-US" sz="2300" kern="1200" dirty="0"/>
-        </a:p>
-      </dsp:txBody>
-      <dsp:txXfrm>
-        <a:off x="3080423" y="1394566"/>
-        <a:ext cx="2093272" cy="1225462"/>
-      </dsp:txXfrm>
-    </dsp:sp>
-    <dsp:sp modelId="{6BB2352A-F001-4372-BA15-8D624AE2CF45}">
-      <dsp:nvSpPr>
-        <dsp:cNvPr id="0" name=""/>
-        <dsp:cNvSpPr/>
-      </dsp:nvSpPr>
-      <dsp:spPr>
-        <a:xfrm>
-          <a:off x="5428774" y="1738276"/>
-          <a:ext cx="459939" cy="538042"/>
-        </a:xfrm>
-        <a:prstGeom prst="rightArrow">
-          <a:avLst>
-            <a:gd name="adj1" fmla="val 60000"/>
-            <a:gd name="adj2" fmla="val 50000"/>
-          </a:avLst>
-        </a:prstGeom>
-        <a:solidFill>
-          <a:schemeClr val="accent1">
-            <a:tint val="60000"/>
-            <a:hueOff val="0"/>
-            <a:satOff val="0"/>
-            <a:lumOff val="0"/>
-            <a:alphaOff val="0"/>
-          </a:schemeClr>
-        </a:solidFill>
-        <a:ln>
-          <a:noFill/>
-        </a:ln>
-        <a:effectLst/>
-      </dsp:spPr>
-      <dsp:style>
-        <a:lnRef idx="0">
-          <a:scrgbClr r="0" g="0" b="0"/>
-        </a:lnRef>
-        <a:fillRef idx="1">
-          <a:scrgbClr r="0" g="0" b="0"/>
-        </a:fillRef>
-        <a:effectRef idx="0">
-          <a:scrgbClr r="0" g="0" b="0"/>
-        </a:effectRef>
-        <a:fontRef idx="minor">
-          <a:schemeClr val="lt1"/>
-        </a:fontRef>
-      </dsp:style>
-      <dsp:txBody>
-        <a:bodyPr spcFirstLastPara="0" vert="horz" wrap="square" lIns="0" tIns="0" rIns="0" bIns="0" numCol="1" spcCol="1270" anchor="ctr" anchorCtr="0">
-          <a:noAutofit/>
-        </a:bodyPr>
-        <a:lstStyle/>
-        <a:p>
-          <a:pPr marL="0" lvl="0" indent="0" algn="ctr" defTabSz="844550">
-            <a:lnSpc>
-              <a:spcPct val="90000"/>
-            </a:lnSpc>
-            <a:spcBef>
-              <a:spcPct val="0"/>
-            </a:spcBef>
-            <a:spcAft>
-              <a:spcPct val="35000"/>
-            </a:spcAft>
-            <a:buNone/>
-          </a:pPr>
-          <a:endParaRPr lang="en-US" sz="1900" kern="1200"/>
-        </a:p>
-      </dsp:txBody>
-      <dsp:txXfrm>
-        <a:off x="5428774" y="1845884"/>
-        <a:ext cx="321957" cy="322826"/>
-      </dsp:txXfrm>
-    </dsp:sp>
-    <dsp:sp modelId="{C252816E-3832-4CBD-8947-FDA9418EB451}">
-      <dsp:nvSpPr>
-        <dsp:cNvPr id="0" name=""/>
-        <dsp:cNvSpPr/>
-      </dsp:nvSpPr>
-      <dsp:spPr>
-        <a:xfrm>
-          <a:off x="6079631" y="1356440"/>
-          <a:ext cx="2169524" cy="1301714"/>
-        </a:xfrm>
-        <a:prstGeom prst="roundRect">
-          <a:avLst>
-            <a:gd name="adj" fmla="val 10000"/>
-          </a:avLst>
-        </a:prstGeom>
-        <a:solidFill>
-          <a:schemeClr val="accent1">
-            <a:hueOff val="0"/>
-            <a:satOff val="0"/>
-            <a:lumOff val="0"/>
-            <a:alphaOff val="0"/>
-          </a:schemeClr>
-        </a:solidFill>
-        <a:ln w="12700" cap="flat" cmpd="sng" algn="ctr">
-          <a:solidFill>
-            <a:schemeClr val="lt1">
-              <a:hueOff val="0"/>
-              <a:satOff val="0"/>
-              <a:lumOff val="0"/>
-              <a:alphaOff val="0"/>
-            </a:schemeClr>
-          </a:solidFill>
-          <a:prstDash val="solid"/>
-          <a:miter lim="800000"/>
-        </a:ln>
-        <a:effectLst/>
-      </dsp:spPr>
-      <dsp:style>
-        <a:lnRef idx="2">
-          <a:scrgbClr r="0" g="0" b="0"/>
-        </a:lnRef>
-        <a:fillRef idx="1">
-          <a:scrgbClr r="0" g="0" b="0"/>
-        </a:fillRef>
-        <a:effectRef idx="0">
-          <a:scrgbClr r="0" g="0" b="0"/>
-        </a:effectRef>
-        <a:fontRef idx="minor">
-          <a:schemeClr val="lt1"/>
-        </a:fontRef>
-      </dsp:style>
-      <dsp:txBody>
-        <a:bodyPr spcFirstLastPara="0" vert="horz" wrap="square" lIns="87630" tIns="87630" rIns="87630" bIns="87630" numCol="1" spcCol="1270" anchor="ctr" anchorCtr="0">
-          <a:noAutofit/>
-        </a:bodyPr>
-        <a:lstStyle/>
-        <a:p>
-          <a:pPr marL="0" lvl="0" indent="0" algn="ctr" defTabSz="1022350">
-            <a:lnSpc>
-              <a:spcPct val="90000"/>
-            </a:lnSpc>
-            <a:spcBef>
-              <a:spcPct val="0"/>
-            </a:spcBef>
-            <a:spcAft>
-              <a:spcPct val="35000"/>
-            </a:spcAft>
-            <a:buNone/>
-          </a:pPr>
-          <a:r>
-            <a:rPr lang="en-US" sz="2300" kern="1200"/>
-            <a:t>Verification and Validation</a:t>
-          </a:r>
-          <a:endParaRPr lang="en-US" sz="2300" kern="1200" dirty="0"/>
-        </a:p>
-      </dsp:txBody>
-      <dsp:txXfrm>
-        <a:off x="6117757" y="1394566"/>
-        <a:ext cx="2093272" cy="1225462"/>
-      </dsp:txXfrm>
-    </dsp:sp>
-    <dsp:sp modelId="{2394DE9F-4D0A-4CF1-8C5D-7DE96D99FA12}">
-      <dsp:nvSpPr>
-        <dsp:cNvPr id="0" name=""/>
-        <dsp:cNvSpPr/>
-      </dsp:nvSpPr>
-      <dsp:spPr>
-        <a:xfrm>
-          <a:off x="8466109" y="1738276"/>
-          <a:ext cx="459939" cy="538042"/>
-        </a:xfrm>
-        <a:prstGeom prst="rightArrow">
-          <a:avLst>
-            <a:gd name="adj1" fmla="val 60000"/>
-            <a:gd name="adj2" fmla="val 50000"/>
-          </a:avLst>
-        </a:prstGeom>
-        <a:solidFill>
-          <a:schemeClr val="accent1">
-            <a:tint val="60000"/>
-            <a:hueOff val="0"/>
-            <a:satOff val="0"/>
-            <a:lumOff val="0"/>
-            <a:alphaOff val="0"/>
-          </a:schemeClr>
-        </a:solidFill>
-        <a:ln>
-          <a:noFill/>
-        </a:ln>
-        <a:effectLst/>
-      </dsp:spPr>
-      <dsp:style>
-        <a:lnRef idx="0">
-          <a:scrgbClr r="0" g="0" b="0"/>
-        </a:lnRef>
-        <a:fillRef idx="1">
-          <a:scrgbClr r="0" g="0" b="0"/>
-        </a:fillRef>
-        <a:effectRef idx="0">
-          <a:scrgbClr r="0" g="0" b="0"/>
-        </a:effectRef>
-        <a:fontRef idx="minor">
-          <a:schemeClr val="lt1"/>
-        </a:fontRef>
-      </dsp:style>
-      <dsp:txBody>
-        <a:bodyPr spcFirstLastPara="0" vert="horz" wrap="square" lIns="0" tIns="0" rIns="0" bIns="0" numCol="1" spcCol="1270" anchor="ctr" anchorCtr="0">
-          <a:noAutofit/>
-        </a:bodyPr>
-        <a:lstStyle/>
-        <a:p>
-          <a:pPr marL="0" lvl="0" indent="0" algn="ctr" defTabSz="844550">
-            <a:lnSpc>
-              <a:spcPct val="90000"/>
-            </a:lnSpc>
-            <a:spcBef>
-              <a:spcPct val="0"/>
-            </a:spcBef>
-            <a:spcAft>
-              <a:spcPct val="35000"/>
-            </a:spcAft>
-            <a:buNone/>
-          </a:pPr>
-          <a:endParaRPr lang="en-US" sz="1900" kern="1200"/>
-        </a:p>
-      </dsp:txBody>
-      <dsp:txXfrm>
-        <a:off x="8466109" y="1845884"/>
-        <a:ext cx="321957" cy="322826"/>
-      </dsp:txXfrm>
-    </dsp:sp>
-    <dsp:sp modelId="{E59F64F9-10B6-427E-9635-CD2FB025E732}">
-      <dsp:nvSpPr>
-        <dsp:cNvPr id="0" name=""/>
-        <dsp:cNvSpPr/>
-      </dsp:nvSpPr>
-      <dsp:spPr>
-        <a:xfrm>
-          <a:off x="9116966" y="1356440"/>
-          <a:ext cx="2169524" cy="1301714"/>
-        </a:xfrm>
-        <a:prstGeom prst="roundRect">
-          <a:avLst>
-            <a:gd name="adj" fmla="val 10000"/>
-          </a:avLst>
-        </a:prstGeom>
-        <a:solidFill>
-          <a:schemeClr val="accent1">
-            <a:hueOff val="0"/>
-            <a:satOff val="0"/>
-            <a:lumOff val="0"/>
-            <a:alphaOff val="0"/>
-          </a:schemeClr>
-        </a:solidFill>
-        <a:ln w="12700" cap="flat" cmpd="sng" algn="ctr">
-          <a:solidFill>
-            <a:schemeClr val="lt1">
-              <a:hueOff val="0"/>
-              <a:satOff val="0"/>
-              <a:lumOff val="0"/>
-              <a:alphaOff val="0"/>
-            </a:schemeClr>
-          </a:solidFill>
-          <a:prstDash val="solid"/>
-          <a:miter lim="800000"/>
-        </a:ln>
-        <a:effectLst/>
-      </dsp:spPr>
-      <dsp:style>
-        <a:lnRef idx="2">
-          <a:scrgbClr r="0" g="0" b="0"/>
-        </a:lnRef>
-        <a:fillRef idx="1">
-          <a:scrgbClr r="0" g="0" b="0"/>
-        </a:fillRef>
-        <a:effectRef idx="0">
-          <a:scrgbClr r="0" g="0" b="0"/>
-        </a:effectRef>
-        <a:fontRef idx="minor">
-          <a:schemeClr val="lt1"/>
-        </a:fontRef>
-      </dsp:style>
-      <dsp:txBody>
-        <a:bodyPr spcFirstLastPara="0" vert="horz" wrap="square" lIns="87630" tIns="87630" rIns="87630" bIns="87630" numCol="1" spcCol="1270" anchor="ctr" anchorCtr="0">
-          <a:noAutofit/>
-        </a:bodyPr>
-        <a:lstStyle/>
-        <a:p>
-          <a:pPr marL="0" lvl="0" indent="0" algn="ctr" defTabSz="1022350">
-            <a:lnSpc>
-              <a:spcPct val="90000"/>
-            </a:lnSpc>
-            <a:spcBef>
-              <a:spcPct val="0"/>
-            </a:spcBef>
-            <a:spcAft>
-              <a:spcPct val="35000"/>
-            </a:spcAft>
-            <a:buNone/>
-          </a:pPr>
-          <a:r>
-            <a:rPr lang="en-US" sz="2300" kern="1200"/>
-            <a:t>Implementation and Operation</a:t>
-          </a:r>
-          <a:endParaRPr lang="en-US" sz="2300" kern="1200" dirty="0"/>
-        </a:p>
-      </dsp:txBody>
-      <dsp:txXfrm>
-        <a:off x="9155092" y="1394566"/>
-        <a:ext cx="2093272" cy="1225462"/>
-      </dsp:txXfrm>
-    </dsp:sp>
-  </dsp:spTree>
-</dsp:drawing>
-</file>
-
-<file path=ppt/diagrams/layout1.xml><?xml version="1.0" encoding="utf-8"?>
-<dgm:layoutDef xmlns:dgm="http://schemas.openxmlformats.org/drawingml/2006/diagram" xmlns:a="http://schemas.openxmlformats.org/drawingml/2006/main" uniqueId="urn:microsoft.com/office/officeart/2005/8/layout/process1">
-  <dgm:title val=""/>
-  <dgm:desc val=""/>
-  <dgm:catLst>
-    <dgm:cat type="process" pri="1000"/>
-    <dgm:cat type="convert" pri="15000"/>
-  </dgm:catLst>
-  <dgm:sampData useDef="1">
-    <dgm:dataModel>
-      <dgm:ptLst/>
-      <dgm:bg/>
-      <dgm:whole/>
-    </dgm:dataModel>
-  </dgm:sampData>
-  <dgm:styleData>
-    <dgm:dataModel>
-      <dgm:ptLst>
-        <dgm:pt modelId="0" type="doc"/>
-        <dgm:pt modelId="1"/>
-        <dgm:pt modelId="2"/>
-      </dgm:ptLst>
-      <dgm:cxnLst>
-        <dgm:cxn modelId="3" srcId="0" destId="1" srcOrd="0" destOrd="0"/>
-        <dgm:cxn modelId="4" srcId="0" destId="2" srcOrd="1" destOrd="0"/>
-      </dgm:cxnLst>
-      <dgm:bg/>
-      <dgm:whole/>
-    </dgm:dataModel>
-  </dgm:styleData>
-  <dgm:clrData>
-    <dgm:dataModel>
-      <dgm:ptLst>
-        <dgm:pt modelId="0" type="doc"/>
-        <dgm:pt modelId="1"/>
-        <dgm:pt modelId="2"/>
-        <dgm:pt modelId="3"/>
-        <dgm:pt modelId="4"/>
-      </dgm:ptLst>
-      <dgm:cxnLst>
-        <dgm:cxn modelId="5" srcId="0" destId="1" srcOrd="0" destOrd="0"/>
-        <dgm:cxn modelId="6" srcId="0" destId="2" srcOrd="1" destOrd="0"/>
-        <dgm:cxn modelId="7" srcId="0" destId="3" srcOrd="2" destOrd="0"/>
-        <dgm:cxn modelId="8" srcId="0" destId="4" srcOrd="3" destOrd="0"/>
-      </dgm:cxnLst>
-      <dgm:bg/>
-      <dgm:whole/>
-    </dgm:dataModel>
-  </dgm:clrData>
-  <dgm:layoutNode name="Name0">
-    <dgm:varLst>
-      <dgm:dir/>
-      <dgm:resizeHandles val="exact"/>
-    </dgm:varLst>
-    <dgm:choose name="Name1">
-      <dgm:if name="Name2" func="var" arg="dir" op="equ" val="norm">
-        <dgm:alg type="lin"/>
-      </dgm:if>
-      <dgm:else name="Name3">
-        <dgm:alg type="lin">
-          <dgm:param type="linDir" val="fromR"/>
-        </dgm:alg>
-      </dgm:else>
-    </dgm:choose>
-    <dgm:shape xmlns:r="http://schemas.openxmlformats.org/officeDocument/2006/relationships" r:blip="">
-      <dgm:adjLst/>
-    </dgm:shape>
-    <dgm:presOf/>
-    <dgm:constrLst>
-      <dgm:constr type="w" for="ch" ptType="node" refType="w"/>
-      <dgm:constr type="h" for="ch" ptType="node" op="equ"/>
-      <dgm:constr type="primFontSz" for="ch" ptType="node" op="equ" val="65"/>
-      <dgm:constr type="w" for="ch" ptType="sibTrans" refType="w" refFor="ch" refPtType="node" op="equ" fact="0.4"/>
-      <dgm:constr type="h" for="ch" ptType="sibTrans" op="equ"/>
-      <dgm:constr type="primFontSz" for="des" forName="connectorText" op="equ" val="55"/>
-      <dgm:constr type="primFontSz" for="des" forName="connectorText" refType="primFontSz" refFor="ch" refPtType="node" op="lte" fact="0.8"/>
-    </dgm:constrLst>
-    <dgm:ruleLst/>
-    <dgm:forEach name="nodesForEach" axis="ch" ptType="node">
-      <dgm:layoutNode name="node">
-        <dgm:varLst>
-          <dgm:bulletEnabled val="1"/>
-        </dgm:varLst>
-        <dgm:alg type="tx"/>
-        <dgm:shape xmlns:r="http://schemas.openxmlformats.org/officeDocument/2006/relationships" type="roundRect" r:blip="">
-          <dgm:adjLst>
-            <dgm:adj idx="1" val="0.1"/>
-          </dgm:adjLst>
-        </dgm:shape>
-        <dgm:presOf axis="desOrSelf" ptType="node"/>
-        <dgm:constrLst>
-          <dgm:constr type="h" refType="w" fact="0.6"/>
-          <dgm:constr type="tMarg" refType="primFontSz" fact="0.3"/>
-          <dgm:constr type="bMarg" refType="primFontSz" fact="0.3"/>
-          <dgm:constr type="lMarg" refType="primFontSz" fact="0.3"/>
-          <dgm:constr type="rMarg" refType="primFontSz" fact="0.3"/>
-        </dgm:constrLst>
-        <dgm:ruleLst>
-          <dgm:rule type="primFontSz" val="18" fact="NaN" max="NaN"/>
-          <dgm:rule type="h" val="NaN" fact="1.5" max="NaN"/>
-          <dgm:rule type="primFontSz" val="5" fact="NaN" max="NaN"/>
-          <dgm:rule type="h" val="INF" fact="NaN" max="NaN"/>
-        </dgm:ruleLst>
-      </dgm:layoutNode>
-      <dgm:forEach name="sibTransForEach" axis="followSib" ptType="sibTrans" cnt="1">
-        <dgm:layoutNode name="sibTrans">
-          <dgm:alg type="conn">
-            <dgm:param type="begPts" val="auto"/>
-            <dgm:param type="endPts" val="auto"/>
-          </dgm:alg>
-          <dgm:shape xmlns:r="http://schemas.openxmlformats.org/officeDocument/2006/relationships" type="conn" r:blip="">
-            <dgm:adjLst/>
-          </dgm:shape>
-          <dgm:presOf axis="self"/>
-          <dgm:constrLst>
-            <dgm:constr type="h" refType="w" fact="0.62"/>
-            <dgm:constr type="connDist"/>
-            <dgm:constr type="begPad" refType="connDist" fact="0.25"/>
-            <dgm:constr type="endPad" refType="connDist" fact="0.22"/>
-          </dgm:constrLst>
-          <dgm:ruleLst/>
-          <dgm:layoutNode name="connectorText">
-            <dgm:alg type="tx">
-              <dgm:param type="autoTxRot" val="grav"/>
-            </dgm:alg>
-            <dgm:shape xmlns:r="http://schemas.openxmlformats.org/officeDocument/2006/relationships" type="conn" r:blip="" hideGeom="1">
-              <dgm:adjLst/>
-            </dgm:shape>
-            <dgm:presOf axis="self"/>
-            <dgm:constrLst>
-              <dgm:constr type="lMarg"/>
-              <dgm:constr type="rMarg"/>
-              <dgm:constr type="tMarg"/>
-              <dgm:constr type="bMarg"/>
-            </dgm:constrLst>
-            <dgm:ruleLst>
-              <dgm:rule type="primFontSz" val="5" fact="NaN" max="NaN"/>
-            </dgm:ruleLst>
-          </dgm:layoutNode>
-        </dgm:layoutNode>
-      </dgm:forEach>
-    </dgm:forEach>
-  </dgm:layoutNode>
-</dgm:layoutDef>
-</file>
-
-<file path=ppt/diagrams/quickStyle1.xml><?xml version="1.0" encoding="utf-8"?>
-<dgm:styleDef xmlns:dgm="http://schemas.openxmlformats.org/drawingml/2006/diagram" xmlns:a="http://schemas.openxmlformats.org/drawingml/2006/main" uniqueId="urn:microsoft.com/office/officeart/2005/8/quickstyle/simple1">
-  <dgm:title val=""/>
-  <dgm:desc val=""/>
-  <dgm:catLst>
-    <dgm:cat type="simple" pri="10100"/>
-  </dgm:catLst>
-  <dgm:scene3d>
-    <a:camera prst="orthographicFront"/>
-    <a:lightRig rig="threePt" dir="t"/>
-  </dgm:scene3d>
-  <dgm:styleLbl name="node0">
-    <dgm:scene3d>
-      <a:camera prst="orthographicFront"/>
-      <a:lightRig rig="threePt" dir="t"/>
-    </dgm:scene3d>
-    <dgm:sp3d/>
-    <dgm:txPr/>
-    <dgm:style>
-      <a:lnRef idx="2">
-        <a:scrgbClr r="0" g="0" b="0"/>
-      </a:lnRef>
-      <a:fillRef idx="1">
-        <a:scrgbClr r="0" g="0" b="0"/>
-      </a:fillRef>
-      <a:effectRef idx="0">
-        <a:scrgbClr r="0" g="0" b="0"/>
-      </a:effectRef>
-      <a:fontRef idx="minor">
-        <a:schemeClr val="lt1"/>
-      </a:fontRef>
-    </dgm:style>
-  </dgm:styleLbl>
-  <dgm:styleLbl name="lnNode1">
-    <dgm:scene3d>
-      <a:camera prst="orthographicFront"/>
-      <a:lightRig rig="threePt" dir="t"/>
-    </dgm:scene3d>
-    <dgm:sp3d/>
-    <dgm:txPr/>
-    <dgm:style>
-      <a:lnRef idx="2">
-        <a:scrgbClr r="0" g="0" b="0"/>
-      </a:lnRef>
-      <a:fillRef idx="1">
-        <a:scrgbClr r="0" g="0" b="0"/>
-      </a:fillRef>
-      <a:effectRef idx="0">
-        <a:scrgbClr r="0" g="0" b="0"/>
-      </a:effectRef>
-      <a:fontRef idx="minor">
-        <a:schemeClr val="lt1"/>
-      </a:fontRef>
-    </dgm:style>
-  </dgm:styleLbl>
-  <dgm:styleLbl name="vennNode1">
-    <dgm:scene3d>
-      <a:camera prst="orthographicFront"/>
-      <a:lightRig rig="threePt" dir="t"/>
-    </dgm:scene3d>
-    <dgm:sp3d/>
-    <dgm:txPr/>
-    <dgm:style>
-      <a:lnRef idx="2">
-        <a:scrgbClr r="0" g="0" b="0"/>
-      </a:lnRef>
-      <a:fillRef idx="1">
-        <a:scrgbClr r="0" g="0" b="0"/>
-      </a:fillRef>
-      <a:effectRef idx="0">
-        <a:scrgbClr r="0" g="0" b="0"/>
-      </a:effectRef>
-      <a:fontRef idx="minor">
-        <a:schemeClr val="tx1"/>
-      </a:fontRef>
-    </dgm:style>
-  </dgm:styleLbl>
-  <dgm:styleLbl name="alignNode1">
-    <dgm:scene3d>
-      <a:camera prst="orthographicFront"/>
-      <a:lightRig rig="threePt" dir="t"/>
-    </dgm:scene3d>
-    <dgm:sp3d/>
-    <dgm:txPr/>
-    <dgm:style>
-      <a:lnRef idx="2">
-        <a:scrgbClr r="0" g="0" b="0"/>
-      </a:lnRef>
-      <a:fillRef idx="1">
-        <a:scrgbClr r="0" g="0" b="0"/>
-      </a:fillRef>
-      <a:effectRef idx="0">
-        <a:scrgbClr r="0" g="0" b="0"/>
-      </a:effectRef>
-      <a:fontRef idx="minor">
-        <a:schemeClr val="lt1"/>
-      </a:fontRef>
-    </dgm:style>
-  </dgm:styleLbl>
-  <dgm:styleLbl name="node1">
-    <dgm:scene3d>
-      <a:camera prst="orthographicFront"/>
-      <a:lightRig rig="threePt" dir="t"/>
-    </dgm:scene3d>
-    <dgm:sp3d/>
-    <dgm:txPr/>
-    <dgm:style>
-      <a:lnRef idx="2">
-        <a:scrgbClr r="0" g="0" b="0"/>
-      </a:lnRef>
-      <a:fillRef idx="1">
-        <a:scrgbClr r="0" g="0" b="0"/>
-      </a:fillRef>
-      <a:effectRef idx="0">
-        <a:scrgbClr r="0" g="0" b="0"/>
-      </a:effectRef>
-      <a:fontRef idx="minor">
-        <a:schemeClr val="lt1"/>
-      </a:fontRef>
-    </dgm:style>
-  </dgm:styleLbl>
-  <dgm:styleLbl name="node2">
-    <dgm:scene3d>
-      <a:camera prst="orthographicFront"/>
-      <a:lightRig rig="threePt" dir="t"/>
-    </dgm:scene3d>
-    <dgm:sp3d/>
-    <dgm:txPr/>
-    <dgm:style>
-      <a:lnRef idx="2">
-        <a:scrgbClr r="0" g="0" b="0"/>
-      </a:lnRef>
-      <a:fillRef idx="1">
-        <a:scrgbClr r="0" g="0" b="0"/>
-      </a:fillRef>
-      <a:effectRef idx="0">
-        <a:scrgbClr r="0" g="0" b="0"/>
-      </a:effectRef>
-      <a:fontRef idx="minor">
-        <a:schemeClr val="lt1"/>
-      </a:fontRef>
-    </dgm:style>
-  </dgm:styleLbl>
-  <dgm:styleLbl name="node3">
-    <dgm:scene3d>
-      <a:camera prst="orthographicFront"/>
-      <a:lightRig rig="threePt" dir="t"/>
-    </dgm:scene3d>
-    <dgm:sp3d/>
-    <dgm:txPr/>
-    <dgm:style>
-      <a:lnRef idx="2">
-        <a:scrgbClr r="0" g="0" b="0"/>
-      </a:lnRef>
-      <a:fillRef idx="1">
-        <a:scrgbClr r="0" g="0" b="0"/>
-      </a:fillRef>
-      <a:effectRef idx="0">
-        <a:scrgbClr r="0" g="0" b="0"/>
-      </a:effectRef>
-      <a:fontRef idx="minor">
-        <a:schemeClr val="lt1"/>
-      </a:fontRef>
-    </dgm:style>
-  </dgm:styleLbl>
-  <dgm:styleLbl name="node4">
-    <dgm:scene3d>
-      <a:camera prst="orthographicFront"/>
-      <a:lightRig rig="threePt" dir="t"/>
-    </dgm:scene3d>
-    <dgm:sp3d/>
-    <dgm:txPr/>
-    <dgm:style>
-      <a:lnRef idx="2">
-        <a:scrgbClr r="0" g="0" b="0"/>
-      </a:lnRef>
-      <a:fillRef idx="1">
-        <a:scrgbClr r="0" g="0" b="0"/>
-      </a:fillRef>
-      <a:effectRef idx="0">
-        <a:scrgbClr r="0" g="0" b="0"/>
-      </a:effectRef>
-      <a:fontRef idx="minor">
-        <a:schemeClr val="lt1"/>
-      </a:fontRef>
-    </dgm:style>
-  </dgm:styleLbl>
-  <dgm:styleLbl name="fgImgPlace1">
-    <dgm:scene3d>
-      <a:camera prst="orthographicFront"/>
-      <a:lightRig rig="threePt" dir="t"/>
-    </dgm:scene3d>
-    <dgm:sp3d/>
-    <dgm:txPr/>
-    <dgm:style>
-      <a:lnRef idx="2">
-        <a:scrgbClr r="0" g="0" b="0"/>
-      </a:lnRef>
-      <a:fillRef idx="1">
-        <a:scrgbClr r="0" g="0" b="0"/>
-      </a:fillRef>
-      <a:effectRef idx="0">
-        <a:scrgbClr r="0" g="0" b="0"/>
-      </a:effectRef>
-      <a:fontRef idx="minor"/>
-    </dgm:style>
-  </dgm:styleLbl>
-  <dgm:styleLbl name="alignImgPlace1">
-    <dgm:scene3d>
-      <a:camera prst="orthographicFront"/>
-      <a:lightRig rig="threePt" dir="t"/>
-    </dgm:scene3d>
-    <dgm:sp3d/>
-    <dgm:txPr/>
-    <dgm:style>
-      <a:lnRef idx="2">
-        <a:scrgbClr r="0" g="0" b="0"/>
-      </a:lnRef>
-      <a:fillRef idx="1">
-        <a:scrgbClr r="0" g="0" b="0"/>
-      </a:fillRef>
-      <a:effectRef idx="0">
-        <a:scrgbClr r="0" g="0" b="0"/>
-      </a:effectRef>
-      <a:fontRef idx="minor"/>
-    </dgm:style>
-  </dgm:styleLbl>
-  <dgm:styleLbl name="bgImgPlace1">
-    <dgm:scene3d>
-      <a:camera prst="orthographicFront"/>
-      <a:lightRig rig="threePt" dir="t"/>
-    </dgm:scene3d>
-    <dgm:sp3d/>
-    <dgm:txPr/>
-    <dgm:style>
-      <a:lnRef idx="2">
-        <a:scrgbClr r="0" g="0" b="0"/>
-      </a:lnRef>
-      <a:fillRef idx="1">
-        <a:scrgbClr r="0" g="0" b="0"/>
-      </a:fillRef>
-      <a:effectRef idx="0">
-        <a:scrgbClr r="0" g="0" b="0"/>
-      </a:effectRef>
-      <a:fontRef idx="minor"/>
-    </dgm:style>
-  </dgm:styleLbl>
-  <dgm:styleLbl name="sibTrans2D1">
-    <dgm:scene3d>
-      <a:camera prst="orthographicFront"/>
-      <a:lightRig rig="threePt" dir="t"/>
-    </dgm:scene3d>
-    <dgm:sp3d/>
-    <dgm:txPr/>
-    <dgm:style>
-      <a:lnRef idx="0">
-        <a:scrgbClr r="0" g="0" b="0"/>
-      </a:lnRef>
-      <a:fillRef idx="1">
-        <a:scrgbClr r="0" g="0" b="0"/>
-      </a:fillRef>
-      <a:effectRef idx="0">
-        <a:scrgbClr r="0" g="0" b="0"/>
-      </a:effectRef>
-      <a:fontRef idx="minor">
-        <a:schemeClr val="lt1"/>
-      </a:fontRef>
-    </dgm:style>
-  </dgm:styleLbl>
-  <dgm:styleLbl name="fgSibTrans2D1">
-    <dgm:scene3d>
-      <a:camera prst="orthographicFront"/>
-      <a:lightRig rig="threePt" dir="t"/>
-    </dgm:scene3d>
-    <dgm:sp3d/>
-    <dgm:txPr/>
-    <dgm:style>
-      <a:lnRef idx="0">
-        <a:scrgbClr r="0" g="0" b="0"/>
-      </a:lnRef>
-      <a:fillRef idx="1">
-        <a:scrgbClr r="0" g="0" b="0"/>
-      </a:fillRef>
-      <a:effectRef idx="0">
-        <a:scrgbClr r="0" g="0" b="0"/>
-      </a:effectRef>
-      <a:fontRef idx="minor">
-        <a:schemeClr val="lt1"/>
-      </a:fontRef>
-    </dgm:style>
-  </dgm:styleLbl>
-  <dgm:styleLbl name="bgSibTrans2D1">
-    <dgm:scene3d>
-      <a:camera prst="orthographicFront"/>
-      <a:lightRig rig="threePt" dir="t"/>
-    </dgm:scene3d>
-    <dgm:sp3d/>
-    <dgm:txPr/>
-    <dgm:style>
-      <a:lnRef idx="0">
-        <a:scrgbClr r="0" g="0" b="0"/>
-      </a:lnRef>
-      <a:fillRef idx="1">
-        <a:scrgbClr r="0" g="0" b="0"/>
-      </a:fillRef>
-      <a:effectRef idx="0">
-        <a:scrgbClr r="0" g="0" b="0"/>
-      </a:effectRef>
-      <a:fontRef idx="minor">
-        <a:schemeClr val="lt1"/>
-      </a:fontRef>
-    </dgm:style>
-  </dgm:styleLbl>
-  <dgm:styleLbl name="sibTrans1D1">
-    <dgm:scene3d>
-      <a:camera prst="orthographicFront"/>
-      <a:lightRig rig="threePt" dir="t"/>
-    </dgm:scene3d>
-    <dgm:sp3d/>
-    <dgm:txPr/>
-    <dgm:style>
-      <a:lnRef idx="1">
-        <a:scrgbClr r="0" g="0" b="0"/>
-      </a:lnRef>
-      <a:fillRef idx="0">
-        <a:scrgbClr r="0" g="0" b="0"/>
-      </a:fillRef>
-      <a:effectRef idx="0">
-        <a:scrgbClr r="0" g="0" b="0"/>
-      </a:effectRef>
-      <a:fontRef idx="minor"/>
-    </dgm:style>
-  </dgm:styleLbl>
-  <dgm:styleLbl name="callout">
-    <dgm:scene3d>
-      <a:camera prst="orthographicFront"/>
-      <a:lightRig rig="threePt" dir="t"/>
-    </dgm:scene3d>
-    <dgm:sp3d/>
-    <dgm:txPr/>
-    <dgm:style>
-      <a:lnRef idx="2">
-        <a:scrgbClr r="0" g="0" b="0"/>
-      </a:lnRef>
-      <a:fillRef idx="1">
-        <a:scrgbClr r="0" g="0" b="0"/>
-      </a:fillRef>
-      <a:effectRef idx="0">
-        <a:scrgbClr r="0" g="0" b="0"/>
-      </a:effectRef>
-      <a:fontRef idx="minor"/>
-    </dgm:style>
-  </dgm:styleLbl>
-  <dgm:styleLbl name="asst0">
-    <dgm:scene3d>
-      <a:camera prst="orthographicFront"/>
-      <a:lightRig rig="threePt" dir="t"/>
-    </dgm:scene3d>
-    <dgm:sp3d/>
-    <dgm:txPr/>
-    <dgm:style>
-      <a:lnRef idx="2">
-        <a:scrgbClr r="0" g="0" b="0"/>
-      </a:lnRef>
-      <a:fillRef idx="1">
-        <a:scrgbClr r="0" g="0" b="0"/>
-      </a:fillRef>
-      <a:effectRef idx="0">
-        <a:scrgbClr r="0" g="0" b="0"/>
-      </a:effectRef>
-      <a:fontRef idx="minor">
-        <a:schemeClr val="lt1"/>
-      </a:fontRef>
-    </dgm:style>
-  </dgm:styleLbl>
-  <dgm:styleLbl name="asst1">
-    <dgm:scene3d>
-      <a:camera prst="orthographicFront"/>
-      <a:lightRig rig="threePt" dir="t"/>
-    </dgm:scene3d>
-    <dgm:sp3d/>
-    <dgm:txPr/>
-    <dgm:style>
-      <a:lnRef idx="2">
-        <a:scrgbClr r="0" g="0" b="0"/>
-      </a:lnRef>
-      <a:fillRef idx="1">
-        <a:scrgbClr r="0" g="0" b="0"/>
-      </a:fillRef>
-      <a:effectRef idx="0">
-        <a:scrgbClr r="0" g="0" b="0"/>
-      </a:effectRef>
-      <a:fontRef idx="minor">
-        <a:schemeClr val="lt1"/>
-      </a:fontRef>
-    </dgm:style>
-  </dgm:styleLbl>
-  <dgm:styleLbl name="asst2">
-    <dgm:scene3d>
-      <a:camera prst="orthographicFront"/>
-      <a:lightRig rig="threePt" dir="t"/>
-    </dgm:scene3d>
-    <dgm:sp3d/>
-    <dgm:txPr/>
-    <dgm:style>
-      <a:lnRef idx="2">
-        <a:scrgbClr r="0" g="0" b="0"/>
-      </a:lnRef>
-      <a:fillRef idx="1">
-        <a:scrgbClr r="0" g="0" b="0"/>
-      </a:fillRef>
-      <a:effectRef idx="0">
-        <a:scrgbClr r="0" g="0" b="0"/>
-      </a:effectRef>
-      <a:fontRef idx="minor">
-        <a:schemeClr val="lt1"/>
-      </a:fontRef>
-    </dgm:style>
-  </dgm:styleLbl>
-  <dgm:styleLbl name="asst3">
-    <dgm:scene3d>
-      <a:camera prst="orthographicFront"/>
-      <a:lightRig rig="threePt" dir="t"/>
-    </dgm:scene3d>
-    <dgm:sp3d/>
-    <dgm:txPr/>
-    <dgm:style>
-      <a:lnRef idx="2">
-        <a:scrgbClr r="0" g="0" b="0"/>
-      </a:lnRef>
-      <a:fillRef idx="1">
-        <a:scrgbClr r="0" g="0" b="0"/>
-      </a:fillRef>
-      <a:effectRef idx="0">
-        <a:scrgbClr r="0" g="0" b="0"/>
-      </a:effectRef>
-      <a:fontRef idx="minor">
-        <a:schemeClr val="lt1"/>
-      </a:fontRef>
-    </dgm:style>
-  </dgm:styleLbl>
-  <dgm:styleLbl name="asst4">
-    <dgm:scene3d>
-      <a:camera prst="orthographicFront"/>
-      <a:lightRig rig="threePt" dir="t"/>
-    </dgm:scene3d>
-    <dgm:sp3d/>
-    <dgm:txPr/>
-    <dgm:style>
-      <a:lnRef idx="2">
-        <a:scrgbClr r="0" g="0" b="0"/>
-      </a:lnRef>
-      <a:fillRef idx="1">
-        <a:scrgbClr r="0" g="0" b="0"/>
-      </a:fillRef>
-      <a:effectRef idx="0">
-        <a:scrgbClr r="0" g="0" b="0"/>
-      </a:effectRef>
-      <a:fontRef idx="minor">
-        <a:schemeClr val="lt1"/>
-      </a:fontRef>
-    </dgm:style>
-  </dgm:styleLbl>
-  <dgm:styleLbl name="parChTrans2D1">
-    <dgm:scene3d>
-      <a:camera prst="orthographicFront"/>
-      <a:lightRig rig="threePt" dir="t"/>
-    </dgm:scene3d>
-    <dgm:sp3d/>
-    <dgm:txPr/>
-    <dgm:style>
-      <a:lnRef idx="2">
-        <a:scrgbClr r="0" g="0" b="0"/>
-      </a:lnRef>
-      <a:fillRef idx="1">
-        <a:scrgbClr r="0" g="0" b="0"/>
-      </a:fillRef>
-      <a:effectRef idx="0">
-        <a:scrgbClr r="0" g="0" b="0"/>
-      </a:effectRef>
-      <a:fontRef idx="minor">
-        <a:schemeClr val="lt1"/>
-      </a:fontRef>
-    </dgm:style>
-  </dgm:styleLbl>
-  <dgm:styleLbl name="parChTrans2D2">
-    <dgm:scene3d>
-      <a:camera prst="orthographicFront"/>
-      <a:lightRig rig="threePt" dir="t"/>
-    </dgm:scene3d>
-    <dgm:sp3d/>
-    <dgm:txPr/>
-    <dgm:style>
-      <a:lnRef idx="2">
-        <a:scrgbClr r="0" g="0" b="0"/>
-      </a:lnRef>
-      <a:fillRef idx="1">
-        <a:scrgbClr r="0" g="0" b="0"/>
-      </a:fillRef>
-      <a:effectRef idx="0">
-        <a:scrgbClr r="0" g="0" b="0"/>
-      </a:effectRef>
-      <a:fontRef idx="minor">
-        <a:schemeClr val="lt1"/>
-      </a:fontRef>
-    </dgm:style>
-  </dgm:styleLbl>
-  <dgm:styleLbl name="parChTrans2D3">
-    <dgm:scene3d>
-      <a:camera prst="orthographicFront"/>
-      <a:lightRig rig="threePt" dir="t"/>
-    </dgm:scene3d>
-    <dgm:sp3d/>
-    <dgm:txPr/>
-    <dgm:style>
-      <a:lnRef idx="2">
-        <a:scrgbClr r="0" g="0" b="0"/>
-      </a:lnRef>
-      <a:fillRef idx="1">
-        <a:scrgbClr r="0" g="0" b="0"/>
-      </a:fillRef>
-      <a:effectRef idx="0">
-        <a:scrgbClr r="0" g="0" b="0"/>
-      </a:effectRef>
-      <a:fontRef idx="minor">
-        <a:schemeClr val="lt1"/>
-      </a:fontRef>
-    </dgm:style>
-  </dgm:styleLbl>
-  <dgm:styleLbl name="parChTrans2D4">
-    <dgm:scene3d>
-      <a:camera prst="orthographicFront"/>
-      <a:lightRig rig="threePt" dir="t"/>
-    </dgm:scene3d>
-    <dgm:sp3d/>
-    <dgm:txPr/>
-    <dgm:style>
-      <a:lnRef idx="2">
-        <a:scrgbClr r="0" g="0" b="0"/>
-      </a:lnRef>
-      <a:fillRef idx="1">
-        <a:scrgbClr r="0" g="0" b="0"/>
-      </a:fillRef>
-      <a:effectRef idx="0">
-        <a:scrgbClr r="0" g="0" b="0"/>
-      </a:effectRef>
-      <a:fontRef idx="minor">
-        <a:schemeClr val="lt1"/>
-      </a:fontRef>
-    </dgm:style>
-  </dgm:styleLbl>
-  <dgm:styleLbl name="parChTrans1D1">
-    <dgm:scene3d>
-      <a:camera prst="orthographicFront"/>
-      <a:lightRig rig="threePt" dir="t"/>
-    </dgm:scene3d>
-    <dgm:sp3d/>
-    <dgm:txPr/>
-    <dgm:style>
-      <a:lnRef idx="2">
-        <a:scrgbClr r="0" g="0" b="0"/>
-      </a:lnRef>
-      <a:fillRef idx="0">
-        <a:scrgbClr r="0" g="0" b="0"/>
-      </a:fillRef>
-      <a:effectRef idx="0">
-        <a:scrgbClr r="0" g="0" b="0"/>
-      </a:effectRef>
-      <a:fontRef idx="minor"/>
-    </dgm:style>
-  </dgm:styleLbl>
-  <dgm:styleLbl name="parChTrans1D2">
-    <dgm:scene3d>
-      <a:camera prst="orthographicFront"/>
-      <a:lightRig rig="threePt" dir="t"/>
-    </dgm:scene3d>
-    <dgm:sp3d/>
-    <dgm:txPr/>
-    <dgm:style>
-      <a:lnRef idx="2">
-        <a:scrgbClr r="0" g="0" b="0"/>
-      </a:lnRef>
-      <a:fillRef idx="0">
-        <a:scrgbClr r="0" g="0" b="0"/>
-      </a:fillRef>
-      <a:effectRef idx="0">
-        <a:scrgbClr r="0" g="0" b="0"/>
-      </a:effectRef>
-      <a:fontRef idx="minor"/>
-    </dgm:style>
-  </dgm:styleLbl>
-  <dgm:styleLbl name="parChTrans1D3">
-    <dgm:scene3d>
-      <a:camera prst="orthographicFront"/>
-      <a:lightRig rig="threePt" dir="t"/>
-    </dgm:scene3d>
-    <dgm:sp3d/>
-    <dgm:txPr/>
-    <dgm:style>
-      <a:lnRef idx="2">
-        <a:scrgbClr r="0" g="0" b="0"/>
-      </a:lnRef>
-      <a:fillRef idx="0">
-        <a:scrgbClr r="0" g="0" b="0"/>
-      </a:fillRef>
-      <a:effectRef idx="0">
-        <a:scrgbClr r="0" g="0" b="0"/>
-      </a:effectRef>
-      <a:fontRef idx="minor"/>
-    </dgm:style>
-  </dgm:styleLbl>
-  <dgm:styleLbl name="parChTrans1D4">
-    <dgm:scene3d>
-      <a:camera prst="orthographicFront"/>
-      <a:lightRig rig="threePt" dir="t"/>
-    </dgm:scene3d>
-    <dgm:sp3d/>
-    <dgm:txPr/>
-    <dgm:style>
-      <a:lnRef idx="2">
-        <a:scrgbClr r="0" g="0" b="0"/>
-      </a:lnRef>
-      <a:fillRef idx="0">
-        <a:scrgbClr r="0" g="0" b="0"/>
-      </a:fillRef>
-      <a:effectRef idx="0">
-        <a:scrgbClr r="0" g="0" b="0"/>
-      </a:effectRef>
-      <a:fontRef idx="minor"/>
-    </dgm:style>
-  </dgm:styleLbl>
-  <dgm:styleLbl name="fgAcc1">
-    <dgm:scene3d>
-      <a:camera prst="orthographicFront"/>
-      <a:lightRig rig="threePt" dir="t"/>
-    </dgm:scene3d>
-    <dgm:sp3d/>
-    <dgm:txPr/>
-    <dgm:style>
-      <a:lnRef idx="2">
-        <a:scrgbClr r="0" g="0" b="0"/>
-      </a:lnRef>
-      <a:fillRef idx="1">
-        <a:scrgbClr r="0" g="0" b="0"/>
-      </a:fillRef>
-      <a:effectRef idx="0">
-        <a:scrgbClr r="0" g="0" b="0"/>
-      </a:effectRef>
-      <a:fontRef idx="minor"/>
-    </dgm:style>
-  </dgm:styleLbl>
-  <dgm:styleLbl name="conFgAcc1">
-    <dgm:scene3d>
-      <a:camera prst="orthographicFront"/>
-      <a:lightRig rig="threePt" dir="t"/>
-    </dgm:scene3d>
-    <dgm:sp3d/>
-    <dgm:txPr/>
-    <dgm:style>
-      <a:lnRef idx="2">
-        <a:scrgbClr r="0" g="0" b="0"/>
-      </a:lnRef>
-      <a:fillRef idx="1">
-        <a:scrgbClr r="0" g="0" b="0"/>
-      </a:fillRef>
-      <a:effectRef idx="0">
-        <a:scrgbClr r="0" g="0" b="0"/>
-      </a:effectRef>
-      <a:fontRef idx="minor"/>
-    </dgm:style>
-  </dgm:styleLbl>
-  <dgm:styleLbl name="alignAcc1">
-    <dgm:scene3d>
-      <a:camera prst="orthographicFront"/>
-      <a:lightRig rig="threePt" dir="t"/>
-    </dgm:scene3d>
-    <dgm:sp3d/>
-    <dgm:txPr/>
-    <dgm:style>
-      <a:lnRef idx="2">
-        <a:scrgbClr r="0" g="0" b="0"/>
-      </a:lnRef>
-      <a:fillRef idx="1">
-        <a:scrgbClr r="0" g="0" b="0"/>
-      </a:fillRef>
-      <a:effectRef idx="0">
-        <a:scrgbClr r="0" g="0" b="0"/>
-      </a:effectRef>
-      <a:fontRef idx="minor"/>
-    </dgm:style>
-  </dgm:styleLbl>
-  <dgm:styleLbl name="trAlignAcc1">
-    <dgm:scene3d>
-      <a:camera prst="orthographicFront"/>
-      <a:lightRig rig="threePt" dir="t"/>
-    </dgm:scene3d>
-    <dgm:sp3d/>
-    <dgm:txPr/>
-    <dgm:style>
-      <a:lnRef idx="1">
-        <a:scrgbClr r="0" g="0" b="0"/>
-      </a:lnRef>
-      <a:fillRef idx="1">
-        <a:scrgbClr r="0" g="0" b="0"/>
-      </a:fillRef>
-      <a:effectRef idx="0">
-        <a:scrgbClr r="0" g="0" b="0"/>
-      </a:effectRef>
-      <a:fontRef idx="minor"/>
-    </dgm:style>
-  </dgm:styleLbl>
-  <dgm:styleLbl name="bgAcc1">
-    <dgm:scene3d>
-      <a:camera prst="orthographicFront"/>
-      <a:lightRig rig="threePt" dir="t"/>
-    </dgm:scene3d>
-    <dgm:sp3d/>
-    <dgm:txPr/>
-    <dgm:style>
-      <a:lnRef idx="2">
-        <a:scrgbClr r="0" g="0" b="0"/>
-      </a:lnRef>
-      <a:fillRef idx="1">
-        <a:scrgbClr r="0" g="0" b="0"/>
-      </a:fillRef>
-      <a:effectRef idx="0">
-        <a:scrgbClr r="0" g="0" b="0"/>
-      </a:effectRef>
-      <a:fontRef idx="minor"/>
-    </dgm:style>
-  </dgm:styleLbl>
-  <dgm:styleLbl name="solidFgAcc1">
-    <dgm:scene3d>
-      <a:camera prst="orthographicFront"/>
-      <a:lightRig rig="threePt" dir="t"/>
-    </dgm:scene3d>
-    <dgm:sp3d/>
-    <dgm:txPr/>
-    <dgm:style>
-      <a:lnRef idx="2">
-        <a:scrgbClr r="0" g="0" b="0"/>
-      </a:lnRef>
-      <a:fillRef idx="1">
-        <a:scrgbClr r="0" g="0" b="0"/>
-      </a:fillRef>
-      <a:effectRef idx="0">
-        <a:scrgbClr r="0" g="0" b="0"/>
-      </a:effectRef>
-      <a:fontRef idx="minor"/>
-    </dgm:style>
-  </dgm:styleLbl>
-  <dgm:styleLbl name="solidAlignAcc1">
-    <dgm:scene3d>
-      <a:camera prst="orthographicFront"/>
-      <a:lightRig rig="threePt" dir="t"/>
-    </dgm:scene3d>
-    <dgm:sp3d/>
-    <dgm:txPr/>
-    <dgm:style>
-      <a:lnRef idx="2">
-        <a:scrgbClr r="0" g="0" b="0"/>
-      </a:lnRef>
-      <a:fillRef idx="1">
-        <a:scrgbClr r="0" g="0" b="0"/>
-      </a:fillRef>
-      <a:effectRef idx="0">
-        <a:scrgbClr r="0" g="0" b="0"/>
-      </a:effectRef>
-      <a:fontRef idx="minor"/>
-    </dgm:style>
-  </dgm:styleLbl>
-  <dgm:styleLbl name="solidBgAcc1">
-    <dgm:scene3d>
-      <a:camera prst="orthographicFront"/>
-      <a:lightRig rig="threePt" dir="t"/>
-    </dgm:scene3d>
-    <dgm:sp3d/>
-    <dgm:txPr/>
-    <dgm:style>
-      <a:lnRef idx="2">
-        <a:scrgbClr r="0" g="0" b="0"/>
-      </a:lnRef>
-      <a:fillRef idx="1">
-        <a:scrgbClr r="0" g="0" b="0"/>
-      </a:fillRef>
-      <a:effectRef idx="0">
-        <a:scrgbClr r="0" g="0" b="0"/>
-      </a:effectRef>
-      <a:fontRef idx="minor"/>
-    </dgm:style>
-  </dgm:styleLbl>
-  <dgm:styleLbl name="fgAccFollowNode1">
-    <dgm:scene3d>
-      <a:camera prst="orthographicFront"/>
-      <a:lightRig rig="threePt" dir="t"/>
-    </dgm:scene3d>
-    <dgm:sp3d/>
-    <dgm:txPr/>
-    <dgm:style>
-      <a:lnRef idx="2">
-        <a:scrgbClr r="0" g="0" b="0"/>
-      </a:lnRef>
-      <a:fillRef idx="1">
-        <a:scrgbClr r="0" g="0" b="0"/>
-      </a:fillRef>
-      <a:effectRef idx="0">
-        <a:scrgbClr r="0" g="0" b="0"/>
-      </a:effectRef>
-      <a:fontRef idx="minor"/>
-    </dgm:style>
-  </dgm:styleLbl>
-  <dgm:styleLbl name="alignAccFollowNode1">
-    <dgm:scene3d>
-      <a:camera prst="orthographicFront"/>
-      <a:lightRig rig="threePt" dir="t"/>
-    </dgm:scene3d>
-    <dgm:sp3d/>
-    <dgm:txPr/>
-    <dgm:style>
-      <a:lnRef idx="2">
-        <a:scrgbClr r="0" g="0" b="0"/>
-      </a:lnRef>
-      <a:fillRef idx="1">
-        <a:scrgbClr r="0" g="0" b="0"/>
-      </a:fillRef>
-      <a:effectRef idx="0">
-        <a:scrgbClr r="0" g="0" b="0"/>
-      </a:effectRef>
-      <a:fontRef idx="minor"/>
-    </dgm:style>
-  </dgm:styleLbl>
-  <dgm:styleLbl name="bgAccFollowNode1">
-    <dgm:scene3d>
-      <a:camera prst="orthographicFront"/>
-      <a:lightRig rig="threePt" dir="t"/>
-    </dgm:scene3d>
-    <dgm:sp3d/>
-    <dgm:txPr/>
-    <dgm:style>
-      <a:lnRef idx="2">
-        <a:scrgbClr r="0" g="0" b="0"/>
-      </a:lnRef>
-      <a:fillRef idx="1">
-        <a:scrgbClr r="0" g="0" b="0"/>
-      </a:fillRef>
-      <a:effectRef idx="0">
-        <a:scrgbClr r="0" g="0" b="0"/>
-      </a:effectRef>
-      <a:fontRef idx="minor"/>
-    </dgm:style>
-  </dgm:styleLbl>
-  <dgm:styleLbl name="fgAcc0">
-    <dgm:scene3d>
-      <a:camera prst="orthographicFront"/>
-      <a:lightRig rig="threePt" dir="t"/>
-    </dgm:scene3d>
-    <dgm:sp3d/>
-    <dgm:txPr/>
-    <dgm:style>
-      <a:lnRef idx="2">
-        <a:scrgbClr r="0" g="0" b="0"/>
-      </a:lnRef>
-      <a:fillRef idx="1">
-        <a:scrgbClr r="0" g="0" b="0"/>
-      </a:fillRef>
-      <a:effectRef idx="0">
-        <a:scrgbClr r="0" g="0" b="0"/>
-      </a:effectRef>
-      <a:fontRef idx="minor"/>
-    </dgm:style>
-  </dgm:styleLbl>
-  <dgm:styleLbl name="fgAcc2">
-    <dgm:scene3d>
-      <a:camera prst="orthographicFront"/>
-      <a:lightRig rig="threePt" dir="t"/>
-    </dgm:scene3d>
-    <dgm:sp3d/>
-    <dgm:txPr/>
-    <dgm:style>
-      <a:lnRef idx="2">
-        <a:scrgbClr r="0" g="0" b="0"/>
-      </a:lnRef>
-      <a:fillRef idx="1">
-        <a:scrgbClr r="0" g="0" b="0"/>
-      </a:fillRef>
-      <a:effectRef idx="0">
-        <a:scrgbClr r="0" g="0" b="0"/>
-      </a:effectRef>
-      <a:fontRef idx="minor"/>
-    </dgm:style>
-  </dgm:styleLbl>
-  <dgm:styleLbl name="fgAcc3">
-    <dgm:scene3d>
-      <a:camera prst="orthographicFront"/>
-      <a:lightRig rig="threePt" dir="t"/>
-    </dgm:scene3d>
-    <dgm:sp3d/>
-    <dgm:txPr/>
-    <dgm:style>
-      <a:lnRef idx="2">
-        <a:scrgbClr r="0" g="0" b="0"/>
-      </a:lnRef>
-      <a:fillRef idx="1">
-        <a:scrgbClr r="0" g="0" b="0"/>
-      </a:fillRef>
-      <a:effectRef idx="0">
-        <a:scrgbClr r="0" g="0" b="0"/>
-      </a:effectRef>
-      <a:fontRef idx="minor"/>
-    </dgm:style>
-  </dgm:styleLbl>
-  <dgm:styleLbl name="fgAcc4">
-    <dgm:scene3d>
-      <a:camera prst="orthographicFront"/>
-      <a:lightRig rig="threePt" dir="t"/>
-    </dgm:scene3d>
-    <dgm:sp3d/>
-    <dgm:txPr/>
-    <dgm:style>
-      <a:lnRef idx="2">
-        <a:scrgbClr r="0" g="0" b="0"/>
-      </a:lnRef>
-      <a:fillRef idx="1">
-        <a:scrgbClr r="0" g="0" b="0"/>
-      </a:fillRef>
-      <a:effectRef idx="0">
-        <a:scrgbClr r="0" g="0" b="0"/>
-      </a:effectRef>
-      <a:fontRef idx="minor"/>
-    </dgm:style>
-  </dgm:styleLbl>
-  <dgm:styleLbl name="bgShp">
-    <dgm:scene3d>
-      <a:camera prst="orthographicFront"/>
-      <a:lightRig rig="threePt" dir="t"/>
-    </dgm:scene3d>
-    <dgm:sp3d/>
-    <dgm:txPr/>
-    <dgm:style>
-      <a:lnRef idx="0">
-        <a:scrgbClr r="0" g="0" b="0"/>
-      </a:lnRef>
-      <a:fillRef idx="1">
-        <a:scrgbClr r="0" g="0" b="0"/>
-      </a:fillRef>
-      <a:effectRef idx="0">
-        <a:scrgbClr r="0" g="0" b="0"/>
-      </a:effectRef>
-      <a:fontRef idx="minor"/>
-    </dgm:style>
-  </dgm:styleLbl>
-  <dgm:styleLbl name="dkBgShp">
-    <dgm:scene3d>
-      <a:camera prst="orthographicFront"/>
-      <a:lightRig rig="threePt" dir="t"/>
-    </dgm:scene3d>
-    <dgm:sp3d/>
-    <dgm:txPr/>
-    <dgm:style>
-      <a:lnRef idx="0">
-        <a:scrgbClr r="0" g="0" b="0"/>
-      </a:lnRef>
-      <a:fillRef idx="1">
-        <a:scrgbClr r="0" g="0" b="0"/>
-      </a:fillRef>
-      <a:effectRef idx="0">
-        <a:scrgbClr r="0" g="0" b="0"/>
-      </a:effectRef>
-      <a:fontRef idx="minor"/>
-    </dgm:style>
-  </dgm:styleLbl>
-  <dgm:styleLbl name="trBgShp">
-    <dgm:scene3d>
-      <a:camera prst="orthographicFront"/>
-      <a:lightRig rig="threePt" dir="t"/>
-    </dgm:scene3d>
-    <dgm:sp3d/>
-    <dgm:txPr/>
-    <dgm:style>
-      <a:lnRef idx="0">
-        <a:scrgbClr r="0" g="0" b="0"/>
-      </a:lnRef>
-      <a:fillRef idx="1">
-        <a:scrgbClr r="0" g="0" b="0"/>
-      </a:fillRef>
-      <a:effectRef idx="0">
-        <a:scrgbClr r="0" g="0" b="0"/>
-      </a:effectRef>
-      <a:fontRef idx="minor"/>
-    </dgm:style>
-  </dgm:styleLbl>
-  <dgm:styleLbl name="fgShp">
-    <dgm:scene3d>
-      <a:camera prst="orthographicFront"/>
-      <a:lightRig rig="threePt" dir="t"/>
-    </dgm:scene3d>
-    <dgm:sp3d/>
-    <dgm:txPr/>
-    <dgm:style>
-      <a:lnRef idx="2">
-        <a:scrgbClr r="0" g="0" b="0"/>
-      </a:lnRef>
-      <a:fillRef idx="1">
-        <a:scrgbClr r="0" g="0" b="0"/>
-      </a:fillRef>
-      <a:effectRef idx="0">
-        <a:scrgbClr r="0" g="0" b="0"/>
-      </a:effectRef>
-      <a:fontRef idx="minor"/>
-    </dgm:style>
-  </dgm:styleLbl>
-  <dgm:styleLbl name="revTx">
-    <dgm:scene3d>
-      <a:camera prst="orthographicFront"/>
-      <a:lightRig rig="threePt" dir="t"/>
-    </dgm:scene3d>
-    <dgm:sp3d/>
-    <dgm:txPr/>
-    <dgm:style>
-      <a:lnRef idx="0">
-        <a:scrgbClr r="0" g="0" b="0"/>
-      </a:lnRef>
-      <a:fillRef idx="0">
-        <a:scrgbClr r="0" g="0" b="0"/>
-      </a:fillRef>
-      <a:effectRef idx="0">
-        <a:scrgbClr r="0" g="0" b="0"/>
-      </a:effectRef>
-      <a:fontRef idx="minor"/>
-    </dgm:style>
-  </dgm:styleLbl>
-</dgm:styleDef>
 </file>
 
 <file path=ppt/notesMasters/notesMaster1.xml><?xml version="1.0" encoding="utf-8"?>
@@ -2938,7 +211,7 @@
           <a:p>
             <a:fld id="{4557A8CE-5662-4A0C-8A21-0B2E43177BEE}" type="datetimeFigureOut">
               <a:rPr lang="en-US" smtClean="0"/>
-              <a:t>2/1/2023</a:t>
+              <a:t>1/29/2025</a:t>
             </a:fld>
             <a:endParaRPr lang="en-US"/>
           </a:p>
@@ -3292,6 +565,117 @@
 </p:notes>
 </file>
 
+<file path=ppt/notesSlides/notesSlide2.xml><?xml version="1.0" encoding="utf-8"?>
+<p:notes xmlns:a="http://schemas.openxmlformats.org/drawingml/2006/main" xmlns:r="http://schemas.openxmlformats.org/officeDocument/2006/relationships" xmlns:p="http://schemas.openxmlformats.org/presentationml/2006/main">
+  <p:cSld>
+    <p:spTree>
+      <p:nvGrpSpPr>
+        <p:cNvPr id="1" name="">
+          <a:extLst>
+            <a:ext uri="{FF2B5EF4-FFF2-40B4-BE49-F238E27FC236}">
+              <a16:creationId xmlns:a16="http://schemas.microsoft.com/office/drawing/2014/main" id="{0441ED7F-E4E5-995E-8F66-91B089600B0C}"/>
+            </a:ext>
+          </a:extLst>
+        </p:cNvPr>
+        <p:cNvGrpSpPr/>
+        <p:nvPr/>
+      </p:nvGrpSpPr>
+      <p:grpSpPr>
+        <a:xfrm>
+          <a:off x="0" y="0"/>
+          <a:ext cx="0" cy="0"/>
+          <a:chOff x="0" y="0"/>
+          <a:chExt cx="0" cy="0"/>
+        </a:xfrm>
+      </p:grpSpPr>
+      <p:sp>
+        <p:nvSpPr>
+          <p:cNvPr id="2" name="Slide Image Placeholder 1">
+            <a:extLst>
+              <a:ext uri="{FF2B5EF4-FFF2-40B4-BE49-F238E27FC236}">
+                <a16:creationId xmlns:a16="http://schemas.microsoft.com/office/drawing/2014/main" id="{99F6654A-B240-EE0B-C059-9F381BF973D9}"/>
+              </a:ext>
+            </a:extLst>
+          </p:cNvPr>
+          <p:cNvSpPr>
+            <a:spLocks noGrp="1" noRot="1" noChangeAspect="1"/>
+          </p:cNvSpPr>
+          <p:nvPr>
+            <p:ph type="sldImg"/>
+          </p:nvPr>
+        </p:nvSpPr>
+        <p:spPr/>
+      </p:sp>
+      <p:sp>
+        <p:nvSpPr>
+          <p:cNvPr id="3" name="Notes Placeholder 2">
+            <a:extLst>
+              <a:ext uri="{FF2B5EF4-FFF2-40B4-BE49-F238E27FC236}">
+                <a16:creationId xmlns:a16="http://schemas.microsoft.com/office/drawing/2014/main" id="{478EA6FB-26A1-2EDA-B6C7-58747EC93295}"/>
+              </a:ext>
+            </a:extLst>
+          </p:cNvPr>
+          <p:cNvSpPr>
+            <a:spLocks noGrp="1"/>
+          </p:cNvSpPr>
+          <p:nvPr>
+            <p:ph type="body" idx="1"/>
+          </p:nvPr>
+        </p:nvSpPr>
+        <p:spPr/>
+        <p:txBody>
+          <a:bodyPr/>
+          <a:lstStyle/>
+          <a:p>
+            <a:r>
+              <a:rPr lang="en-US" dirty="0"/>
+              <a:t>Measurement, currency, finance, building codes, food, IT, </a:t>
+            </a:r>
+          </a:p>
+        </p:txBody>
+      </p:sp>
+      <p:sp>
+        <p:nvSpPr>
+          <p:cNvPr id="4" name="Slide Number Placeholder 3">
+            <a:extLst>
+              <a:ext uri="{FF2B5EF4-FFF2-40B4-BE49-F238E27FC236}">
+                <a16:creationId xmlns:a16="http://schemas.microsoft.com/office/drawing/2014/main" id="{EFC6D14F-C689-B43B-115B-D04F378C582E}"/>
+              </a:ext>
+            </a:extLst>
+          </p:cNvPr>
+          <p:cNvSpPr>
+            <a:spLocks noGrp="1"/>
+          </p:cNvSpPr>
+          <p:nvPr>
+            <p:ph type="sldNum" sz="quarter" idx="5"/>
+          </p:nvPr>
+        </p:nvSpPr>
+        <p:spPr/>
+        <p:txBody>
+          <a:bodyPr/>
+          <a:lstStyle/>
+          <a:p>
+            <a:fld id="{071FB505-3391-4AAE-9BB4-43B1516DD3F1}" type="slidenum">
+              <a:rPr lang="en-US" smtClean="0"/>
+              <a:t>3</a:t>
+            </a:fld>
+            <a:endParaRPr lang="en-US"/>
+          </a:p>
+        </p:txBody>
+      </p:sp>
+    </p:spTree>
+    <p:extLst>
+      <p:ext uri="{BB962C8B-B14F-4D97-AF65-F5344CB8AC3E}">
+        <p14:creationId xmlns:p14="http://schemas.microsoft.com/office/powerpoint/2010/main" val="1220827010"/>
+      </p:ext>
+    </p:extLst>
+  </p:cSld>
+  <p:clrMapOvr>
+    <a:masterClrMapping/>
+  </p:clrMapOvr>
+</p:notes>
+</file>
+
 <file path=ppt/slideLayouts/slideLayout1.xml><?xml version="1.0" encoding="utf-8"?>
 <p:sldLayout xmlns:a="http://schemas.openxmlformats.org/drawingml/2006/main" xmlns:r="http://schemas.openxmlformats.org/officeDocument/2006/relationships" xmlns:p="http://schemas.openxmlformats.org/presentationml/2006/main" type="title" preserve="1">
   <p:cSld name="Title Slide">
@@ -3439,7 +823,7 @@
           <a:p>
             <a:fld id="{7514402E-D2E7-41CA-B465-AA254B0160F1}" type="datetimeFigureOut">
               <a:rPr lang="en-US" smtClean="0"/>
-              <a:t>2/1/2023</a:t>
+              <a:t>1/29/2025</a:t>
             </a:fld>
             <a:endParaRPr lang="en-US"/>
           </a:p>
@@ -3637,7 +1021,7 @@
           <a:p>
             <a:fld id="{7514402E-D2E7-41CA-B465-AA254B0160F1}" type="datetimeFigureOut">
               <a:rPr lang="en-US" smtClean="0"/>
-              <a:t>2/1/2023</a:t>
+              <a:t>1/29/2025</a:t>
             </a:fld>
             <a:endParaRPr lang="en-US"/>
           </a:p>
@@ -3845,7 +1229,7 @@
           <a:p>
             <a:fld id="{7514402E-D2E7-41CA-B465-AA254B0160F1}" type="datetimeFigureOut">
               <a:rPr lang="en-US" smtClean="0"/>
-              <a:t>2/1/2023</a:t>
+              <a:t>1/29/2025</a:t>
             </a:fld>
             <a:endParaRPr lang="en-US"/>
           </a:p>
@@ -4043,7 +1427,7 @@
           <a:p>
             <a:fld id="{7514402E-D2E7-41CA-B465-AA254B0160F1}" type="datetimeFigureOut">
               <a:rPr lang="en-US" smtClean="0"/>
-              <a:t>2/1/2023</a:t>
+              <a:t>1/29/2025</a:t>
             </a:fld>
             <a:endParaRPr lang="en-US"/>
           </a:p>
@@ -4318,7 +1702,7 @@
           <a:p>
             <a:fld id="{7514402E-D2E7-41CA-B465-AA254B0160F1}" type="datetimeFigureOut">
               <a:rPr lang="en-US" smtClean="0"/>
-              <a:t>2/1/2023</a:t>
+              <a:t>1/29/2025</a:t>
             </a:fld>
             <a:endParaRPr lang="en-US"/>
           </a:p>
@@ -4583,7 +1967,7 @@
           <a:p>
             <a:fld id="{7514402E-D2E7-41CA-B465-AA254B0160F1}" type="datetimeFigureOut">
               <a:rPr lang="en-US" smtClean="0"/>
-              <a:t>2/1/2023</a:t>
+              <a:t>1/29/2025</a:t>
             </a:fld>
             <a:endParaRPr lang="en-US"/>
           </a:p>
@@ -4995,7 +2379,7 @@
           <a:p>
             <a:fld id="{7514402E-D2E7-41CA-B465-AA254B0160F1}" type="datetimeFigureOut">
               <a:rPr lang="en-US" smtClean="0"/>
-              <a:t>2/1/2023</a:t>
+              <a:t>1/29/2025</a:t>
             </a:fld>
             <a:endParaRPr lang="en-US"/>
           </a:p>
@@ -5136,7 +2520,7 @@
           <a:p>
             <a:fld id="{7514402E-D2E7-41CA-B465-AA254B0160F1}" type="datetimeFigureOut">
               <a:rPr lang="en-US" smtClean="0"/>
-              <a:t>2/1/2023</a:t>
+              <a:t>1/29/2025</a:t>
             </a:fld>
             <a:endParaRPr lang="en-US"/>
           </a:p>
@@ -5249,7 +2633,7 @@
           <a:p>
             <a:fld id="{7514402E-D2E7-41CA-B465-AA254B0160F1}" type="datetimeFigureOut">
               <a:rPr lang="en-US" smtClean="0"/>
-              <a:t>2/1/2023</a:t>
+              <a:t>1/29/2025</a:t>
             </a:fld>
             <a:endParaRPr lang="en-US"/>
           </a:p>
@@ -5560,7 +2944,7 @@
           <a:p>
             <a:fld id="{7514402E-D2E7-41CA-B465-AA254B0160F1}" type="datetimeFigureOut">
               <a:rPr lang="en-US" smtClean="0"/>
-              <a:t>2/1/2023</a:t>
+              <a:t>1/29/2025</a:t>
             </a:fld>
             <a:endParaRPr lang="en-US"/>
           </a:p>
@@ -5848,7 +3232,7 @@
           <a:p>
             <a:fld id="{7514402E-D2E7-41CA-B465-AA254B0160F1}" type="datetimeFigureOut">
               <a:rPr lang="en-US" smtClean="0"/>
-              <a:t>2/1/2023</a:t>
+              <a:t>1/29/2025</a:t>
             </a:fld>
             <a:endParaRPr lang="en-US"/>
           </a:p>
@@ -6089,7 +3473,7 @@
           <a:p>
             <a:fld id="{7514402E-D2E7-41CA-B465-AA254B0160F1}" type="datetimeFigureOut">
               <a:rPr lang="en-US" smtClean="0"/>
-              <a:t>2/1/2023</a:t>
+              <a:t>1/29/2025</a:t>
             </a:fld>
             <a:endParaRPr lang="en-US"/>
           </a:p>
@@ -6588,305 +3972,6 @@
 </p:sld>
 </file>
 
-<file path=ppt/slides/slide10.xml><?xml version="1.0" encoding="utf-8"?>
-<p:sld xmlns:a="http://schemas.openxmlformats.org/drawingml/2006/main" xmlns:r="http://schemas.openxmlformats.org/officeDocument/2006/relationships" xmlns:p="http://schemas.openxmlformats.org/presentationml/2006/main">
-  <p:cSld>
-    <p:spTree>
-      <p:nvGrpSpPr>
-        <p:cNvPr id="1" name=""/>
-        <p:cNvGrpSpPr/>
-        <p:nvPr/>
-      </p:nvGrpSpPr>
-      <p:grpSpPr>
-        <a:xfrm>
-          <a:off x="0" y="0"/>
-          <a:ext cx="0" cy="0"/>
-          <a:chOff x="0" y="0"/>
-          <a:chExt cx="0" cy="0"/>
-        </a:xfrm>
-      </p:grpSpPr>
-      <p:sp>
-        <p:nvSpPr>
-          <p:cNvPr id="2" name="Title 1">
-            <a:extLst>
-              <a:ext uri="{FF2B5EF4-FFF2-40B4-BE49-F238E27FC236}">
-                <a16:creationId xmlns:a16="http://schemas.microsoft.com/office/drawing/2014/main" id="{80456D0F-FE14-AEAF-8BED-B9872BCA37B2}"/>
-              </a:ext>
-            </a:extLst>
-          </p:cNvPr>
-          <p:cNvSpPr>
-            <a:spLocks noGrp="1"/>
-          </p:cNvSpPr>
-          <p:nvPr>
-            <p:ph type="title"/>
-          </p:nvPr>
-        </p:nvSpPr>
-        <p:spPr/>
-        <p:txBody>
-          <a:bodyPr/>
-          <a:lstStyle/>
-          <a:p>
-            <a:r>
-              <a:rPr lang="en-US" dirty="0"/>
-              <a:t>Evaluating and Communicating Standards Evaluations</a:t>
-            </a:r>
-          </a:p>
-        </p:txBody>
-      </p:sp>
-      <p:sp>
-        <p:nvSpPr>
-          <p:cNvPr id="3" name="Content Placeholder 2">
-            <a:extLst>
-              <a:ext uri="{FF2B5EF4-FFF2-40B4-BE49-F238E27FC236}">
-                <a16:creationId xmlns:a16="http://schemas.microsoft.com/office/drawing/2014/main" id="{5A66A298-9909-C539-3EAF-8FD9D84BCAF2}"/>
-              </a:ext>
-            </a:extLst>
-          </p:cNvPr>
-          <p:cNvSpPr>
-            <a:spLocks noGrp="1"/>
-          </p:cNvSpPr>
-          <p:nvPr>
-            <p:ph idx="1"/>
-          </p:nvPr>
-        </p:nvSpPr>
-        <p:spPr>
-          <a:xfrm>
-            <a:off x="838200" y="1825624"/>
-            <a:ext cx="5666509" cy="4838411"/>
-          </a:xfrm>
-        </p:spPr>
-        <p:txBody>
-          <a:bodyPr>
-            <a:normAutofit lnSpcReduction="10000"/>
-          </a:bodyPr>
-          <a:lstStyle/>
-          <a:p>
-            <a:r>
-              <a:rPr lang="en-US" dirty="0"/>
-              <a:t>Context (goals of evaluation)</a:t>
-            </a:r>
-          </a:p>
-          <a:p>
-            <a:pPr lvl="1"/>
-            <a:r>
-              <a:rPr lang="en-US" dirty="0"/>
-              <a:t>Selective vs. Comprehensive</a:t>
-            </a:r>
-          </a:p>
-          <a:p>
-            <a:pPr lvl="1"/>
-            <a:r>
-              <a:rPr lang="en-US" dirty="0"/>
-              <a:t>Formative vs. Summative</a:t>
-            </a:r>
-          </a:p>
-          <a:p>
-            <a:pPr lvl="1"/>
-            <a:r>
-              <a:rPr lang="en-US" dirty="0"/>
-              <a:t>Design guidance vs. licensing vs. certification</a:t>
-            </a:r>
-          </a:p>
-          <a:p>
-            <a:pPr lvl="1"/>
-            <a:r>
-              <a:rPr lang="en-US" dirty="0"/>
-              <a:t>Descriptive vs. </a:t>
-            </a:r>
-            <a:r>
-              <a:rPr lang="en-US" dirty="0" err="1"/>
-              <a:t>Pendantic</a:t>
-            </a:r>
-            <a:endParaRPr lang="en-US" dirty="0"/>
-          </a:p>
-          <a:p>
-            <a:pPr lvl="1"/>
-            <a:r>
-              <a:rPr lang="en-US" dirty="0"/>
-              <a:t>Risk and liability</a:t>
-            </a:r>
-          </a:p>
-          <a:p>
-            <a:pPr lvl="1"/>
-            <a:r>
-              <a:rPr lang="en-US" dirty="0"/>
-              <a:t>Technical Writing</a:t>
-            </a:r>
-          </a:p>
-          <a:p>
-            <a:pPr lvl="2"/>
-            <a:r>
-              <a:rPr lang="en-US" dirty="0"/>
-              <a:t>Know your audience</a:t>
-            </a:r>
-          </a:p>
-          <a:p>
-            <a:pPr lvl="2"/>
-            <a:r>
-              <a:rPr lang="en-US" dirty="0"/>
-              <a:t>Be concise but explicit</a:t>
-            </a:r>
-          </a:p>
-          <a:p>
-            <a:pPr lvl="2"/>
-            <a:r>
-              <a:rPr lang="en-US" dirty="0"/>
-              <a:t>Use active voice</a:t>
-            </a:r>
-          </a:p>
-          <a:p>
-            <a:pPr lvl="2"/>
-            <a:r>
-              <a:rPr lang="en-US" dirty="0"/>
-              <a:t>Make it readable</a:t>
-            </a:r>
-          </a:p>
-          <a:p>
-            <a:pPr lvl="2"/>
-            <a:r>
-              <a:rPr lang="en-US" dirty="0"/>
-              <a:t>Organization</a:t>
-            </a:r>
-          </a:p>
-          <a:p>
-            <a:pPr lvl="2"/>
-            <a:r>
-              <a:rPr lang="en-US" dirty="0"/>
-              <a:t>Rely on pictures</a:t>
-            </a:r>
-          </a:p>
-          <a:p>
-            <a:pPr lvl="2"/>
-            <a:endParaRPr lang="en-US" dirty="0"/>
-          </a:p>
-          <a:p>
-            <a:pPr lvl="1"/>
-            <a:endParaRPr lang="en-US" dirty="0"/>
-          </a:p>
-          <a:p>
-            <a:pPr lvl="1"/>
-            <a:endParaRPr lang="en-US" dirty="0"/>
-          </a:p>
-        </p:txBody>
-      </p:sp>
-      <p:pic>
-        <p:nvPicPr>
-          <p:cNvPr id="7" name="Picture 6">
-            <a:extLst>
-              <a:ext uri="{FF2B5EF4-FFF2-40B4-BE49-F238E27FC236}">
-                <a16:creationId xmlns:a16="http://schemas.microsoft.com/office/drawing/2014/main" id="{6DD770DE-084F-275E-3BCC-0E1C71ECF817}"/>
-              </a:ext>
-            </a:extLst>
-          </p:cNvPr>
-          <p:cNvPicPr>
-            <a:picLocks noChangeAspect="1"/>
-          </p:cNvPicPr>
-          <p:nvPr/>
-        </p:nvPicPr>
-        <p:blipFill>
-          <a:blip r:embed="rId2"/>
-          <a:stretch>
-            <a:fillRect/>
-          </a:stretch>
-        </p:blipFill>
-        <p:spPr>
-          <a:xfrm>
-            <a:off x="6991842" y="1278876"/>
-            <a:ext cx="5139457" cy="5444836"/>
-          </a:xfrm>
-          <a:prstGeom prst="rect">
-            <a:avLst/>
-          </a:prstGeom>
-        </p:spPr>
-      </p:pic>
-    </p:spTree>
-    <p:extLst>
-      <p:ext uri="{BB962C8B-B14F-4D97-AF65-F5344CB8AC3E}">
-        <p14:creationId xmlns:p14="http://schemas.microsoft.com/office/powerpoint/2010/main" val="1702171027"/>
-      </p:ext>
-    </p:extLst>
-  </p:cSld>
-  <p:clrMapOvr>
-    <a:masterClrMapping/>
-  </p:clrMapOvr>
-  <p:timing>
-    <p:tnLst>
-      <p:par>
-        <p:cTn id="1" dur="indefinite" restart="never" nodeType="tmRoot">
-          <p:childTnLst>
-            <p:seq concurrent="1" nextAc="seek">
-              <p:cTn id="2" dur="indefinite" nodeType="mainSeq">
-                <p:childTnLst>
-                  <p:par>
-                    <p:cTn id="3" fill="hold">
-                      <p:stCondLst>
-                        <p:cond delay="indefinite"/>
-                      </p:stCondLst>
-                      <p:childTnLst>
-                        <p:par>
-                          <p:cTn id="4" fill="hold">
-                            <p:stCondLst>
-                              <p:cond delay="0"/>
-                            </p:stCondLst>
-                            <p:childTnLst>
-                              <p:par>
-                                <p:cTn id="5" presetID="1" presetClass="entr" presetSubtype="0" fill="hold" nodeType="clickEffect">
-                                  <p:stCondLst>
-                                    <p:cond delay="0"/>
-                                  </p:stCondLst>
-                                  <p:childTnLst>
-                                    <p:set>
-                                      <p:cBhvr>
-                                        <p:cTn id="6" dur="1" fill="hold">
-                                          <p:stCondLst>
-                                            <p:cond delay="0"/>
-                                          </p:stCondLst>
-                                        </p:cTn>
-                                        <p:tgtEl>
-                                          <p:spTgt spid="7"/>
-                                        </p:tgtEl>
-                                        <p:attrNameLst>
-                                          <p:attrName>style.visibility</p:attrName>
-                                        </p:attrNameLst>
-                                      </p:cBhvr>
-                                      <p:to>
-                                        <p:strVal val="visible"/>
-                                      </p:to>
-                                    </p:set>
-                                  </p:childTnLst>
-                                </p:cTn>
-                              </p:par>
-                            </p:childTnLst>
-                          </p:cTn>
-                        </p:par>
-                      </p:childTnLst>
-                    </p:cTn>
-                  </p:par>
-                </p:childTnLst>
-              </p:cTn>
-              <p:prevCondLst>
-                <p:cond evt="onPrev" delay="0">
-                  <p:tgtEl>
-                    <p:sldTgt/>
-                  </p:tgtEl>
-                </p:cond>
-              </p:prevCondLst>
-              <p:nextCondLst>
-                <p:cond evt="onNext" delay="0">
-                  <p:tgtEl>
-                    <p:sldTgt/>
-                  </p:tgtEl>
-                </p:cond>
-              </p:nextCondLst>
-            </p:seq>
-          </p:childTnLst>
-        </p:cTn>
-      </p:par>
-    </p:tnLst>
-  </p:timing>
-</p:sld>
-</file>
-
 <file path=ppt/slides/slide2.xml><?xml version="1.0" encoding="utf-8"?>
 <p:sld xmlns:a="http://schemas.openxmlformats.org/drawingml/2006/main" xmlns:r="http://schemas.openxmlformats.org/officeDocument/2006/relationships" xmlns:p="http://schemas.openxmlformats.org/presentationml/2006/main">
   <p:cSld>
@@ -6934,74 +4019,6 @@
       </p:sp>
       <p:sp>
         <p:nvSpPr>
-          <p:cNvPr id="3" name="Content Placeholder 2">
-            <a:extLst>
-              <a:ext uri="{FF2B5EF4-FFF2-40B4-BE49-F238E27FC236}">
-                <a16:creationId xmlns:a16="http://schemas.microsoft.com/office/drawing/2014/main" id="{9996E04F-DBD4-746E-E532-67B26F032E87}"/>
-              </a:ext>
-            </a:extLst>
-          </p:cNvPr>
-          <p:cNvSpPr>
-            <a:spLocks noGrp="1"/>
-          </p:cNvSpPr>
-          <p:nvPr>
-            <p:ph idx="1"/>
-          </p:nvPr>
-        </p:nvSpPr>
-        <p:spPr>
-          <a:xfrm>
-            <a:off x="838200" y="3574473"/>
-            <a:ext cx="10515600" cy="2602490"/>
-          </a:xfrm>
-        </p:spPr>
-        <p:txBody>
-          <a:bodyPr/>
-          <a:lstStyle/>
-          <a:p>
-            <a:r>
-              <a:rPr lang="en-US" dirty="0"/>
-              <a:t>Examples of Standards? (HF and otherwise)</a:t>
-            </a:r>
-          </a:p>
-          <a:p>
-            <a:r>
-              <a:rPr lang="en-US" dirty="0"/>
-              <a:t>Why do we have standards? (-</a:t>
-            </a:r>
-            <a:r>
-              <a:rPr lang="en-US" dirty="0" err="1"/>
-              <a:t>ilities</a:t>
-            </a:r>
-            <a:r>
-              <a:rPr lang="en-US" dirty="0"/>
-              <a:t>)</a:t>
-            </a:r>
-          </a:p>
-          <a:p>
-            <a:r>
-              <a:rPr lang="en-US" dirty="0"/>
-              <a:t>Life without/before standards? (HF and otherwise)</a:t>
-            </a:r>
-          </a:p>
-          <a:p>
-            <a:r>
-              <a:rPr lang="en-US" dirty="0"/>
-              <a:t>Hindrances of Standards? Barriers to use?</a:t>
-            </a:r>
-          </a:p>
-          <a:p>
-            <a:r>
-              <a:rPr lang="en-US" dirty="0"/>
-              <a:t>Domains that could benefit from Standards?</a:t>
-            </a:r>
-          </a:p>
-          <a:p>
-            <a:endParaRPr lang="en-US" dirty="0"/>
-          </a:p>
-        </p:txBody>
-      </p:sp>
-      <p:sp>
-        <p:nvSpPr>
           <p:cNvPr id="5" name="TextBox 4">
             <a:extLst>
               <a:ext uri="{FF2B5EF4-FFF2-40B4-BE49-F238E27FC236}">
@@ -7036,6 +4053,210 @@
               <a:rPr lang="en-US" dirty="0"/>
               <a:t>ISO</a:t>
             </a:r>
+          </a:p>
+        </p:txBody>
+      </p:sp>
+      <p:sp>
+        <p:nvSpPr>
+          <p:cNvPr id="11" name="Content Placeholder 7">
+            <a:extLst>
+              <a:ext uri="{FF2B5EF4-FFF2-40B4-BE49-F238E27FC236}">
+                <a16:creationId xmlns:a16="http://schemas.microsoft.com/office/drawing/2014/main" id="{38F369FF-924A-CD3C-FD65-2497FF0B30D2}"/>
+              </a:ext>
+            </a:extLst>
+          </p:cNvPr>
+          <p:cNvSpPr txBox="1">
+            <a:spLocks/>
+          </p:cNvSpPr>
+          <p:nvPr/>
+        </p:nvSpPr>
+        <p:spPr>
+          <a:xfrm>
+            <a:off x="838200" y="3474719"/>
+            <a:ext cx="10515600" cy="2702243"/>
+          </a:xfrm>
+          <a:prstGeom prst="rect">
+            <a:avLst/>
+          </a:prstGeom>
+        </p:spPr>
+        <p:txBody>
+          <a:bodyPr vert="horz" lIns="91440" tIns="45720" rIns="91440" bIns="45720" rtlCol="0">
+            <a:normAutofit/>
+          </a:bodyPr>
+          <a:lstStyle>
+            <a:lvl1pPr marL="228600" indent="-228600" algn="l" defTabSz="914400" rtl="0" eaLnBrk="1" latinLnBrk="0" hangingPunct="1">
+              <a:lnSpc>
+                <a:spcPct val="90000"/>
+              </a:lnSpc>
+              <a:spcBef>
+                <a:spcPts val="1000"/>
+              </a:spcBef>
+              <a:buFont typeface="Arial" panose="020B0604020202020204" pitchFamily="34" charset="0"/>
+              <a:buChar char="•"/>
+              <a:defRPr sz="2800" kern="1200">
+                <a:solidFill>
+                  <a:schemeClr val="tx1"/>
+                </a:solidFill>
+                <a:latin typeface="+mn-lt"/>
+                <a:ea typeface="+mn-ea"/>
+                <a:cs typeface="+mn-cs"/>
+              </a:defRPr>
+            </a:lvl1pPr>
+            <a:lvl2pPr marL="685800" indent="-228600" algn="l" defTabSz="914400" rtl="0" eaLnBrk="1" latinLnBrk="0" hangingPunct="1">
+              <a:lnSpc>
+                <a:spcPct val="90000"/>
+              </a:lnSpc>
+              <a:spcBef>
+                <a:spcPts val="500"/>
+              </a:spcBef>
+              <a:buFont typeface="Arial" panose="020B0604020202020204" pitchFamily="34" charset="0"/>
+              <a:buChar char="•"/>
+              <a:defRPr sz="2400" kern="1200">
+                <a:solidFill>
+                  <a:schemeClr val="tx1"/>
+                </a:solidFill>
+                <a:latin typeface="+mn-lt"/>
+                <a:ea typeface="+mn-ea"/>
+                <a:cs typeface="+mn-cs"/>
+              </a:defRPr>
+            </a:lvl2pPr>
+            <a:lvl3pPr marL="1143000" indent="-228600" algn="l" defTabSz="914400" rtl="0" eaLnBrk="1" latinLnBrk="0" hangingPunct="1">
+              <a:lnSpc>
+                <a:spcPct val="90000"/>
+              </a:lnSpc>
+              <a:spcBef>
+                <a:spcPts val="500"/>
+              </a:spcBef>
+              <a:buFont typeface="Arial" panose="020B0604020202020204" pitchFamily="34" charset="0"/>
+              <a:buChar char="•"/>
+              <a:defRPr sz="2000" kern="1200">
+                <a:solidFill>
+                  <a:schemeClr val="tx1"/>
+                </a:solidFill>
+                <a:latin typeface="+mn-lt"/>
+                <a:ea typeface="+mn-ea"/>
+                <a:cs typeface="+mn-cs"/>
+              </a:defRPr>
+            </a:lvl3pPr>
+            <a:lvl4pPr marL="1600200" indent="-228600" algn="l" defTabSz="914400" rtl="0" eaLnBrk="1" latinLnBrk="0" hangingPunct="1">
+              <a:lnSpc>
+                <a:spcPct val="90000"/>
+              </a:lnSpc>
+              <a:spcBef>
+                <a:spcPts val="500"/>
+              </a:spcBef>
+              <a:buFont typeface="Arial" panose="020B0604020202020204" pitchFamily="34" charset="0"/>
+              <a:buChar char="•"/>
+              <a:defRPr sz="1800" kern="1200">
+                <a:solidFill>
+                  <a:schemeClr val="tx1"/>
+                </a:solidFill>
+                <a:latin typeface="+mn-lt"/>
+                <a:ea typeface="+mn-ea"/>
+                <a:cs typeface="+mn-cs"/>
+              </a:defRPr>
+            </a:lvl4pPr>
+            <a:lvl5pPr marL="2057400" indent="-228600" algn="l" defTabSz="914400" rtl="0" eaLnBrk="1" latinLnBrk="0" hangingPunct="1">
+              <a:lnSpc>
+                <a:spcPct val="90000"/>
+              </a:lnSpc>
+              <a:spcBef>
+                <a:spcPts val="500"/>
+              </a:spcBef>
+              <a:buFont typeface="Arial" panose="020B0604020202020204" pitchFamily="34" charset="0"/>
+              <a:buChar char="•"/>
+              <a:defRPr sz="1800" kern="1200">
+                <a:solidFill>
+                  <a:schemeClr val="tx1"/>
+                </a:solidFill>
+                <a:latin typeface="+mn-lt"/>
+                <a:ea typeface="+mn-ea"/>
+                <a:cs typeface="+mn-cs"/>
+              </a:defRPr>
+            </a:lvl5pPr>
+            <a:lvl6pPr marL="2514600" indent="-228600" algn="l" defTabSz="914400" rtl="0" eaLnBrk="1" latinLnBrk="0" hangingPunct="1">
+              <a:lnSpc>
+                <a:spcPct val="90000"/>
+              </a:lnSpc>
+              <a:spcBef>
+                <a:spcPts val="500"/>
+              </a:spcBef>
+              <a:buFont typeface="Arial" panose="020B0604020202020204" pitchFamily="34" charset="0"/>
+              <a:buChar char="•"/>
+              <a:defRPr sz="1800" kern="1200">
+                <a:solidFill>
+                  <a:schemeClr val="tx1"/>
+                </a:solidFill>
+                <a:latin typeface="+mn-lt"/>
+                <a:ea typeface="+mn-ea"/>
+                <a:cs typeface="+mn-cs"/>
+              </a:defRPr>
+            </a:lvl6pPr>
+            <a:lvl7pPr marL="2971800" indent="-228600" algn="l" defTabSz="914400" rtl="0" eaLnBrk="1" latinLnBrk="0" hangingPunct="1">
+              <a:lnSpc>
+                <a:spcPct val="90000"/>
+              </a:lnSpc>
+              <a:spcBef>
+                <a:spcPts val="500"/>
+              </a:spcBef>
+              <a:buFont typeface="Arial" panose="020B0604020202020204" pitchFamily="34" charset="0"/>
+              <a:buChar char="•"/>
+              <a:defRPr sz="1800" kern="1200">
+                <a:solidFill>
+                  <a:schemeClr val="tx1"/>
+                </a:solidFill>
+                <a:latin typeface="+mn-lt"/>
+                <a:ea typeface="+mn-ea"/>
+                <a:cs typeface="+mn-cs"/>
+              </a:defRPr>
+            </a:lvl7pPr>
+            <a:lvl8pPr marL="3429000" indent="-228600" algn="l" defTabSz="914400" rtl="0" eaLnBrk="1" latinLnBrk="0" hangingPunct="1">
+              <a:lnSpc>
+                <a:spcPct val="90000"/>
+              </a:lnSpc>
+              <a:spcBef>
+                <a:spcPts val="500"/>
+              </a:spcBef>
+              <a:buFont typeface="Arial" panose="020B0604020202020204" pitchFamily="34" charset="0"/>
+              <a:buChar char="•"/>
+              <a:defRPr sz="1800" kern="1200">
+                <a:solidFill>
+                  <a:schemeClr val="tx1"/>
+                </a:solidFill>
+                <a:latin typeface="+mn-lt"/>
+                <a:ea typeface="+mn-ea"/>
+                <a:cs typeface="+mn-cs"/>
+              </a:defRPr>
+            </a:lvl8pPr>
+            <a:lvl9pPr marL="3886200" indent="-228600" algn="l" defTabSz="914400" rtl="0" eaLnBrk="1" latinLnBrk="0" hangingPunct="1">
+              <a:lnSpc>
+                <a:spcPct val="90000"/>
+              </a:lnSpc>
+              <a:spcBef>
+                <a:spcPts val="500"/>
+              </a:spcBef>
+              <a:buFont typeface="Arial" panose="020B0604020202020204" pitchFamily="34" charset="0"/>
+              <a:buChar char="•"/>
+              <a:defRPr sz="1800" kern="1200">
+                <a:solidFill>
+                  <a:schemeClr val="tx1"/>
+                </a:solidFill>
+                <a:latin typeface="+mn-lt"/>
+                <a:ea typeface="+mn-ea"/>
+                <a:cs typeface="+mn-cs"/>
+              </a:defRPr>
+            </a:lvl9pPr>
+          </a:lstStyle>
+          <a:p>
+            <a:pPr marL="0" indent="0">
+              <a:buFont typeface="Arial" panose="020B0604020202020204" pitchFamily="34" charset="0"/>
+              <a:buNone/>
+            </a:pPr>
+            <a:r>
+              <a:rPr lang="en-US" b="1" dirty="0"/>
+              <a:t>What are Human Factors Standards ?</a:t>
+            </a:r>
+            <a:endParaRPr lang="en-US" dirty="0"/>
           </a:p>
         </p:txBody>
       </p:sp>
@@ -7102,233 +4323,244 @@
                       </p:childTnLst>
                     </p:cTn>
                   </p:par>
+                </p:childTnLst>
+              </p:cTn>
+              <p:prevCondLst>
+                <p:cond evt="onPrev" delay="0">
+                  <p:tgtEl>
+                    <p:sldTgt/>
+                  </p:tgtEl>
+                </p:cond>
+              </p:prevCondLst>
+              <p:nextCondLst>
+                <p:cond evt="onNext" delay="0">
+                  <p:tgtEl>
+                    <p:sldTgt/>
+                  </p:tgtEl>
+                </p:cond>
+              </p:nextCondLst>
+            </p:seq>
+          </p:childTnLst>
+        </p:cTn>
+      </p:par>
+    </p:tnLst>
+    <p:bldLst>
+      <p:bldP spid="5" grpId="0"/>
+    </p:bldLst>
+  </p:timing>
+</p:sld>
+</file>
+
+<file path=ppt/slides/slide3.xml><?xml version="1.0" encoding="utf-8"?>
+<p:sld xmlns:a="http://schemas.openxmlformats.org/drawingml/2006/main" xmlns:r="http://schemas.openxmlformats.org/officeDocument/2006/relationships" xmlns:p="http://schemas.openxmlformats.org/presentationml/2006/main">
+  <p:cSld>
+    <p:spTree>
+      <p:nvGrpSpPr>
+        <p:cNvPr id="1" name="">
+          <a:extLst>
+            <a:ext uri="{FF2B5EF4-FFF2-40B4-BE49-F238E27FC236}">
+              <a16:creationId xmlns:a16="http://schemas.microsoft.com/office/drawing/2014/main" id="{08B6E38B-9306-A8D0-9BF2-B3548975C6B1}"/>
+            </a:ext>
+          </a:extLst>
+        </p:cNvPr>
+        <p:cNvGrpSpPr/>
+        <p:nvPr/>
+      </p:nvGrpSpPr>
+      <p:grpSpPr>
+        <a:xfrm>
+          <a:off x="0" y="0"/>
+          <a:ext cx="0" cy="0"/>
+          <a:chOff x="0" y="0"/>
+          <a:chExt cx="0" cy="0"/>
+        </a:xfrm>
+      </p:grpSpPr>
+      <p:sp>
+        <p:nvSpPr>
+          <p:cNvPr id="2" name="Title 1">
+            <a:extLst>
+              <a:ext uri="{FF2B5EF4-FFF2-40B4-BE49-F238E27FC236}">
+                <a16:creationId xmlns:a16="http://schemas.microsoft.com/office/drawing/2014/main" id="{1007AF57-F1C1-09DA-10E0-CC88AB680EFE}"/>
+              </a:ext>
+            </a:extLst>
+          </p:cNvPr>
+          <p:cNvSpPr>
+            <a:spLocks noGrp="1"/>
+          </p:cNvSpPr>
+          <p:nvPr>
+            <p:ph type="title"/>
+          </p:nvPr>
+        </p:nvSpPr>
+        <p:spPr/>
+        <p:txBody>
+          <a:bodyPr/>
+          <a:lstStyle/>
+          <a:p>
+            <a:r>
+              <a:rPr lang="en-US" dirty="0"/>
+              <a:t>What is a Standard?</a:t>
+            </a:r>
+          </a:p>
+        </p:txBody>
+      </p:sp>
+      <p:sp>
+        <p:nvSpPr>
+          <p:cNvPr id="5" name="TextBox 4">
+            <a:extLst>
+              <a:ext uri="{FF2B5EF4-FFF2-40B4-BE49-F238E27FC236}">
+                <a16:creationId xmlns:a16="http://schemas.microsoft.com/office/drawing/2014/main" id="{8C096AB2-67CB-C406-3E83-E23895507D6A}"/>
+              </a:ext>
+            </a:extLst>
+          </p:cNvPr>
+          <p:cNvSpPr txBox="1"/>
+          <p:nvPr/>
+        </p:nvSpPr>
+        <p:spPr>
+          <a:xfrm>
+            <a:off x="1620982" y="1602754"/>
+            <a:ext cx="6096000" cy="1477328"/>
+          </a:xfrm>
+          <a:prstGeom prst="rect">
+            <a:avLst/>
+          </a:prstGeom>
+          <a:noFill/>
+        </p:spPr>
+        <p:txBody>
+          <a:bodyPr wrap="square">
+            <a:spAutoFit/>
+          </a:bodyPr>
+          <a:lstStyle/>
+          <a:p>
+            <a:r>
+              <a:rPr lang="en-US" i="1" dirty="0"/>
+              <a:t>Standards are the distilled wisdom of people with expertise in their subject matter and who know the needs of the organizations they represent – people such as manufacturers, sellers, buyers, customers, trade associations, users or regulators. </a:t>
+            </a:r>
+            <a:r>
+              <a:rPr lang="en-US" dirty="0"/>
+              <a:t>ISO</a:t>
+            </a:r>
+          </a:p>
+        </p:txBody>
+      </p:sp>
+      <p:sp>
+        <p:nvSpPr>
+          <p:cNvPr id="8" name="Content Placeholder 7">
+            <a:extLst>
+              <a:ext uri="{FF2B5EF4-FFF2-40B4-BE49-F238E27FC236}">
+                <a16:creationId xmlns:a16="http://schemas.microsoft.com/office/drawing/2014/main" id="{EF1568DC-E4E7-AA82-F8CF-C74238E9B6DA}"/>
+              </a:ext>
+            </a:extLst>
+          </p:cNvPr>
+          <p:cNvSpPr>
+            <a:spLocks noGrp="1"/>
+          </p:cNvSpPr>
+          <p:nvPr>
+            <p:ph idx="1"/>
+          </p:nvPr>
+        </p:nvSpPr>
+        <p:spPr>
+          <a:xfrm>
+            <a:off x="838200" y="3474719"/>
+            <a:ext cx="10515600" cy="2702243"/>
+          </a:xfrm>
+        </p:spPr>
+        <p:txBody>
+          <a:bodyPr>
+            <a:normAutofit fontScale="92500" lnSpcReduction="10000"/>
+          </a:bodyPr>
+          <a:lstStyle/>
+          <a:p>
+            <a:pPr marL="0" indent="0">
+              <a:buNone/>
+            </a:pPr>
+            <a:r>
+              <a:rPr lang="en-US" b="1" dirty="0"/>
+              <a:t>Human factors standards</a:t>
+            </a:r>
+            <a:r>
+              <a:rPr lang="en-US" dirty="0"/>
+              <a:t> are </a:t>
+            </a:r>
+            <a:r>
+              <a:rPr lang="en-US" b="1" dirty="0"/>
+              <a:t>systematic guidelines, criteria, and best practices</a:t>
+            </a:r>
+            <a:r>
+              <a:rPr lang="en-US" dirty="0"/>
+              <a:t> that ensure the design of systems, products, and environments aligns with human capabilities, limitations, and expectations. These standards aim to </a:t>
+            </a:r>
+            <a:r>
+              <a:rPr lang="en-US" b="1" dirty="0"/>
+              <a:t>optimize performance, safety, usability, and user satisfaction</a:t>
+            </a:r>
+            <a:r>
+              <a:rPr lang="en-US" dirty="0"/>
+              <a:t> by integrating principles from psychology, ergonomics, engineering, and design into the development process. </a:t>
+            </a:r>
+          </a:p>
+          <a:p>
+            <a:pPr marL="0" indent="0">
+              <a:buNone/>
+            </a:pPr>
+            <a:r>
+              <a:rPr lang="en-US" dirty="0"/>
+              <a:t>- </a:t>
+            </a:r>
+            <a:r>
+              <a:rPr lang="en-US" dirty="0" err="1"/>
+              <a:t>DeepSeek</a:t>
+            </a:r>
+            <a:r>
+              <a:rPr lang="en-US" dirty="0"/>
+              <a:t> R1</a:t>
+            </a:r>
+          </a:p>
+        </p:txBody>
+      </p:sp>
+    </p:spTree>
+    <p:extLst>
+      <p:ext uri="{BB962C8B-B14F-4D97-AF65-F5344CB8AC3E}">
+        <p14:creationId xmlns:p14="http://schemas.microsoft.com/office/powerpoint/2010/main" val="2031684294"/>
+      </p:ext>
+    </p:extLst>
+  </p:cSld>
+  <p:clrMapOvr>
+    <a:masterClrMapping/>
+  </p:clrMapOvr>
+  <p:timing>
+    <p:tnLst>
+      <p:par>
+        <p:cTn id="1" dur="indefinite" restart="never" nodeType="tmRoot">
+          <p:childTnLst>
+            <p:seq concurrent="1" nextAc="seek">
+              <p:cTn id="2" dur="indefinite" nodeType="mainSeq">
+                <p:childTnLst>
                   <p:par>
-                    <p:cTn id="7" fill="hold">
+                    <p:cTn id="3" fill="hold">
                       <p:stCondLst>
                         <p:cond delay="indefinite"/>
                       </p:stCondLst>
                       <p:childTnLst>
                         <p:par>
-                          <p:cTn id="8" fill="hold">
+                          <p:cTn id="4" fill="hold">
                             <p:stCondLst>
                               <p:cond delay="0"/>
                             </p:stCondLst>
                             <p:childTnLst>
                               <p:par>
-                                <p:cTn id="9" presetID="1" presetClass="entr" presetSubtype="0" fill="hold" grpId="0" nodeType="clickEffect">
+                                <p:cTn id="5" presetID="1" presetClass="entr" presetSubtype="0" fill="hold" grpId="0" nodeType="clickEffect">
                                   <p:stCondLst>
                                     <p:cond delay="0"/>
                                   </p:stCondLst>
                                   <p:childTnLst>
                                     <p:set>
                                       <p:cBhvr>
-                                        <p:cTn id="10" dur="1" fill="hold">
+                                        <p:cTn id="6" dur="1" fill="hold">
                                           <p:stCondLst>
                                             <p:cond delay="0"/>
                                           </p:stCondLst>
                                         </p:cTn>
                                         <p:tgtEl>
-                                          <p:spTgt spid="3">
-                                            <p:txEl>
-                                              <p:pRg st="0" end="0"/>
-                                            </p:txEl>
-                                          </p:spTgt>
-                                        </p:tgtEl>
-                                        <p:attrNameLst>
-                                          <p:attrName>style.visibility</p:attrName>
-                                        </p:attrNameLst>
-                                      </p:cBhvr>
-                                      <p:to>
-                                        <p:strVal val="visible"/>
-                                      </p:to>
-                                    </p:set>
-                                  </p:childTnLst>
-                                </p:cTn>
-                              </p:par>
-                            </p:childTnLst>
-                          </p:cTn>
-                        </p:par>
-                      </p:childTnLst>
-                    </p:cTn>
-                  </p:par>
-                  <p:par>
-                    <p:cTn id="11" fill="hold">
-                      <p:stCondLst>
-                        <p:cond delay="indefinite"/>
-                      </p:stCondLst>
-                      <p:childTnLst>
-                        <p:par>
-                          <p:cTn id="12" fill="hold">
-                            <p:stCondLst>
-                              <p:cond delay="0"/>
-                            </p:stCondLst>
-                            <p:childTnLst>
-                              <p:par>
-                                <p:cTn id="13" presetID="1" presetClass="entr" presetSubtype="0" fill="hold" grpId="0" nodeType="clickEffect">
-                                  <p:stCondLst>
-                                    <p:cond delay="0"/>
-                                  </p:stCondLst>
-                                  <p:childTnLst>
-                                    <p:set>
-                                      <p:cBhvr>
-                                        <p:cTn id="14" dur="1" fill="hold">
-                                          <p:stCondLst>
-                                            <p:cond delay="0"/>
-                                          </p:stCondLst>
-                                        </p:cTn>
-                                        <p:tgtEl>
-                                          <p:spTgt spid="3">
-                                            <p:txEl>
-                                              <p:pRg st="1" end="1"/>
-                                            </p:txEl>
-                                          </p:spTgt>
-                                        </p:tgtEl>
-                                        <p:attrNameLst>
-                                          <p:attrName>style.visibility</p:attrName>
-                                        </p:attrNameLst>
-                                      </p:cBhvr>
-                                      <p:to>
-                                        <p:strVal val="visible"/>
-                                      </p:to>
-                                    </p:set>
-                                  </p:childTnLst>
-                                </p:cTn>
-                              </p:par>
-                            </p:childTnLst>
-                          </p:cTn>
-                        </p:par>
-                      </p:childTnLst>
-                    </p:cTn>
-                  </p:par>
-                  <p:par>
-                    <p:cTn id="15" fill="hold">
-                      <p:stCondLst>
-                        <p:cond delay="indefinite"/>
-                      </p:stCondLst>
-                      <p:childTnLst>
-                        <p:par>
-                          <p:cTn id="16" fill="hold">
-                            <p:stCondLst>
-                              <p:cond delay="0"/>
-                            </p:stCondLst>
-                            <p:childTnLst>
-                              <p:par>
-                                <p:cTn id="17" presetID="1" presetClass="entr" presetSubtype="0" fill="hold" grpId="0" nodeType="clickEffect">
-                                  <p:stCondLst>
-                                    <p:cond delay="0"/>
-                                  </p:stCondLst>
-                                  <p:childTnLst>
-                                    <p:set>
-                                      <p:cBhvr>
-                                        <p:cTn id="18" dur="1" fill="hold">
-                                          <p:stCondLst>
-                                            <p:cond delay="0"/>
-                                          </p:stCondLst>
-                                        </p:cTn>
-                                        <p:tgtEl>
-                                          <p:spTgt spid="3">
-                                            <p:txEl>
-                                              <p:pRg st="2" end="2"/>
-                                            </p:txEl>
-                                          </p:spTgt>
-                                        </p:tgtEl>
-                                        <p:attrNameLst>
-                                          <p:attrName>style.visibility</p:attrName>
-                                        </p:attrNameLst>
-                                      </p:cBhvr>
-                                      <p:to>
-                                        <p:strVal val="visible"/>
-                                      </p:to>
-                                    </p:set>
-                                  </p:childTnLst>
-                                </p:cTn>
-                              </p:par>
-                            </p:childTnLst>
-                          </p:cTn>
-                        </p:par>
-                      </p:childTnLst>
-                    </p:cTn>
-                  </p:par>
-                  <p:par>
-                    <p:cTn id="19" fill="hold">
-                      <p:stCondLst>
-                        <p:cond delay="indefinite"/>
-                      </p:stCondLst>
-                      <p:childTnLst>
-                        <p:par>
-                          <p:cTn id="20" fill="hold">
-                            <p:stCondLst>
-                              <p:cond delay="0"/>
-                            </p:stCondLst>
-                            <p:childTnLst>
-                              <p:par>
-                                <p:cTn id="21" presetID="1" presetClass="entr" presetSubtype="0" fill="hold" grpId="0" nodeType="clickEffect">
-                                  <p:stCondLst>
-                                    <p:cond delay="0"/>
-                                  </p:stCondLst>
-                                  <p:childTnLst>
-                                    <p:set>
-                                      <p:cBhvr>
-                                        <p:cTn id="22" dur="1" fill="hold">
-                                          <p:stCondLst>
-                                            <p:cond delay="0"/>
-                                          </p:stCondLst>
-                                        </p:cTn>
-                                        <p:tgtEl>
-                                          <p:spTgt spid="3">
-                                            <p:txEl>
-                                              <p:pRg st="3" end="3"/>
-                                            </p:txEl>
-                                          </p:spTgt>
-                                        </p:tgtEl>
-                                        <p:attrNameLst>
-                                          <p:attrName>style.visibility</p:attrName>
-                                        </p:attrNameLst>
-                                      </p:cBhvr>
-                                      <p:to>
-                                        <p:strVal val="visible"/>
-                                      </p:to>
-                                    </p:set>
-                                  </p:childTnLst>
-                                </p:cTn>
-                              </p:par>
-                            </p:childTnLst>
-                          </p:cTn>
-                        </p:par>
-                      </p:childTnLst>
-                    </p:cTn>
-                  </p:par>
-                  <p:par>
-                    <p:cTn id="23" fill="hold">
-                      <p:stCondLst>
-                        <p:cond delay="indefinite"/>
-                      </p:stCondLst>
-                      <p:childTnLst>
-                        <p:par>
-                          <p:cTn id="24" fill="hold">
-                            <p:stCondLst>
-                              <p:cond delay="0"/>
-                            </p:stCondLst>
-                            <p:childTnLst>
-                              <p:par>
-                                <p:cTn id="25" presetID="1" presetClass="entr" presetSubtype="0" fill="hold" grpId="0" nodeType="clickEffect">
-                                  <p:stCondLst>
-                                    <p:cond delay="0"/>
-                                  </p:stCondLst>
-                                  <p:childTnLst>
-                                    <p:set>
-                                      <p:cBhvr>
-                                        <p:cTn id="26" dur="1" fill="hold">
-                                          <p:stCondLst>
-                                            <p:cond delay="0"/>
-                                          </p:stCondLst>
-                                        </p:cTn>
-                                        <p:tgtEl>
-                                          <p:spTgt spid="3">
-                                            <p:txEl>
-                                              <p:pRg st="4" end="4"/>
-                                            </p:txEl>
-                                          </p:spTgt>
+                                          <p:spTgt spid="5"/>
                                         </p:tgtEl>
                                         <p:attrNameLst>
                                           <p:attrName>style.visibility</p:attrName>
@@ -7369,129 +4601,9 @@
       </p:par>
     </p:tnLst>
     <p:bldLst>
-      <p:bldP spid="3" grpId="0" build="p"/>
       <p:bldP spid="5" grpId="0"/>
     </p:bldLst>
   </p:timing>
-</p:sld>
-</file>
-
-<file path=ppt/slides/slide3.xml><?xml version="1.0" encoding="utf-8"?>
-<p:sld xmlns:a="http://schemas.openxmlformats.org/drawingml/2006/main" xmlns:r="http://schemas.openxmlformats.org/officeDocument/2006/relationships" xmlns:p="http://schemas.openxmlformats.org/presentationml/2006/main">
-  <p:cSld>
-    <p:spTree>
-      <p:nvGrpSpPr>
-        <p:cNvPr id="1" name=""/>
-        <p:cNvGrpSpPr/>
-        <p:nvPr/>
-      </p:nvGrpSpPr>
-      <p:grpSpPr>
-        <a:xfrm>
-          <a:off x="0" y="0"/>
-          <a:ext cx="0" cy="0"/>
-          <a:chOff x="0" y="0"/>
-          <a:chExt cx="0" cy="0"/>
-        </a:xfrm>
-      </p:grpSpPr>
-      <p:sp>
-        <p:nvSpPr>
-          <p:cNvPr id="2" name="Title 1">
-            <a:extLst>
-              <a:ext uri="{FF2B5EF4-FFF2-40B4-BE49-F238E27FC236}">
-                <a16:creationId xmlns:a16="http://schemas.microsoft.com/office/drawing/2014/main" id="{40253041-1DE3-783F-D5DF-4B28B81F1E23}"/>
-              </a:ext>
-            </a:extLst>
-          </p:cNvPr>
-          <p:cNvSpPr>
-            <a:spLocks noGrp="1"/>
-          </p:cNvSpPr>
-          <p:nvPr>
-            <p:ph type="title"/>
-          </p:nvPr>
-        </p:nvSpPr>
-        <p:spPr/>
-        <p:txBody>
-          <a:bodyPr/>
-          <a:lstStyle/>
-          <a:p>
-            <a:r>
-              <a:rPr lang="en-US" dirty="0"/>
-              <a:t>Human Factors Standards (non-comprehensive)</a:t>
-            </a:r>
-          </a:p>
-        </p:txBody>
-      </p:sp>
-      <p:sp>
-        <p:nvSpPr>
-          <p:cNvPr id="3" name="Content Placeholder 2">
-            <a:extLst>
-              <a:ext uri="{FF2B5EF4-FFF2-40B4-BE49-F238E27FC236}">
-                <a16:creationId xmlns:a16="http://schemas.microsoft.com/office/drawing/2014/main" id="{AECE42B2-027E-50D6-C4AC-EBABF7D64C0D}"/>
-              </a:ext>
-            </a:extLst>
-          </p:cNvPr>
-          <p:cNvSpPr>
-            <a:spLocks noGrp="1"/>
-          </p:cNvSpPr>
-          <p:nvPr>
-            <p:ph idx="1"/>
-          </p:nvPr>
-        </p:nvSpPr>
-        <p:spPr/>
-        <p:txBody>
-          <a:bodyPr/>
-          <a:lstStyle/>
-          <a:p>
-            <a:r>
-              <a:rPr lang="en-US" dirty="0"/>
-              <a:t>MIL-STD-1472 (Military)</a:t>
-            </a:r>
-          </a:p>
-          <a:p>
-            <a:r>
-              <a:rPr lang="en-US" dirty="0"/>
-              <a:t>NUREG-0700 (Nuclear Power)</a:t>
-            </a:r>
-          </a:p>
-          <a:p>
-            <a:r>
-              <a:rPr lang="en-US" dirty="0"/>
-              <a:t>FAA 2016-12 (Aviation)</a:t>
-            </a:r>
-          </a:p>
-          <a:p>
-            <a:r>
-              <a:rPr lang="en-US" dirty="0"/>
-              <a:t>SAE Safety and Human Factors (Auto)</a:t>
-            </a:r>
-          </a:p>
-          <a:p>
-            <a:r>
-              <a:rPr lang="en-US" dirty="0"/>
-              <a:t>ISO 9241-210:2019 Ergonomics of human-system interaction</a:t>
-            </a:r>
-          </a:p>
-          <a:p>
-            <a:r>
-              <a:rPr lang="en-US" dirty="0"/>
-              <a:t>FDA Guidance - Applying Human Factors and Usability Engineering to Medical Devices</a:t>
-            </a:r>
-          </a:p>
-          <a:p>
-            <a:endParaRPr lang="en-US" dirty="0"/>
-          </a:p>
-        </p:txBody>
-      </p:sp>
-    </p:spTree>
-    <p:extLst>
-      <p:ext uri="{BB962C8B-B14F-4D97-AF65-F5344CB8AC3E}">
-        <p14:creationId xmlns:p14="http://schemas.microsoft.com/office/powerpoint/2010/main" val="1854139840"/>
-      </p:ext>
-    </p:extLst>
-  </p:cSld>
-  <p:clrMapOvr>
-    <a:masterClrMapping/>
-  </p:clrMapOvr>
 </p:sld>
 </file>
 
@@ -7512,48 +4624,12 @@
           <a:chExt cx="0" cy="0"/>
         </a:xfrm>
       </p:grpSpPr>
-      <p:pic>
-        <p:nvPicPr>
-          <p:cNvPr id="6" name="Picture 5" descr="Diagram&#10;&#10;Description automatically generated">
-            <a:extLst>
-              <a:ext uri="{FF2B5EF4-FFF2-40B4-BE49-F238E27FC236}">
-                <a16:creationId xmlns:a16="http://schemas.microsoft.com/office/drawing/2014/main" id="{E908DDC8-F6F0-9A16-E3F5-AF5EFE512BAD}"/>
-              </a:ext>
-            </a:extLst>
-          </p:cNvPr>
-          <p:cNvPicPr>
-            <a:picLocks noChangeAspect="1"/>
-          </p:cNvPicPr>
-          <p:nvPr/>
-        </p:nvPicPr>
-        <p:blipFill>
-          <a:blip r:embed="rId2">
-            <a:extLst>
-              <a:ext uri="{28A0092B-C50C-407E-A947-70E740481C1C}">
-                <a14:useLocalDpi xmlns:a14="http://schemas.microsoft.com/office/drawing/2010/main" val="0"/>
-              </a:ext>
-            </a:extLst>
-          </a:blip>
-          <a:stretch>
-            <a:fillRect/>
-          </a:stretch>
-        </p:blipFill>
-        <p:spPr>
-          <a:xfrm>
-            <a:off x="3638713" y="1340473"/>
-            <a:ext cx="4914573" cy="4970271"/>
-          </a:xfrm>
-          <a:prstGeom prst="rect">
-            <a:avLst/>
-          </a:prstGeom>
-        </p:spPr>
-      </p:pic>
       <p:sp>
         <p:nvSpPr>
           <p:cNvPr id="2" name="Title 1">
             <a:extLst>
               <a:ext uri="{FF2B5EF4-FFF2-40B4-BE49-F238E27FC236}">
-                <a16:creationId xmlns:a16="http://schemas.microsoft.com/office/drawing/2014/main" id="{D7963B0E-F576-0F15-2798-A0C32345631A}"/>
+                <a16:creationId xmlns:a16="http://schemas.microsoft.com/office/drawing/2014/main" id="{90024B10-689C-345D-00D4-46E3ED6F3936}"/>
               </a:ext>
             </a:extLst>
           </p:cNvPr>
@@ -7571,17 +4647,17 @@
           <a:p>
             <a:r>
               <a:rPr lang="en-US" dirty="0"/>
-              <a:t>When to Apply Standards Evaluation?</a:t>
-            </a:r>
-          </a:p>
-        </p:txBody>
-      </p:sp>
-      <p:sp>
-        <p:nvSpPr>
-          <p:cNvPr id="8" name="Content Placeholder 7">
-            <a:extLst>
-              <a:ext uri="{FF2B5EF4-FFF2-40B4-BE49-F238E27FC236}">
-                <a16:creationId xmlns:a16="http://schemas.microsoft.com/office/drawing/2014/main" id="{CD4DFF57-7514-5F4C-D82A-3A554F2E8533}"/>
+              <a:t>Human Factors Standards</a:t>
+            </a:r>
+          </a:p>
+        </p:txBody>
+      </p:sp>
+      <p:sp>
+        <p:nvSpPr>
+          <p:cNvPr id="3" name="Content Placeholder 2">
+            <a:extLst>
+              <a:ext uri="{FF2B5EF4-FFF2-40B4-BE49-F238E27FC236}">
+                <a16:creationId xmlns:a16="http://schemas.microsoft.com/office/drawing/2014/main" id="{63E7A3A8-53C4-4697-CF15-F8019C76460C}"/>
               </a:ext>
             </a:extLst>
           </p:cNvPr>
@@ -7592,32 +4668,55 @@
             <p:ph idx="1"/>
           </p:nvPr>
         </p:nvSpPr>
-        <p:spPr>
-          <a:xfrm>
-            <a:off x="838199" y="6320775"/>
-            <a:ext cx="10515600" cy="344199"/>
-          </a:xfrm>
-        </p:spPr>
-        <p:txBody>
-          <a:bodyPr>
-            <a:normAutofit/>
-          </a:bodyPr>
-          <a:lstStyle/>
-          <a:p>
-            <a:pPr marL="0" indent="0">
-              <a:buNone/>
-            </a:pPr>
-            <a:r>
-              <a:rPr lang="en-US" sz="1800" dirty="0"/>
-              <a:t>https://www.nngroup.com/articles/design-thinking/</a:t>
-            </a:r>
+        <p:spPr/>
+        <p:txBody>
+          <a:bodyPr/>
+          <a:lstStyle/>
+          <a:p>
+            <a:r>
+              <a:rPr lang="en-US" dirty="0"/>
+              <a:t>Standards can be voluntary</a:t>
+            </a:r>
+          </a:p>
+          <a:p>
+            <a:r>
+              <a:rPr lang="en-US" dirty="0"/>
+              <a:t>Standards can be required</a:t>
+            </a:r>
+          </a:p>
+          <a:p>
+            <a:r>
+              <a:rPr lang="en-US" dirty="0"/>
+              <a:t>Standards are often domain specific</a:t>
+            </a:r>
+          </a:p>
+          <a:p>
+            <a:r>
+              <a:rPr lang="en-US" dirty="0"/>
+              <a:t>Standards can be interdisciplinary</a:t>
+            </a:r>
+          </a:p>
+          <a:p>
+            <a:r>
+              <a:rPr lang="en-US" dirty="0"/>
+              <a:t>Standards can incorporate or specify usability testing and validation</a:t>
+            </a:r>
+          </a:p>
+          <a:p>
+            <a:r>
+              <a:rPr lang="en-US" dirty="0"/>
+              <a:t>Some are enforced</a:t>
+            </a:r>
+          </a:p>
+          <a:p>
+            <a:endParaRPr lang="en-US" dirty="0"/>
           </a:p>
         </p:txBody>
       </p:sp>
     </p:spTree>
     <p:extLst>
       <p:ext uri="{BB962C8B-B14F-4D97-AF65-F5344CB8AC3E}">
-        <p14:creationId xmlns:p14="http://schemas.microsoft.com/office/powerpoint/2010/main" val="2557864978"/>
+        <p14:creationId xmlns:p14="http://schemas.microsoft.com/office/powerpoint/2010/main" val="728657331"/>
       </p:ext>
     </p:extLst>
   </p:cSld>
@@ -7644,34 +4743,12 @@
           <a:chExt cx="0" cy="0"/>
         </a:xfrm>
       </p:grpSpPr>
-      <p:graphicFrame>
-        <p:nvGraphicFramePr>
-          <p:cNvPr id="4" name="Diagram 3">
-            <a:extLst>
-              <a:ext uri="{FF2B5EF4-FFF2-40B4-BE49-F238E27FC236}">
-                <a16:creationId xmlns:a16="http://schemas.microsoft.com/office/drawing/2014/main" id="{DB8576CF-1113-0E69-9728-E833CD0A3109}"/>
-              </a:ext>
-            </a:extLst>
-          </p:cNvPr>
-          <p:cNvGraphicFramePr/>
-          <p:nvPr/>
-        </p:nvGraphicFramePr>
-        <p:xfrm>
-          <a:off x="374074" y="772150"/>
-          <a:ext cx="11291454" cy="4014595"/>
-        </p:xfrm>
-        <a:graphic>
-          <a:graphicData uri="http://schemas.openxmlformats.org/drawingml/2006/diagram">
-            <dgm:relIds xmlns:dgm="http://schemas.openxmlformats.org/drawingml/2006/diagram" xmlns:r="http://schemas.openxmlformats.org/officeDocument/2006/relationships" r:dm="rId2" r:lo="rId3" r:qs="rId4" r:cs="rId5"/>
-          </a:graphicData>
-        </a:graphic>
-      </p:graphicFrame>
       <p:sp>
         <p:nvSpPr>
           <p:cNvPr id="2" name="Title 1">
             <a:extLst>
               <a:ext uri="{FF2B5EF4-FFF2-40B4-BE49-F238E27FC236}">
-                <a16:creationId xmlns:a16="http://schemas.microsoft.com/office/drawing/2014/main" id="{D7963B0E-F576-0F15-2798-A0C32345631A}"/>
+                <a16:creationId xmlns:a16="http://schemas.microsoft.com/office/drawing/2014/main" id="{40253041-1DE3-783F-D5DF-4B28B81F1E23}"/>
               </a:ext>
             </a:extLst>
           </p:cNvPr>
@@ -7689,7 +4766,7 @@
           <a:p>
             <a:r>
               <a:rPr lang="en-US" dirty="0"/>
-              <a:t>When to Apply Standards Evaluation?</a:t>
+              <a:t>Human Factors Standards (non-comprehensive)</a:t>
             </a:r>
           </a:p>
         </p:txBody>
@@ -7699,7 +4776,7 @@
           <p:cNvPr id="3" name="Content Placeholder 2">
             <a:extLst>
               <a:ext uri="{FF2B5EF4-FFF2-40B4-BE49-F238E27FC236}">
-                <a16:creationId xmlns:a16="http://schemas.microsoft.com/office/drawing/2014/main" id="{4E658F96-2719-087C-C7B9-125D1B0E8C19}"/>
+                <a16:creationId xmlns:a16="http://schemas.microsoft.com/office/drawing/2014/main" id="{AECE42B2-027E-50D6-C4AC-EBABF7D64C0D}"/>
               </a:ext>
             </a:extLst>
           </p:cNvPr>
@@ -7710,30 +4787,55 @@
             <p:ph idx="1"/>
           </p:nvPr>
         </p:nvSpPr>
-        <p:spPr>
-          <a:xfrm>
-            <a:off x="748145" y="5569526"/>
-            <a:ext cx="10515600" cy="2609417"/>
-          </a:xfrm>
-        </p:spPr>
-        <p:txBody>
-          <a:bodyPr/>
-          <a:lstStyle/>
-          <a:p>
-            <a:pPr marL="0" indent="0">
-              <a:buNone/>
-            </a:pPr>
+        <p:spPr/>
+        <p:txBody>
+          <a:bodyPr/>
+          <a:lstStyle/>
+          <a:p>
             <a:r>
               <a:rPr lang="en-US" dirty="0"/>
-              <a:t>Stages of NUREG-0711 Product Review Model</a:t>
-            </a:r>
+              <a:t>MIL-STD-1472 (Military)</a:t>
+            </a:r>
+          </a:p>
+          <a:p>
+            <a:r>
+              <a:rPr lang="en-US" dirty="0"/>
+              <a:t>NUREG-0700 (Nuclear Power)</a:t>
+            </a:r>
+          </a:p>
+          <a:p>
+            <a:r>
+              <a:rPr lang="en-US" dirty="0"/>
+              <a:t>FAA 2016-12 (Aviation)</a:t>
+            </a:r>
+          </a:p>
+          <a:p>
+            <a:r>
+              <a:rPr lang="en-US" dirty="0"/>
+              <a:t>SAE Safety and Human Factors (Auto, not free)</a:t>
+            </a:r>
+          </a:p>
+          <a:p>
+            <a:r>
+              <a:rPr lang="en-US" dirty="0"/>
+              <a:t>ISO 9241-210:2019 Ergonomics of human-system interaction (not free)</a:t>
+            </a:r>
+          </a:p>
+          <a:p>
+            <a:r>
+              <a:rPr lang="en-US" dirty="0"/>
+              <a:t>FDA Guidance - Applying Human Factors and Usability Engineering to Medical Devices</a:t>
+            </a:r>
+          </a:p>
+          <a:p>
+            <a:endParaRPr lang="en-US" dirty="0"/>
           </a:p>
         </p:txBody>
       </p:sp>
     </p:spTree>
     <p:extLst>
       <p:ext uri="{BB962C8B-B14F-4D97-AF65-F5344CB8AC3E}">
-        <p14:creationId xmlns:p14="http://schemas.microsoft.com/office/powerpoint/2010/main" val="2134007159"/>
+        <p14:creationId xmlns:p14="http://schemas.microsoft.com/office/powerpoint/2010/main" val="1854139840"/>
       </p:ext>
     </p:extLst>
   </p:cSld>
@@ -7765,7 +4867,7 @@
           <p:cNvPr id="2" name="Title 1">
             <a:extLst>
               <a:ext uri="{FF2B5EF4-FFF2-40B4-BE49-F238E27FC236}">
-                <a16:creationId xmlns:a16="http://schemas.microsoft.com/office/drawing/2014/main" id="{BFA63817-A477-6060-C282-4D0AD8EE8CB1}"/>
+                <a16:creationId xmlns:a16="http://schemas.microsoft.com/office/drawing/2014/main" id="{71B85530-AEC7-27DD-1F5B-42573C7BD001}"/>
               </a:ext>
             </a:extLst>
           </p:cNvPr>
@@ -7776,67 +4878,80 @@
             <p:ph type="title"/>
           </p:nvPr>
         </p:nvSpPr>
-        <p:spPr>
-          <a:xfrm>
-            <a:off x="692727" y="219146"/>
-            <a:ext cx="10515600" cy="1325563"/>
-          </a:xfrm>
-        </p:spPr>
-        <p:txBody>
-          <a:bodyPr>
-            <a:normAutofit/>
-          </a:bodyPr>
+        <p:spPr/>
+        <p:txBody>
+          <a:bodyPr/>
           <a:lstStyle/>
           <a:p>
             <a:r>
               <a:rPr lang="en-US" dirty="0"/>
-              <a:t>HF Standards to support UX and Agile Design</a:t>
-            </a:r>
-            <a:br>
+              <a:t>When Did they come about?</a:t>
+            </a:r>
+          </a:p>
+        </p:txBody>
+      </p:sp>
+      <p:sp>
+        <p:nvSpPr>
+          <p:cNvPr id="3" name="Content Placeholder 2">
+            <a:extLst>
+              <a:ext uri="{FF2B5EF4-FFF2-40B4-BE49-F238E27FC236}">
+                <a16:creationId xmlns:a16="http://schemas.microsoft.com/office/drawing/2014/main" id="{6F71FB04-6FBB-0010-BB66-7E1682D52A60}"/>
+              </a:ext>
+            </a:extLst>
+          </p:cNvPr>
+          <p:cNvSpPr>
+            <a:spLocks noGrp="1"/>
+          </p:cNvSpPr>
+          <p:nvPr>
+            <p:ph idx="1"/>
+          </p:nvPr>
+        </p:nvSpPr>
+        <p:spPr/>
+        <p:txBody>
+          <a:bodyPr/>
+          <a:lstStyle/>
+          <a:p>
+            <a:r>
               <a:rPr lang="en-US" dirty="0"/>
-            </a:br>
-            <a:r>
-              <a:rPr lang="en-US" sz="2400" dirty="0"/>
-              <a:t>Maguire</a:t>
-            </a:r>
+              <a:t>NUREG 0700 (published in 1981) after 3-mile island</a:t>
+            </a:r>
+          </a:p>
+          <a:p>
+            <a:r>
+              <a:rPr lang="en-US" dirty="0"/>
+              <a:t>MIL-STD 1472 (1981) standardize procurement of equipment</a:t>
+            </a:r>
+          </a:p>
+          <a:p>
+            <a:pPr lvl="1"/>
+            <a:r>
+              <a:rPr lang="en-US" b="1" dirty="0"/>
+              <a:t>B-17 "Flying Fortress" Bombers</a:t>
+            </a:r>
+            <a:r>
+              <a:rPr lang="en-US" dirty="0"/>
+              <a:t>: Pilots frequently retracted the landing gear instead of the flaps (or vice versa) due to identical toggle switches placed side by side. This design flaw caused catastrophic crashes during takeoff and landing.</a:t>
+            </a:r>
+          </a:p>
+          <a:p>
+            <a:pPr lvl="1"/>
+            <a:r>
+              <a:rPr lang="en-US" dirty="0"/>
+              <a:t>1980-1990S Friendly fire incidents leading to legibility standards with Night Vision Googles</a:t>
+            </a:r>
+          </a:p>
+          <a:p>
             <a:endParaRPr lang="en-US" dirty="0"/>
           </a:p>
-        </p:txBody>
-      </p:sp>
-      <p:pic>
-        <p:nvPicPr>
-          <p:cNvPr id="5" name="Picture 4">
-            <a:extLst>
-              <a:ext uri="{FF2B5EF4-FFF2-40B4-BE49-F238E27FC236}">
-                <a16:creationId xmlns:a16="http://schemas.microsoft.com/office/drawing/2014/main" id="{A90E84C5-E6A6-381C-C572-3919A645F841}"/>
-              </a:ext>
-            </a:extLst>
-          </p:cNvPr>
-          <p:cNvPicPr>
-            <a:picLocks noChangeAspect="1"/>
-          </p:cNvPicPr>
-          <p:nvPr/>
-        </p:nvPicPr>
-        <p:blipFill>
-          <a:blip r:embed="rId2"/>
-          <a:stretch>
-            <a:fillRect/>
-          </a:stretch>
-        </p:blipFill>
-        <p:spPr>
-          <a:xfrm>
-            <a:off x="2916383" y="1600128"/>
-            <a:ext cx="6755386" cy="4729360"/>
-          </a:xfrm>
-          <a:prstGeom prst="rect">
-            <a:avLst/>
-          </a:prstGeom>
-        </p:spPr>
-      </p:pic>
+          <a:p>
+            <a:endParaRPr lang="en-US" dirty="0"/>
+          </a:p>
+        </p:txBody>
+      </p:sp>
     </p:spTree>
     <p:extLst>
       <p:ext uri="{BB962C8B-B14F-4D97-AF65-F5344CB8AC3E}">
-        <p14:creationId xmlns:p14="http://schemas.microsoft.com/office/powerpoint/2010/main" val="3646638276"/>
+        <p14:creationId xmlns:p14="http://schemas.microsoft.com/office/powerpoint/2010/main" val="3149226538"/>
       </p:ext>
     </p:extLst>
   </p:cSld>
@@ -7868,7 +4983,7 @@
           <p:cNvPr id="2" name="Title 1">
             <a:extLst>
               <a:ext uri="{FF2B5EF4-FFF2-40B4-BE49-F238E27FC236}">
-                <a16:creationId xmlns:a16="http://schemas.microsoft.com/office/drawing/2014/main" id="{BFA63817-A477-6060-C282-4D0AD8EE8CB1}"/>
+                <a16:creationId xmlns:a16="http://schemas.microsoft.com/office/drawing/2014/main" id="{B5C0701E-9BCC-29F4-9384-35065A0F4768}"/>
               </a:ext>
             </a:extLst>
           </p:cNvPr>
@@ -7879,556 +4994,184 @@
             <p:ph type="title"/>
           </p:nvPr>
         </p:nvSpPr>
-        <p:spPr>
-          <a:xfrm>
-            <a:off x="692727" y="219146"/>
-            <a:ext cx="10515600" cy="1325563"/>
-          </a:xfrm>
-        </p:spPr>
+        <p:spPr/>
+        <p:txBody>
+          <a:bodyPr/>
+          <a:lstStyle/>
+          <a:p>
+            <a:r>
+              <a:rPr lang="en-US" dirty="0"/>
+              <a:t>How are they used?</a:t>
+            </a:r>
+          </a:p>
+        </p:txBody>
+      </p:sp>
+      <p:sp>
+        <p:nvSpPr>
+          <p:cNvPr id="3" name="Content Placeholder 2">
+            <a:extLst>
+              <a:ext uri="{FF2B5EF4-FFF2-40B4-BE49-F238E27FC236}">
+                <a16:creationId xmlns:a16="http://schemas.microsoft.com/office/drawing/2014/main" id="{C08D42F7-A2C0-644D-7F9D-41F63B22AEA6}"/>
+              </a:ext>
+            </a:extLst>
+          </p:cNvPr>
+          <p:cNvSpPr>
+            <a:spLocks noGrp="1"/>
+          </p:cNvSpPr>
+          <p:nvPr>
+            <p:ph idx="1"/>
+          </p:nvPr>
+        </p:nvSpPr>
+        <p:spPr/>
         <p:txBody>
           <a:bodyPr>
-            <a:normAutofit/>
+            <a:normAutofit fontScale="62500" lnSpcReduction="20000"/>
           </a:bodyPr>
           <a:lstStyle/>
           <a:p>
             <a:r>
               <a:rPr lang="en-US" dirty="0"/>
-              <a:t>HSI Design Issues in Nuclear Power</a:t>
-            </a:r>
-            <a:br>
+              <a:t>As documentation for compliance</a:t>
+            </a:r>
+          </a:p>
+          <a:p>
+            <a:r>
               <a:rPr lang="en-US" dirty="0"/>
-            </a:br>
-            <a:r>
-              <a:rPr lang="en-US" sz="2400" dirty="0" err="1"/>
-              <a:t>Kovesdi</a:t>
-            </a:r>
-            <a:r>
-              <a:rPr lang="en-US" sz="2400" dirty="0"/>
-              <a:t>, Joe</a:t>
+              <a:t>Certification</a:t>
+            </a:r>
+          </a:p>
+          <a:p>
+            <a:pPr lvl="1"/>
+            <a:r>
+              <a:rPr lang="en-US" dirty="0"/>
+              <a:t>Healthcare, aviation (</a:t>
+            </a:r>
+            <a:r>
+              <a:rPr lang="en-US" b="1" dirty="0"/>
+              <a:t>DO-178C Certification for software)</a:t>
+            </a:r>
+            <a:r>
+              <a:rPr lang="en-US" dirty="0"/>
+              <a:t>, Consumer Products </a:t>
+            </a:r>
+            <a:r>
+              <a:rPr lang="en-US" b="1" dirty="0"/>
+              <a:t>(UL)</a:t>
+            </a:r>
+          </a:p>
+          <a:p>
+            <a:r>
+              <a:rPr lang="en-US" dirty="0"/>
+              <a:t>Formative evaluation</a:t>
+            </a:r>
+          </a:p>
+          <a:p>
+            <a:pPr lvl="1"/>
+            <a:r>
+              <a:rPr lang="en-US" dirty="0"/>
+              <a:t>Early usability testing (</a:t>
+            </a:r>
+            <a:r>
+              <a:rPr lang="en-US" b="1" dirty="0"/>
+              <a:t>ISO 9241-210, MIL-STD-1472G)</a:t>
             </a:r>
             <a:endParaRPr lang="en-US" dirty="0"/>
           </a:p>
-        </p:txBody>
-      </p:sp>
-      <p:pic>
-        <p:nvPicPr>
-          <p:cNvPr id="4" name="Picture 3">
-            <a:extLst>
-              <a:ext uri="{FF2B5EF4-FFF2-40B4-BE49-F238E27FC236}">
-                <a16:creationId xmlns:a16="http://schemas.microsoft.com/office/drawing/2014/main" id="{0F63650B-FC96-8F25-088F-AF60422A1BFE}"/>
-              </a:ext>
-            </a:extLst>
-          </p:cNvPr>
-          <p:cNvPicPr>
-            <a:picLocks noChangeAspect="1"/>
-          </p:cNvPicPr>
-          <p:nvPr/>
-        </p:nvPicPr>
-        <p:blipFill>
-          <a:blip r:embed="rId2"/>
-          <a:stretch>
-            <a:fillRect/>
-          </a:stretch>
-        </p:blipFill>
-        <p:spPr>
-          <a:xfrm>
-            <a:off x="2556968" y="2899280"/>
-            <a:ext cx="7078063" cy="3096057"/>
-          </a:xfrm>
-          <a:prstGeom prst="rect">
-            <a:avLst/>
-          </a:prstGeom>
-        </p:spPr>
-      </p:pic>
+          <a:p>
+            <a:r>
+              <a:rPr lang="en-US" dirty="0"/>
+              <a:t>User-centered design frameworks</a:t>
+            </a:r>
+          </a:p>
+          <a:p>
+            <a:pPr lvl="1"/>
+            <a:r>
+              <a:rPr lang="en-US" b="1" dirty="0"/>
+              <a:t>ISO 9241-210</a:t>
+            </a:r>
+            <a:r>
+              <a:rPr lang="en-US" dirty="0"/>
+              <a:t>’s "user-centered design process" is used in automotive HMI (Human-Machine Interface) development to align touchscreen layouts with driver expectations.</a:t>
+            </a:r>
+          </a:p>
+          <a:p>
+            <a:pPr lvl="1"/>
+            <a:r>
+              <a:rPr lang="en-US" b="1" dirty="0"/>
+              <a:t>SAE J2944</a:t>
+            </a:r>
+            <a:r>
+              <a:rPr lang="en-US" dirty="0"/>
+              <a:t> (Driver-Vehicle Interaction) helps automakers design infotainment systems that minimize distraction.</a:t>
+            </a:r>
+          </a:p>
+          <a:p>
+            <a:r>
+              <a:rPr lang="en-US" dirty="0"/>
+              <a:t>Design and Engineering</a:t>
+            </a:r>
+          </a:p>
+          <a:p>
+            <a:pPr lvl="1"/>
+            <a:r>
+              <a:rPr lang="en-US" dirty="0"/>
+              <a:t>using anthropometric tables from MIL-STD-1472 for ergonomics</a:t>
+            </a:r>
+          </a:p>
+          <a:p>
+            <a:pPr lvl="1"/>
+            <a:r>
+              <a:rPr lang="en-US" dirty="0"/>
+              <a:t>using NUREG 0700 to design HMI displays</a:t>
+            </a:r>
+          </a:p>
+          <a:p>
+            <a:pPr lvl="1"/>
+            <a:r>
+              <a:rPr lang="en-US" dirty="0"/>
+              <a:t>WCAG2.1 for inclusive design</a:t>
+            </a:r>
+          </a:p>
+          <a:p>
+            <a:pPr lvl="1"/>
+            <a:r>
+              <a:rPr lang="en-US" dirty="0"/>
+              <a:t>Guidelines for future products</a:t>
+            </a:r>
+          </a:p>
+          <a:p>
+            <a:r>
+              <a:rPr lang="en-US" dirty="0"/>
+              <a:t>Litigation</a:t>
+            </a:r>
+          </a:p>
+          <a:p>
+            <a:pPr lvl="1"/>
+            <a:r>
+              <a:rPr lang="en-US" dirty="0"/>
+              <a:t>Show non-compliance of product to applicable standards</a:t>
+            </a:r>
+          </a:p>
+          <a:p>
+            <a:pPr lvl="1"/>
+            <a:endParaRPr lang="en-US" dirty="0"/>
+          </a:p>
+          <a:p>
+            <a:pPr lvl="1"/>
+            <a:endParaRPr lang="en-US" dirty="0"/>
+          </a:p>
+        </p:txBody>
+      </p:sp>
     </p:spTree>
     <p:extLst>
       <p:ext uri="{BB962C8B-B14F-4D97-AF65-F5344CB8AC3E}">
-        <p14:creationId xmlns:p14="http://schemas.microsoft.com/office/powerpoint/2010/main" val="3016931319"/>
+        <p14:creationId xmlns:p14="http://schemas.microsoft.com/office/powerpoint/2010/main" val="3529722676"/>
       </p:ext>
     </p:extLst>
   </p:cSld>
   <p:clrMapOvr>
     <a:masterClrMapping/>
   </p:clrMapOvr>
-</p:sld>
-</file>
-
-<file path=ppt/slides/slide8.xml><?xml version="1.0" encoding="utf-8"?>
-<p:sld xmlns:a="http://schemas.openxmlformats.org/drawingml/2006/main" xmlns:r="http://schemas.openxmlformats.org/officeDocument/2006/relationships" xmlns:p="http://schemas.openxmlformats.org/presentationml/2006/main">
-  <p:cSld>
-    <p:spTree>
-      <p:nvGrpSpPr>
-        <p:cNvPr id="1" name=""/>
-        <p:cNvGrpSpPr/>
-        <p:nvPr/>
-      </p:nvGrpSpPr>
-      <p:grpSpPr>
-        <a:xfrm>
-          <a:off x="0" y="0"/>
-          <a:ext cx="0" cy="0"/>
-          <a:chOff x="0" y="0"/>
-          <a:chExt cx="0" cy="0"/>
-        </a:xfrm>
-      </p:grpSpPr>
-      <p:sp>
-        <p:nvSpPr>
-          <p:cNvPr id="2" name="Title 1">
-            <a:extLst>
-              <a:ext uri="{FF2B5EF4-FFF2-40B4-BE49-F238E27FC236}">
-                <a16:creationId xmlns:a16="http://schemas.microsoft.com/office/drawing/2014/main" id="{AA8004A4-7E30-45E0-4C7D-6447EA5B3BDE}"/>
-              </a:ext>
-            </a:extLst>
-          </p:cNvPr>
-          <p:cNvSpPr>
-            <a:spLocks noGrp="1"/>
-          </p:cNvSpPr>
-          <p:nvPr>
-            <p:ph type="title"/>
-          </p:nvPr>
-        </p:nvSpPr>
-        <p:spPr/>
-        <p:txBody>
-          <a:bodyPr/>
-          <a:lstStyle/>
-          <a:p>
-            <a:endParaRPr lang="en-US"/>
-          </a:p>
-        </p:txBody>
-      </p:sp>
-      <p:sp>
-        <p:nvSpPr>
-          <p:cNvPr id="3" name="Content Placeholder 2">
-            <a:extLst>
-              <a:ext uri="{FF2B5EF4-FFF2-40B4-BE49-F238E27FC236}">
-                <a16:creationId xmlns:a16="http://schemas.microsoft.com/office/drawing/2014/main" id="{2D1AB226-72A1-6DD0-50DD-6EA9864F40F5}"/>
-              </a:ext>
-            </a:extLst>
-          </p:cNvPr>
-          <p:cNvSpPr>
-            <a:spLocks noGrp="1"/>
-          </p:cNvSpPr>
-          <p:nvPr>
-            <p:ph idx="1"/>
-          </p:nvPr>
-        </p:nvSpPr>
-        <p:spPr/>
-        <p:txBody>
-          <a:bodyPr/>
-          <a:lstStyle/>
-          <a:p>
-            <a:endParaRPr lang="en-US"/>
-          </a:p>
-        </p:txBody>
-      </p:sp>
-      <p:pic>
-        <p:nvPicPr>
-          <p:cNvPr id="5" name="Picture 4">
-            <a:extLst>
-              <a:ext uri="{FF2B5EF4-FFF2-40B4-BE49-F238E27FC236}">
-                <a16:creationId xmlns:a16="http://schemas.microsoft.com/office/drawing/2014/main" id="{B68DBEE2-E114-1E58-ABAB-8746A85F6280}"/>
-              </a:ext>
-            </a:extLst>
-          </p:cNvPr>
-          <p:cNvPicPr>
-            <a:picLocks noChangeAspect="1"/>
-          </p:cNvPicPr>
-          <p:nvPr/>
-        </p:nvPicPr>
-        <p:blipFill>
-          <a:blip r:embed="rId2"/>
-          <a:stretch>
-            <a:fillRect/>
-          </a:stretch>
-        </p:blipFill>
-        <p:spPr>
-          <a:xfrm>
-            <a:off x="2156863" y="504417"/>
-            <a:ext cx="7878274" cy="5849166"/>
-          </a:xfrm>
-          <a:prstGeom prst="rect">
-            <a:avLst/>
-          </a:prstGeom>
-        </p:spPr>
-      </p:pic>
-    </p:spTree>
-    <p:extLst>
-      <p:ext uri="{BB962C8B-B14F-4D97-AF65-F5344CB8AC3E}">
-        <p14:creationId xmlns:p14="http://schemas.microsoft.com/office/powerpoint/2010/main" val="3540232655"/>
-      </p:ext>
-    </p:extLst>
-  </p:cSld>
-  <p:clrMapOvr>
-    <a:masterClrMapping/>
-  </p:clrMapOvr>
-</p:sld>
-</file>
-
-<file path=ppt/slides/slide9.xml><?xml version="1.0" encoding="utf-8"?>
-<p:sld xmlns:a="http://schemas.openxmlformats.org/drawingml/2006/main" xmlns:r="http://schemas.openxmlformats.org/officeDocument/2006/relationships" xmlns:p="http://schemas.openxmlformats.org/presentationml/2006/main">
-  <p:cSld>
-    <p:spTree>
-      <p:nvGrpSpPr>
-        <p:cNvPr id="1" name=""/>
-        <p:cNvGrpSpPr/>
-        <p:nvPr/>
-      </p:nvGrpSpPr>
-      <p:grpSpPr>
-        <a:xfrm>
-          <a:off x="0" y="0"/>
-          <a:ext cx="0" cy="0"/>
-          <a:chOff x="0" y="0"/>
-          <a:chExt cx="0" cy="0"/>
-        </a:xfrm>
-      </p:grpSpPr>
-      <p:sp>
-        <p:nvSpPr>
-          <p:cNvPr id="2" name="Title 1">
-            <a:extLst>
-              <a:ext uri="{FF2B5EF4-FFF2-40B4-BE49-F238E27FC236}">
-                <a16:creationId xmlns:a16="http://schemas.microsoft.com/office/drawing/2014/main" id="{9522B0C2-367F-BC49-2DF6-786E9532EF24}"/>
-              </a:ext>
-            </a:extLst>
-          </p:cNvPr>
-          <p:cNvSpPr>
-            <a:spLocks noGrp="1"/>
-          </p:cNvSpPr>
-          <p:nvPr>
-            <p:ph type="title"/>
-          </p:nvPr>
-        </p:nvSpPr>
-        <p:spPr/>
-        <p:txBody>
-          <a:bodyPr/>
-          <a:lstStyle/>
-          <a:p>
-            <a:r>
-              <a:rPr lang="en-US" dirty="0"/>
-              <a:t>Practitioner vs. Researcher</a:t>
-            </a:r>
-          </a:p>
-        </p:txBody>
-      </p:sp>
-      <p:sp>
-        <p:nvSpPr>
-          <p:cNvPr id="3" name="Content Placeholder 2">
-            <a:extLst>
-              <a:ext uri="{FF2B5EF4-FFF2-40B4-BE49-F238E27FC236}">
-                <a16:creationId xmlns:a16="http://schemas.microsoft.com/office/drawing/2014/main" id="{85747D83-8F41-1259-5BA9-EBCACC360208}"/>
-              </a:ext>
-            </a:extLst>
-          </p:cNvPr>
-          <p:cNvSpPr>
-            <a:spLocks noGrp="1"/>
-          </p:cNvSpPr>
-          <p:nvPr>
-            <p:ph idx="1"/>
-          </p:nvPr>
-        </p:nvSpPr>
-        <p:spPr>
-          <a:xfrm>
-            <a:off x="838200" y="1638589"/>
-            <a:ext cx="10515600" cy="4351338"/>
-          </a:xfrm>
-        </p:spPr>
-        <p:txBody>
-          <a:bodyPr/>
-          <a:lstStyle/>
-          <a:p>
-            <a:r>
-              <a:rPr lang="en-US" dirty="0"/>
-              <a:t>Is standards evaluation just heuristic evaluation?</a:t>
-            </a:r>
-          </a:p>
-          <a:p>
-            <a:r>
-              <a:rPr lang="en-US" dirty="0"/>
-              <a:t>Heuristics vs. Empirical Usability Studies</a:t>
-            </a:r>
-          </a:p>
-          <a:p>
-            <a:pPr lvl="1"/>
-            <a:r>
-              <a:rPr lang="en-US" dirty="0"/>
-              <a:t>Justifying exceptions to the rules</a:t>
-            </a:r>
-          </a:p>
-          <a:p>
-            <a:endParaRPr lang="en-US" dirty="0"/>
-          </a:p>
-        </p:txBody>
-      </p:sp>
-      <p:sp>
-        <p:nvSpPr>
-          <p:cNvPr id="4" name="Title 1">
-            <a:extLst>
-              <a:ext uri="{FF2B5EF4-FFF2-40B4-BE49-F238E27FC236}">
-                <a16:creationId xmlns:a16="http://schemas.microsoft.com/office/drawing/2014/main" id="{CD27B473-1126-7923-6DA8-CA889FF96BB9}"/>
-              </a:ext>
-            </a:extLst>
-          </p:cNvPr>
-          <p:cNvSpPr txBox="1">
-            <a:spLocks/>
-          </p:cNvSpPr>
-          <p:nvPr/>
-        </p:nvSpPr>
-        <p:spPr>
-          <a:xfrm>
-            <a:off x="838200" y="3338512"/>
-            <a:ext cx="10515600" cy="1325563"/>
-          </a:xfrm>
-          <a:prstGeom prst="rect">
-            <a:avLst/>
-          </a:prstGeom>
-        </p:spPr>
-        <p:txBody>
-          <a:bodyPr vert="horz" lIns="91440" tIns="45720" rIns="91440" bIns="45720" rtlCol="0" anchor="ctr">
-            <a:normAutofit/>
-          </a:bodyPr>
-          <a:lstStyle>
-            <a:lvl1pPr algn="l" defTabSz="914400" rtl="0" eaLnBrk="1" latinLnBrk="0" hangingPunct="1">
-              <a:lnSpc>
-                <a:spcPct val="90000"/>
-              </a:lnSpc>
-              <a:spcBef>
-                <a:spcPct val="0"/>
-              </a:spcBef>
-              <a:buNone/>
-              <a:defRPr sz="4400" kern="1200">
-                <a:solidFill>
-                  <a:schemeClr val="tx1"/>
-                </a:solidFill>
-                <a:latin typeface="+mj-lt"/>
-                <a:ea typeface="+mj-ea"/>
-                <a:cs typeface="+mj-cs"/>
-              </a:defRPr>
-            </a:lvl1pPr>
-          </a:lstStyle>
-          <a:p>
-            <a:r>
-              <a:rPr lang="en-US" dirty="0"/>
-              <a:t>Practitioner vs. Designer</a:t>
-            </a:r>
-          </a:p>
-        </p:txBody>
-      </p:sp>
-    </p:spTree>
-    <p:extLst>
-      <p:ext uri="{BB962C8B-B14F-4D97-AF65-F5344CB8AC3E}">
-        <p14:creationId xmlns:p14="http://schemas.microsoft.com/office/powerpoint/2010/main" val="351158506"/>
-      </p:ext>
-    </p:extLst>
-  </p:cSld>
-  <p:clrMapOvr>
-    <a:masterClrMapping/>
-  </p:clrMapOvr>
-  <p:timing>
-    <p:tnLst>
-      <p:par>
-        <p:cTn id="1" dur="indefinite" restart="never" nodeType="tmRoot">
-          <p:childTnLst>
-            <p:seq concurrent="1" nextAc="seek">
-              <p:cTn id="2" dur="indefinite" nodeType="mainSeq">
-                <p:childTnLst>
-                  <p:par>
-                    <p:cTn id="3" fill="hold">
-                      <p:stCondLst>
-                        <p:cond delay="indefinite"/>
-                      </p:stCondLst>
-                      <p:childTnLst>
-                        <p:par>
-                          <p:cTn id="4" fill="hold">
-                            <p:stCondLst>
-                              <p:cond delay="0"/>
-                            </p:stCondLst>
-                            <p:childTnLst>
-                              <p:par>
-                                <p:cTn id="5" presetID="1" presetClass="entr" presetSubtype="0" fill="hold" grpId="0" nodeType="clickEffect">
-                                  <p:stCondLst>
-                                    <p:cond delay="0"/>
-                                  </p:stCondLst>
-                                  <p:childTnLst>
-                                    <p:set>
-                                      <p:cBhvr>
-                                        <p:cTn id="6" dur="1" fill="hold">
-                                          <p:stCondLst>
-                                            <p:cond delay="0"/>
-                                          </p:stCondLst>
-                                        </p:cTn>
-                                        <p:tgtEl>
-                                          <p:spTgt spid="3">
-                                            <p:txEl>
-                                              <p:pRg st="0" end="0"/>
-                                            </p:txEl>
-                                          </p:spTgt>
-                                        </p:tgtEl>
-                                        <p:attrNameLst>
-                                          <p:attrName>style.visibility</p:attrName>
-                                        </p:attrNameLst>
-                                      </p:cBhvr>
-                                      <p:to>
-                                        <p:strVal val="visible"/>
-                                      </p:to>
-                                    </p:set>
-                                  </p:childTnLst>
-                                </p:cTn>
-                              </p:par>
-                            </p:childTnLst>
-                          </p:cTn>
-                        </p:par>
-                      </p:childTnLst>
-                    </p:cTn>
-                  </p:par>
-                  <p:par>
-                    <p:cTn id="7" fill="hold">
-                      <p:stCondLst>
-                        <p:cond delay="indefinite"/>
-                      </p:stCondLst>
-                      <p:childTnLst>
-                        <p:par>
-                          <p:cTn id="8" fill="hold">
-                            <p:stCondLst>
-                              <p:cond delay="0"/>
-                            </p:stCondLst>
-                            <p:childTnLst>
-                              <p:par>
-                                <p:cTn id="9" presetID="1" presetClass="entr" presetSubtype="0" fill="hold" grpId="0" nodeType="clickEffect">
-                                  <p:stCondLst>
-                                    <p:cond delay="0"/>
-                                  </p:stCondLst>
-                                  <p:childTnLst>
-                                    <p:set>
-                                      <p:cBhvr>
-                                        <p:cTn id="10" dur="1" fill="hold">
-                                          <p:stCondLst>
-                                            <p:cond delay="0"/>
-                                          </p:stCondLst>
-                                        </p:cTn>
-                                        <p:tgtEl>
-                                          <p:spTgt spid="3">
-                                            <p:txEl>
-                                              <p:pRg st="1" end="1"/>
-                                            </p:txEl>
-                                          </p:spTgt>
-                                        </p:tgtEl>
-                                        <p:attrNameLst>
-                                          <p:attrName>style.visibility</p:attrName>
-                                        </p:attrNameLst>
-                                      </p:cBhvr>
-                                      <p:to>
-                                        <p:strVal val="visible"/>
-                                      </p:to>
-                                    </p:set>
-                                  </p:childTnLst>
-                                </p:cTn>
-                              </p:par>
-                              <p:par>
-                                <p:cTn id="11" presetID="1" presetClass="entr" presetSubtype="0" fill="hold" grpId="0" nodeType="withEffect">
-                                  <p:stCondLst>
-                                    <p:cond delay="0"/>
-                                  </p:stCondLst>
-                                  <p:childTnLst>
-                                    <p:set>
-                                      <p:cBhvr>
-                                        <p:cTn id="12" dur="1" fill="hold">
-                                          <p:stCondLst>
-                                            <p:cond delay="0"/>
-                                          </p:stCondLst>
-                                        </p:cTn>
-                                        <p:tgtEl>
-                                          <p:spTgt spid="3">
-                                            <p:txEl>
-                                              <p:pRg st="2" end="2"/>
-                                            </p:txEl>
-                                          </p:spTgt>
-                                        </p:tgtEl>
-                                        <p:attrNameLst>
-                                          <p:attrName>style.visibility</p:attrName>
-                                        </p:attrNameLst>
-                                      </p:cBhvr>
-                                      <p:to>
-                                        <p:strVal val="visible"/>
-                                      </p:to>
-                                    </p:set>
-                                  </p:childTnLst>
-                                </p:cTn>
-                              </p:par>
-                            </p:childTnLst>
-                          </p:cTn>
-                        </p:par>
-                      </p:childTnLst>
-                    </p:cTn>
-                  </p:par>
-                  <p:par>
-                    <p:cTn id="13" fill="hold">
-                      <p:stCondLst>
-                        <p:cond delay="indefinite"/>
-                      </p:stCondLst>
-                      <p:childTnLst>
-                        <p:par>
-                          <p:cTn id="14" fill="hold">
-                            <p:stCondLst>
-                              <p:cond delay="0"/>
-                            </p:stCondLst>
-                            <p:childTnLst>
-                              <p:par>
-                                <p:cTn id="15" presetID="1" presetClass="entr" presetSubtype="0" fill="hold" grpId="0" nodeType="clickEffect">
-                                  <p:stCondLst>
-                                    <p:cond delay="0"/>
-                                  </p:stCondLst>
-                                  <p:childTnLst>
-                                    <p:set>
-                                      <p:cBhvr>
-                                        <p:cTn id="16" dur="1" fill="hold">
-                                          <p:stCondLst>
-                                            <p:cond delay="0"/>
-                                          </p:stCondLst>
-                                        </p:cTn>
-                                        <p:tgtEl>
-                                          <p:spTgt spid="4"/>
-                                        </p:tgtEl>
-                                        <p:attrNameLst>
-                                          <p:attrName>style.visibility</p:attrName>
-                                        </p:attrNameLst>
-                                      </p:cBhvr>
-                                      <p:to>
-                                        <p:strVal val="visible"/>
-                                      </p:to>
-                                    </p:set>
-                                  </p:childTnLst>
-                                </p:cTn>
-                              </p:par>
-                            </p:childTnLst>
-                          </p:cTn>
-                        </p:par>
-                      </p:childTnLst>
-                    </p:cTn>
-                  </p:par>
-                </p:childTnLst>
-              </p:cTn>
-              <p:prevCondLst>
-                <p:cond evt="onPrev" delay="0">
-                  <p:tgtEl>
-                    <p:sldTgt/>
-                  </p:tgtEl>
-                </p:cond>
-              </p:prevCondLst>
-              <p:nextCondLst>
-                <p:cond evt="onNext" delay="0">
-                  <p:tgtEl>
-                    <p:sldTgt/>
-                  </p:tgtEl>
-                </p:cond>
-              </p:nextCondLst>
-            </p:seq>
-          </p:childTnLst>
-        </p:cTn>
-      </p:par>
-    </p:tnLst>
-    <p:bldLst>
-      <p:bldP spid="3" grpId="0" build="p"/>
-      <p:bldP spid="4" grpId="0"/>
-    </p:bldLst>
-  </p:timing>
 </p:sld>
 </file>
 
